--- a/slides/05_games.pptx
+++ b/slides/05_games.pptx
@@ -5,7 +5,7 @@
     <p:sldMasterId id="2147483708" r:id="rId1"/>
   </p:sldMasterIdLst>
   <p:notesMasterIdLst>
-    <p:notesMasterId r:id="rId51"/>
+    <p:notesMasterId r:id="rId57"/>
   </p:notesMasterIdLst>
   <p:sldIdLst>
     <p:sldId id="256" r:id="rId2"/>
@@ -20,43 +20,49 @@
     <p:sldId id="260" r:id="rId11"/>
     <p:sldId id="301" r:id="rId12"/>
     <p:sldId id="264" r:id="rId13"/>
-    <p:sldId id="270" r:id="rId14"/>
-    <p:sldId id="398" r:id="rId15"/>
-    <p:sldId id="271" r:id="rId16"/>
-    <p:sldId id="294" r:id="rId17"/>
-    <p:sldId id="272" r:id="rId18"/>
-    <p:sldId id="306" r:id="rId19"/>
-    <p:sldId id="274" r:id="rId20"/>
-    <p:sldId id="403" r:id="rId21"/>
-    <p:sldId id="275" r:id="rId22"/>
-    <p:sldId id="302" r:id="rId23"/>
-    <p:sldId id="276" r:id="rId24"/>
-    <p:sldId id="397" r:id="rId25"/>
-    <p:sldId id="305" r:id="rId26"/>
-    <p:sldId id="307" r:id="rId27"/>
-    <p:sldId id="399" r:id="rId28"/>
-    <p:sldId id="400" r:id="rId29"/>
-    <p:sldId id="277" r:id="rId30"/>
-    <p:sldId id="404" r:id="rId31"/>
-    <p:sldId id="289" r:id="rId32"/>
-    <p:sldId id="297" r:id="rId33"/>
-    <p:sldId id="278" r:id="rId34"/>
-    <p:sldId id="298" r:id="rId35"/>
-    <p:sldId id="401" r:id="rId36"/>
-    <p:sldId id="279" r:id="rId37"/>
-    <p:sldId id="280" r:id="rId38"/>
-    <p:sldId id="281" r:id="rId39"/>
-    <p:sldId id="304" r:id="rId40"/>
-    <p:sldId id="282" r:id="rId41"/>
-    <p:sldId id="284" r:id="rId42"/>
-    <p:sldId id="406" r:id="rId43"/>
-    <p:sldId id="283" r:id="rId44"/>
-    <p:sldId id="402" r:id="rId45"/>
-    <p:sldId id="286" r:id="rId46"/>
-    <p:sldId id="287" r:id="rId47"/>
-    <p:sldId id="300" r:id="rId48"/>
-    <p:sldId id="405" r:id="rId49"/>
-    <p:sldId id="288" r:id="rId50"/>
+    <p:sldId id="486" r:id="rId14"/>
+    <p:sldId id="270" r:id="rId15"/>
+    <p:sldId id="398" r:id="rId16"/>
+    <p:sldId id="271" r:id="rId17"/>
+    <p:sldId id="294" r:id="rId18"/>
+    <p:sldId id="272" r:id="rId19"/>
+    <p:sldId id="306" r:id="rId20"/>
+    <p:sldId id="274" r:id="rId21"/>
+    <p:sldId id="487" r:id="rId22"/>
+    <p:sldId id="403" r:id="rId23"/>
+    <p:sldId id="275" r:id="rId24"/>
+    <p:sldId id="302" r:id="rId25"/>
+    <p:sldId id="276" r:id="rId26"/>
+    <p:sldId id="397" r:id="rId27"/>
+    <p:sldId id="305" r:id="rId28"/>
+    <p:sldId id="307" r:id="rId29"/>
+    <p:sldId id="488" r:id="rId30"/>
+    <p:sldId id="399" r:id="rId31"/>
+    <p:sldId id="400" r:id="rId32"/>
+    <p:sldId id="277" r:id="rId33"/>
+    <p:sldId id="404" r:id="rId34"/>
+    <p:sldId id="289" r:id="rId35"/>
+    <p:sldId id="297" r:id="rId36"/>
+    <p:sldId id="489" r:id="rId37"/>
+    <p:sldId id="278" r:id="rId38"/>
+    <p:sldId id="298" r:id="rId39"/>
+    <p:sldId id="401" r:id="rId40"/>
+    <p:sldId id="279" r:id="rId41"/>
+    <p:sldId id="280" r:id="rId42"/>
+    <p:sldId id="281" r:id="rId43"/>
+    <p:sldId id="304" r:id="rId44"/>
+    <p:sldId id="490" r:id="rId45"/>
+    <p:sldId id="282" r:id="rId46"/>
+    <p:sldId id="284" r:id="rId47"/>
+    <p:sldId id="491" r:id="rId48"/>
+    <p:sldId id="406" r:id="rId49"/>
+    <p:sldId id="283" r:id="rId50"/>
+    <p:sldId id="402" r:id="rId51"/>
+    <p:sldId id="286" r:id="rId52"/>
+    <p:sldId id="287" r:id="rId53"/>
+    <p:sldId id="300" r:id="rId54"/>
+    <p:sldId id="405" r:id="rId55"/>
+    <p:sldId id="288" r:id="rId56"/>
   </p:sldIdLst>
   <p:sldSz cx="9144000" cy="6858000" type="screen4x3"/>
   <p:notesSz cx="7315200" cy="9601200"/>
@@ -176,6 +182,7 @@
             <p14:sldId id="260"/>
             <p14:sldId id="301"/>
             <p14:sldId id="264"/>
+            <p14:sldId id="486"/>
           </p14:sldIdLst>
         </p14:section>
         <p14:section name="Minimax Search" id="{BE4E356D-5995-40BA-BA7E-7B6F0663D408}">
@@ -187,6 +194,7 @@
             <p14:sldId id="272"/>
             <p14:sldId id="306"/>
             <p14:sldId id="274"/>
+            <p14:sldId id="487"/>
           </p14:sldIdLst>
         </p14:section>
         <p14:section name="Alpha-Beta Pruning" id="{6D57602A-60C7-4426-BEC3-E20B503B57F8}">
@@ -198,6 +206,7 @@
             <p14:sldId id="397"/>
             <p14:sldId id="305"/>
             <p14:sldId id="307"/>
+            <p14:sldId id="488"/>
             <p14:sldId id="399"/>
             <p14:sldId id="400"/>
           </p14:sldIdLst>
@@ -208,6 +217,7 @@
             <p14:sldId id="404"/>
             <p14:sldId id="289"/>
             <p14:sldId id="297"/>
+            <p14:sldId id="489"/>
             <p14:sldId id="278"/>
             <p14:sldId id="298"/>
             <p14:sldId id="401"/>
@@ -219,8 +229,10 @@
             <p14:sldId id="280"/>
             <p14:sldId id="281"/>
             <p14:sldId id="304"/>
+            <p14:sldId id="490"/>
             <p14:sldId id="282"/>
             <p14:sldId id="284"/>
+            <p14:sldId id="491"/>
             <p14:sldId id="406"/>
             <p14:sldId id="283"/>
             <p14:sldId id="402"/>
@@ -5555,7 +5567,7 @@
             <a:fld id="{46E2045A-045A-4BC7-A4D3-1395440B1C3D}" type="datetimeFigureOut">
               <a:rPr lang="en-US" smtClean="0"/>
               <a:pPr/>
-              <a:t>5/14/2026</a:t>
+              <a:t>10/23/2026</a:t>
             </a:fld>
             <a:endParaRPr lang="en-US"/>
           </a:p>
@@ -5971,7 +5983,7 @@
             <a:fld id="{CA8F1D18-9638-4932-8910-B6EDCB447AA8}" type="slidenum">
               <a:rPr lang="en-US" smtClean="0"/>
               <a:pPr/>
-              <a:t>30</a:t>
+              <a:t>33</a:t>
             </a:fld>
             <a:endParaRPr lang="en-US"/>
           </a:p>
@@ -6056,7 +6068,7 @@
             <a:fld id="{CA8F1D18-9638-4932-8910-B6EDCB447AA8}" type="slidenum">
               <a:rPr lang="en-US" smtClean="0"/>
               <a:pPr/>
-              <a:t>48</a:t>
+              <a:t>54</a:t>
             </a:fld>
             <a:endParaRPr lang="en-US"/>
           </a:p>
@@ -11746,6 +11758,143 @@
 <file path=ppt/slides/slide13.xml><?xml version="1.0" encoding="utf-8"?>
 <p:sld xmlns:a="http://schemas.openxmlformats.org/drawingml/2006/main" xmlns:r="http://schemas.openxmlformats.org/officeDocument/2006/relationships" xmlns:p="http://schemas.openxmlformats.org/presentationml/2006/main">
   <p:cSld>
+    <p:spTree>
+      <p:nvGrpSpPr>
+        <p:cNvPr id="1" name=""/>
+        <p:cNvGrpSpPr/>
+        <p:nvPr/>
+      </p:nvGrpSpPr>
+      <p:grpSpPr>
+        <a:xfrm>
+          <a:off x="0" y="0"/>
+          <a:ext cx="0" cy="0"/>
+          <a:chOff x="0" y="0"/>
+          <a:chExt cx="0" cy="0"/>
+        </a:xfrm>
+      </p:grpSpPr>
+      <p:sp>
+        <p:nvSpPr>
+          <p:cNvPr id="4" name="Title 3">
+            <a:extLst>
+              <a:ext uri="{FF2B5EF4-FFF2-40B4-BE49-F238E27FC236}">
+                <a16:creationId xmlns:a16="http://schemas.microsoft.com/office/drawing/2014/main" id="{24CD2877-1046-6123-CF1E-BE9F2D8536CB}"/>
+              </a:ext>
+            </a:extLst>
+          </p:cNvPr>
+          <p:cNvSpPr>
+            <a:spLocks noGrp="1"/>
+          </p:cNvSpPr>
+          <p:nvPr>
+            <p:ph type="title"/>
+          </p:nvPr>
+        </p:nvSpPr>
+        <p:spPr>
+          <a:xfrm>
+            <a:off x="829115" y="2931914"/>
+            <a:ext cx="7886700" cy="876035"/>
+          </a:xfrm>
+        </p:spPr>
+        <p:txBody>
+          <a:bodyPr>
+            <a:noAutofit/>
+          </a:bodyPr>
+          <a:lstStyle/>
+          <a:p>
+            <a:r>
+              <a:rPr lang="en-US" sz="3200" b="1" dirty="0">
+                <a:latin typeface="+mn-lt"/>
+              </a:rPr>
+              <a:t>Code example</a:t>
+            </a:r>
+            <a:r>
+              <a:rPr lang="en-US" sz="3200" dirty="0">
+                <a:latin typeface="+mn-lt"/>
+              </a:rPr>
+              <a:t>: </a:t>
+            </a:r>
+            <a:br>
+              <a:rPr lang="en-US" sz="3200" dirty="0">
+                <a:latin typeface="+mn-lt"/>
+              </a:rPr>
+            </a:br>
+            <a:r>
+              <a:rPr lang="en-US" sz="3200" dirty="0">
+                <a:latin typeface="+mn-lt"/>
+              </a:rPr>
+              <a:t>Frequentist vs. Bayesian Inference: Coin Toss</a:t>
+            </a:r>
+            <a:br>
+              <a:rPr lang="en-US" sz="3200" dirty="0">
+                <a:latin typeface="+mn-lt"/>
+              </a:rPr>
+            </a:br>
+            <a:endParaRPr lang="en-US" sz="3200" dirty="0">
+              <a:latin typeface="+mn-lt"/>
+            </a:endParaRPr>
+          </a:p>
+        </p:txBody>
+      </p:sp>
+      <p:sp>
+        <p:nvSpPr>
+          <p:cNvPr id="5" name="TextBox 4">
+            <a:extLst>
+              <a:ext uri="{FF2B5EF4-FFF2-40B4-BE49-F238E27FC236}">
+                <a16:creationId xmlns:a16="http://schemas.microsoft.com/office/drawing/2014/main" id="{5AA484FF-058C-4694-424C-0B3B26DF9F45}"/>
+              </a:ext>
+            </a:extLst>
+          </p:cNvPr>
+          <p:cNvSpPr txBox="1"/>
+          <p:nvPr/>
+        </p:nvSpPr>
+        <p:spPr>
+          <a:xfrm>
+            <a:off x="893299" y="5365946"/>
+            <a:ext cx="6608298" cy="253916"/>
+          </a:xfrm>
+          <a:prstGeom prst="rect">
+            <a:avLst/>
+          </a:prstGeom>
+          <a:noFill/>
+        </p:spPr>
+        <p:txBody>
+          <a:bodyPr wrap="square" rtlCol="0">
+            <a:spAutoFit/>
+          </a:bodyPr>
+          <a:lstStyle/>
+          <a:p>
+            <a:r>
+              <a:rPr lang="en-US" sz="1050" dirty="0"/>
+              <a:t>See Code on </a:t>
+            </a:r>
+            <a:r>
+              <a:rPr lang="en-US" sz="1050" dirty="0">
+                <a:hlinkClick r:id="rId2"/>
+              </a:rPr>
+              <a:t>https://michael.hahsler.net/Introduction_to_Artificial_Intelligence/</a:t>
+            </a:r>
+            <a:r>
+              <a:rPr lang="en-US" sz="1050" dirty="0"/>
+              <a:t> </a:t>
+            </a:r>
+          </a:p>
+        </p:txBody>
+      </p:sp>
+    </p:spTree>
+    <p:extLst>
+      <p:ext uri="{BB962C8B-B14F-4D97-AF65-F5344CB8AC3E}">
+        <p14:creationId xmlns:p14="http://schemas.microsoft.com/office/powerpoint/2010/main" val="190193640"/>
+      </p:ext>
+    </p:extLst>
+  </p:cSld>
+  <p:clrMapOvr>
+    <a:masterClrMapping/>
+  </p:clrMapOvr>
+</p:sld>
+</file>
+
+<file path=ppt/slides/slide14.xml><?xml version="1.0" encoding="utf-8"?>
+<p:sld xmlns:a="http://schemas.openxmlformats.org/drawingml/2006/main" xmlns:r="http://schemas.openxmlformats.org/officeDocument/2006/relationships" xmlns:p="http://schemas.openxmlformats.org/presentationml/2006/main">
+  <p:cSld>
     <p:bg>
       <p:bgPr>
         <a:solidFill>
@@ -12044,7 +12193,7 @@
 </p:sld>
 </file>
 
-<file path=ppt/slides/slide14.xml><?xml version="1.0" encoding="utf-8"?>
+<file path=ppt/slides/slide15.xml><?xml version="1.0" encoding="utf-8"?>
 <p:sld xmlns:a="http://schemas.openxmlformats.org/drawingml/2006/main" xmlns:r="http://schemas.openxmlformats.org/officeDocument/2006/relationships" xmlns:p="http://schemas.openxmlformats.org/presentationml/2006/main">
   <p:cSld>
     <p:spTree>
@@ -12803,7 +12952,7 @@
 </p:sld>
 </file>
 
-<file path=ppt/slides/slide15.xml><?xml version="1.0" encoding="utf-8"?>
+<file path=ppt/slides/slide16.xml><?xml version="1.0" encoding="utf-8"?>
 <p:sld xmlns:a="http://schemas.openxmlformats.org/drawingml/2006/main" xmlns:r="http://schemas.openxmlformats.org/officeDocument/2006/relationships" xmlns:p="http://schemas.openxmlformats.org/presentationml/2006/main">
   <p:cSld>
     <p:spTree>
@@ -12942,7 +13091,7 @@
                     <m:oMathParaPr>
                       <m:jc m:val="left"/>
                     </m:oMathParaPr>
-                    <m:oMath xmlns:m="http://schemas.openxmlformats.org/officeDocument/2006/math">
+                    <m:oMath>
                       <m:r>
                         <a:rPr lang="en-US" sz="1900" b="0" i="1" smtClean="0">
                           <a:latin typeface="Cambria Math" panose="02040503050406030204" pitchFamily="18" charset="0"/>
@@ -13028,16 +13177,7 @@
                                 <a:rPr lang="en-US" sz="1900" b="0" i="0" smtClean="0">
                                   <a:latin typeface="Cambria Math" panose="02040503050406030204" pitchFamily="18" charset="0"/>
                                 </a:rPr>
-                                <m:t>                                                          </m:t>
-                              </m:r>
-                              <m:r>
-                                <m:rPr>
-                                  <m:nor/>
-                                </m:rPr>
-                                <a:rPr lang="en-US" sz="1900" b="0" i="0" smtClean="0">
-                                  <a:latin typeface="Cambria Math" panose="02040503050406030204" pitchFamily="18" charset="0"/>
-                                </a:rPr>
-                                <m:t>if</m:t>
+                                <m:t>                                                          if</m:t>
                               </m:r>
                               <m:r>
                                 <a:rPr lang="en-US" sz="1900" b="0" i="1" smtClean="0">
@@ -13083,7 +13223,7 @@
                                   <m:limLow>
                                     <m:limLowPr>
                                       <m:ctrlPr>
-                                        <a:rPr lang="en-US" sz="1900" i="1">
+                                        <a:rPr lang="en-US" sz="1900">
                                           <a:latin typeface="Cambria Math" panose="02040503050406030204" pitchFamily="18" charset="0"/>
                                         </a:rPr>
                                       </m:ctrlPr>
@@ -13200,16 +13340,7 @@
                                 <a:rPr lang="en-US" sz="1900" b="0" i="0" smtClean="0">
                                   <a:latin typeface="Cambria Math" panose="02040503050406030204" pitchFamily="18" charset="0"/>
                                 </a:rPr>
-                                <m:t>           </m:t>
-                              </m:r>
-                              <m:r>
-                                <m:rPr>
-                                  <m:nor/>
-                                </m:rPr>
-                                <a:rPr lang="en-US" sz="1900" b="0" i="0" smtClean="0">
-                                  <a:latin typeface="Cambria Math" panose="02040503050406030204" pitchFamily="18" charset="0"/>
-                                </a:rPr>
-                                <m:t>if</m:t>
+                                <m:t>           if</m:t>
                               </m:r>
                               <m:r>
                                 <a:rPr lang="en-US" sz="1900" b="0" i="1" smtClean="0">
@@ -13240,7 +13371,7 @@
                               <m:func>
                                 <m:funcPr>
                                   <m:ctrlPr>
-                                    <a:rPr lang="en-US" sz="1900" b="0" i="1" smtClean="0">
+                                    <a:rPr lang="en-US" sz="1900" i="1">
                                       <a:latin typeface="Cambria Math" panose="02040503050406030204" pitchFamily="18" charset="0"/>
                                     </a:rPr>
                                   </m:ctrlPr>
@@ -13249,7 +13380,7 @@
                                   <m:limLow>
                                     <m:limLowPr>
                                       <m:ctrlPr>
-                                        <a:rPr lang="en-US" sz="1900" b="0" i="1" smtClean="0">
+                                        <a:rPr lang="en-US" sz="1900">
                                           <a:latin typeface="Cambria Math" panose="02040503050406030204" pitchFamily="18" charset="0"/>
                                         </a:rPr>
                                       </m:ctrlPr>
@@ -13504,7 +13635,7 @@
 </p:sld>
 </file>
 
-<file path=ppt/slides/slide16.xml><?xml version="1.0" encoding="utf-8"?>
+<file path=ppt/slides/slide17.xml><?xml version="1.0" encoding="utf-8"?>
 <p:sld xmlns:a="http://schemas.openxmlformats.org/drawingml/2006/main" xmlns:r="http://schemas.openxmlformats.org/officeDocument/2006/relationships" xmlns:p="http://schemas.openxmlformats.org/presentationml/2006/main">
   <p:cSld>
     <p:spTree>
@@ -15802,7 +15933,7 @@
 </p:sld>
 </file>
 
-<file path=ppt/slides/slide17.xml><?xml version="1.0" encoding="utf-8"?>
+<file path=ppt/slides/slide18.xml><?xml version="1.0" encoding="utf-8"?>
 <p:sld xmlns:a="http://schemas.openxmlformats.org/drawingml/2006/main" xmlns:r="http://schemas.openxmlformats.org/officeDocument/2006/relationships" xmlns:p="http://schemas.openxmlformats.org/presentationml/2006/main">
   <p:cSld>
     <p:spTree>
@@ -16568,7 +16699,7 @@
 </p:sld>
 </file>
 
-<file path=ppt/slides/slide18.xml><?xml version="1.0" encoding="utf-8"?>
+<file path=ppt/slides/slide19.xml><?xml version="1.0" encoding="utf-8"?>
 <p:sld xmlns:a="http://schemas.openxmlformats.org/drawingml/2006/main" xmlns:r="http://schemas.openxmlformats.org/officeDocument/2006/relationships" xmlns:p="http://schemas.openxmlformats.org/presentationml/2006/main">
   <p:cSld>
     <p:spTree>
@@ -17912,10 +18043,7 @@
                   <a:pPr/>
                   <a14:m>
                     <m:oMathPara xmlns:m="http://schemas.openxmlformats.org/officeDocument/2006/math">
-                      <m:oMathParaPr>
-                        <m:jc m:val="centerGroup"/>
-                      </m:oMathParaPr>
-                      <m:oMath xmlns:m="http://schemas.openxmlformats.org/officeDocument/2006/math">
+                      <m:oMath>
                         <m:sSub>
                           <m:sSubPr>
                             <m:ctrlPr>
@@ -18027,10 +18155,7 @@
                   <a:pPr/>
                   <a14:m>
                     <m:oMathPara xmlns:m="http://schemas.openxmlformats.org/officeDocument/2006/math">
-                      <m:oMathParaPr>
-                        <m:jc m:val="centerGroup"/>
-                      </m:oMathParaPr>
-                      <m:oMath xmlns:m="http://schemas.openxmlformats.org/officeDocument/2006/math">
+                      <m:oMath>
                         <m:sSub>
                           <m:sSubPr>
                             <m:ctrlPr>
@@ -18142,10 +18267,7 @@
                   <a:pPr/>
                   <a14:m>
                     <m:oMathPara xmlns:m="http://schemas.openxmlformats.org/officeDocument/2006/math">
-                      <m:oMathParaPr>
-                        <m:jc m:val="centerGroup"/>
-                      </m:oMathParaPr>
-                      <m:oMath xmlns:m="http://schemas.openxmlformats.org/officeDocument/2006/math">
+                      <m:oMath>
                         <m:sSub>
                           <m:sSubPr>
                             <m:ctrlPr>
@@ -18257,10 +18379,7 @@
                   <a:pPr/>
                   <a14:m>
                     <m:oMathPara xmlns:m="http://schemas.openxmlformats.org/officeDocument/2006/math">
-                      <m:oMathParaPr>
-                        <m:jc m:val="centerGroup"/>
-                      </m:oMathParaPr>
-                      <m:oMath xmlns:m="http://schemas.openxmlformats.org/officeDocument/2006/math">
+                      <m:oMath>
                         <m:sSub>
                           <m:sSubPr>
                             <m:ctrlPr>
@@ -18372,10 +18491,7 @@
                   <a:pPr/>
                   <a14:m>
                     <m:oMathPara xmlns:m="http://schemas.openxmlformats.org/officeDocument/2006/math">
-                      <m:oMathParaPr>
-                        <m:jc m:val="centerGroup"/>
-                      </m:oMathParaPr>
-                      <m:oMath xmlns:m="http://schemas.openxmlformats.org/officeDocument/2006/math">
+                      <m:oMath>
                         <m:sSub>
                           <m:sSubPr>
                             <m:ctrlPr>
@@ -18487,10 +18603,7 @@
                   <a:pPr/>
                   <a14:m>
                     <m:oMathPara xmlns:m="http://schemas.openxmlformats.org/officeDocument/2006/math">
-                      <m:oMathParaPr>
-                        <m:jc m:val="centerGroup"/>
-                      </m:oMathParaPr>
-                      <m:oMath xmlns:m="http://schemas.openxmlformats.org/officeDocument/2006/math">
+                      <m:oMath>
                         <m:sSub>
                           <m:sSubPr>
                             <m:ctrlPr>
@@ -18602,10 +18715,7 @@
                   <a:pPr/>
                   <a14:m>
                     <m:oMathPara xmlns:m="http://schemas.openxmlformats.org/officeDocument/2006/math">
-                      <m:oMathParaPr>
-                        <m:jc m:val="centerGroup"/>
-                      </m:oMathParaPr>
-                      <m:oMath xmlns:m="http://schemas.openxmlformats.org/officeDocument/2006/math">
+                      <m:oMath>
                         <m:sSub>
                           <m:sSubPr>
                             <m:ctrlPr>
@@ -18717,10 +18827,7 @@
                   <a:pPr/>
                   <a14:m>
                     <m:oMathPara xmlns:m="http://schemas.openxmlformats.org/officeDocument/2006/math">
-                      <m:oMathParaPr>
-                        <m:jc m:val="centerGroup"/>
-                      </m:oMathParaPr>
-                      <m:oMath xmlns:m="http://schemas.openxmlformats.org/officeDocument/2006/math">
+                      <m:oMath>
                         <m:sSub>
                           <m:sSubPr>
                             <m:ctrlPr>
@@ -18832,10 +18939,7 @@
                   <a:pPr/>
                   <a14:m>
                     <m:oMathPara xmlns:m="http://schemas.openxmlformats.org/officeDocument/2006/math">
-                      <m:oMathParaPr>
-                        <m:jc m:val="centerGroup"/>
-                      </m:oMathParaPr>
-                      <m:oMath xmlns:m="http://schemas.openxmlformats.org/officeDocument/2006/math">
+                      <m:oMath>
                         <m:sSub>
                           <m:sSubPr>
                             <m:ctrlPr>
@@ -18947,10 +19051,7 @@
                   <a:pPr/>
                   <a14:m>
                     <m:oMathPara xmlns:m="http://schemas.openxmlformats.org/officeDocument/2006/math">
-                      <m:oMathParaPr>
-                        <m:jc m:val="centerGroup"/>
-                      </m:oMathParaPr>
-                      <m:oMath xmlns:m="http://schemas.openxmlformats.org/officeDocument/2006/math">
+                      <m:oMath>
                         <m:sSub>
                           <m:sSubPr>
                             <m:ctrlPr>
@@ -19062,10 +19163,7 @@
                   <a:pPr/>
                   <a14:m>
                     <m:oMathPara xmlns:m="http://schemas.openxmlformats.org/officeDocument/2006/math">
-                      <m:oMathParaPr>
-                        <m:jc m:val="centerGroup"/>
-                      </m:oMathParaPr>
-                      <m:oMath xmlns:m="http://schemas.openxmlformats.org/officeDocument/2006/math">
+                      <m:oMath>
                         <m:sSub>
                           <m:sSubPr>
                             <m:ctrlPr>
@@ -19177,10 +19275,7 @@
                   <a:pPr/>
                   <a14:m>
                     <m:oMathPara xmlns:m="http://schemas.openxmlformats.org/officeDocument/2006/math">
-                      <m:oMathParaPr>
-                        <m:jc m:val="centerGroup"/>
-                      </m:oMathParaPr>
-                      <m:oMath xmlns:m="http://schemas.openxmlformats.org/officeDocument/2006/math">
+                      <m:oMath>
                         <m:sSub>
                           <m:sSubPr>
                             <m:ctrlPr>
@@ -19661,7 +19756,99 @@
 </p:sld>
 </file>
 
-<file path=ppt/slides/slide19.xml><?xml version="1.0" encoding="utf-8"?>
+<file path=ppt/slides/slide2.xml><?xml version="1.0" encoding="utf-8"?>
+<p:sld xmlns:a="http://schemas.openxmlformats.org/drawingml/2006/main" xmlns:r="http://schemas.openxmlformats.org/officeDocument/2006/relationships" xmlns:p="http://schemas.openxmlformats.org/presentationml/2006/main">
+  <p:cSld>
+    <p:spTree>
+      <p:nvGrpSpPr>
+        <p:cNvPr id="1" name=""/>
+        <p:cNvGrpSpPr/>
+        <p:nvPr/>
+      </p:nvGrpSpPr>
+      <p:grpSpPr>
+        <a:xfrm>
+          <a:off x="0" y="0"/>
+          <a:ext cx="0" cy="0"/>
+          <a:chOff x="0" y="0"/>
+          <a:chExt cx="0" cy="0"/>
+        </a:xfrm>
+      </p:grpSpPr>
+      <p:sp>
+        <p:nvSpPr>
+          <p:cNvPr id="2" name="Title 1">
+            <a:extLst>
+              <a:ext uri="{FF2B5EF4-FFF2-40B4-BE49-F238E27FC236}">
+                <a16:creationId xmlns:a16="http://schemas.microsoft.com/office/drawing/2014/main" id="{0637A84F-7178-4E19-A3E7-3440EE65CBC6}"/>
+              </a:ext>
+            </a:extLst>
+          </p:cNvPr>
+          <p:cNvSpPr>
+            <a:spLocks noGrp="1"/>
+          </p:cNvSpPr>
+          <p:nvPr>
+            <p:ph type="title"/>
+          </p:nvPr>
+        </p:nvSpPr>
+        <p:spPr/>
+        <p:txBody>
+          <a:bodyPr/>
+          <a:lstStyle/>
+          <a:p>
+            <a:r>
+              <a:rPr lang="en-US" dirty="0"/>
+              <a:t>Contents</a:t>
+            </a:r>
+          </a:p>
+        </p:txBody>
+      </p:sp>
+      <p:graphicFrame>
+        <p:nvGraphicFramePr>
+          <p:cNvPr id="7" name="Content Placeholder 6">
+            <a:extLst>
+              <a:ext uri="{FF2B5EF4-FFF2-40B4-BE49-F238E27FC236}">
+                <a16:creationId xmlns:a16="http://schemas.microsoft.com/office/drawing/2014/main" id="{B238EBBB-C40E-49A2-AEE3-55232539867E}"/>
+              </a:ext>
+              <a:ext uri="{C183D7F6-B498-43B3-948B-1728B52AA6E4}">
+                <adec:decorative xmlns:adec="http://schemas.microsoft.com/office/drawing/2017/decorative" val="1"/>
+              </a:ext>
+            </a:extLst>
+          </p:cNvPr>
+          <p:cNvGraphicFramePr>
+            <a:graphicFrameLocks noGrp="1"/>
+          </p:cNvGraphicFramePr>
+          <p:nvPr>
+            <p:ph idx="1"/>
+            <p:extLst>
+              <p:ext uri="{D42A27DB-BD31-4B8C-83A1-F6EECF244321}">
+                <p14:modId xmlns:p14="http://schemas.microsoft.com/office/powerpoint/2010/main" val="1212579034"/>
+              </p:ext>
+            </p:extLst>
+          </p:nvPr>
+        </p:nvGraphicFramePr>
+        <p:xfrm>
+          <a:off x="628650" y="1690689"/>
+          <a:ext cx="7886700" cy="4486274"/>
+        </p:xfrm>
+        <a:graphic>
+          <a:graphicData uri="http://schemas.openxmlformats.org/drawingml/2006/diagram">
+            <dgm:relIds xmlns:dgm="http://schemas.openxmlformats.org/drawingml/2006/diagram" xmlns:r="http://schemas.openxmlformats.org/officeDocument/2006/relationships" r:dm="rId2" r:lo="rId3" r:qs="rId4" r:cs="rId5"/>
+          </a:graphicData>
+        </a:graphic>
+      </p:graphicFrame>
+    </p:spTree>
+    <p:extLst>
+      <p:ext uri="{BB962C8B-B14F-4D97-AF65-F5344CB8AC3E}">
+        <p14:creationId xmlns:p14="http://schemas.microsoft.com/office/powerpoint/2010/main" val="4100430873"/>
+      </p:ext>
+    </p:extLst>
+  </p:cSld>
+  <p:clrMapOvr>
+    <a:masterClrMapping/>
+  </p:clrMapOvr>
+</p:sld>
+</file>
+
+<file path=ppt/slides/slide20.xml><?xml version="1.0" encoding="utf-8"?>
 <p:sld xmlns:a="http://schemas.openxmlformats.org/drawingml/2006/main" xmlns:r="http://schemas.openxmlformats.org/officeDocument/2006/relationships" xmlns:p="http://schemas.openxmlformats.org/presentationml/2006/main">
   <p:cSld>
     <p:spTree>
@@ -19899,10 +20086,7 @@
                 </a:pPr>
                 <a14:m>
                   <m:oMathPara xmlns:m="http://schemas.openxmlformats.org/officeDocument/2006/math">
-                    <m:oMathParaPr>
-                      <m:jc m:val="centerGroup"/>
-                    </m:oMathParaPr>
-                    <m:oMath xmlns:m="http://schemas.openxmlformats.org/officeDocument/2006/math">
+                    <m:oMath>
                       <m:r>
                         <a:rPr lang="en-US" i="1" dirty="0" smtClean="0">
                           <a:latin typeface="Cambria Math" panose="02040503050406030204" pitchFamily="18" charset="0"/>
@@ -20128,7 +20312,7 @@
                       <m:rPr>
                         <m:nor/>
                       </m:rPr>
-                      <a:rPr lang="en-US" dirty="0"/>
+                      <a:rPr lang="en-US" i="0" dirty="0"/>
                       <m:t>986,409</m:t>
                     </m:r>
                   </m:oMath>
@@ -20507,12 +20691,18 @@
 </p:sld>
 </file>
 
-<file path=ppt/slides/slide2.xml><?xml version="1.0" encoding="utf-8"?>
+<file path=ppt/slides/slide21.xml><?xml version="1.0" encoding="utf-8"?>
 <p:sld xmlns:a="http://schemas.openxmlformats.org/drawingml/2006/main" xmlns:r="http://schemas.openxmlformats.org/officeDocument/2006/relationships" xmlns:p="http://schemas.openxmlformats.org/presentationml/2006/main">
   <p:cSld>
     <p:spTree>
       <p:nvGrpSpPr>
-        <p:cNvPr id="1" name=""/>
+        <p:cNvPr id="1" name="">
+          <a:extLst>
+            <a:ext uri="{FF2B5EF4-FFF2-40B4-BE49-F238E27FC236}">
+              <a16:creationId xmlns:a16="http://schemas.microsoft.com/office/drawing/2014/main" id="{86055D2A-1CA8-541F-6401-C1EED6968BE8}"/>
+            </a:ext>
+          </a:extLst>
+        </p:cNvPr>
         <p:cNvGrpSpPr/>
         <p:nvPr/>
       </p:nvGrpSpPr>
@@ -20526,10 +20716,10 @@
       </p:grpSpPr>
       <p:sp>
         <p:nvSpPr>
-          <p:cNvPr id="2" name="Title 1">
+          <p:cNvPr id="4" name="Title 3">
             <a:extLst>
               <a:ext uri="{FF2B5EF4-FFF2-40B4-BE49-F238E27FC236}">
-                <a16:creationId xmlns:a16="http://schemas.microsoft.com/office/drawing/2014/main" id="{0637A84F-7178-4E19-A3E7-3440EE65CBC6}"/>
+                <a16:creationId xmlns:a16="http://schemas.microsoft.com/office/drawing/2014/main" id="{F0B6FE2F-BF7D-35B6-D0A3-F38E8476F79A}"/>
               </a:ext>
             </a:extLst>
           </p:cNvPr>
@@ -20540,56 +20730,93 @@
             <p:ph type="title"/>
           </p:nvPr>
         </p:nvSpPr>
-        <p:spPr/>
+        <p:spPr>
+          <a:xfrm>
+            <a:off x="829115" y="2931914"/>
+            <a:ext cx="7886700" cy="876035"/>
+          </a:xfrm>
+        </p:spPr>
         <p:txBody>
-          <a:bodyPr/>
+          <a:bodyPr>
+            <a:noAutofit/>
+          </a:bodyPr>
           <a:lstStyle/>
           <a:p>
             <a:r>
-              <a:rPr lang="en-US" dirty="0"/>
-              <a:t>Contents</a:t>
+              <a:rPr lang="en-US" sz="3200" b="1" dirty="0">
+                <a:latin typeface="+mn-lt"/>
+              </a:rPr>
+              <a:t>Code example</a:t>
+            </a:r>
+            <a:r>
+              <a:rPr lang="en-US" sz="3200" dirty="0">
+                <a:latin typeface="+mn-lt"/>
+              </a:rPr>
+              <a:t>: </a:t>
+            </a:r>
+            <a:br>
+              <a:rPr lang="en-US" sz="3200" dirty="0">
+                <a:latin typeface="+mn-lt"/>
+              </a:rPr>
+            </a:br>
+            <a:r>
+              <a:rPr lang="en-US" sz="3200" dirty="0">
+                <a:latin typeface="+mn-lt"/>
+              </a:rPr>
+              <a:t>Solving Tic-Tac-Toe with Minimax Search</a:t>
             </a:r>
           </a:p>
         </p:txBody>
       </p:sp>
-      <p:graphicFrame>
-        <p:nvGraphicFramePr>
-          <p:cNvPr id="7" name="Content Placeholder 6">
+      <p:sp>
+        <p:nvSpPr>
+          <p:cNvPr id="5" name="TextBox 4">
             <a:extLst>
               <a:ext uri="{FF2B5EF4-FFF2-40B4-BE49-F238E27FC236}">
-                <a16:creationId xmlns:a16="http://schemas.microsoft.com/office/drawing/2014/main" id="{B238EBBB-C40E-49A2-AEE3-55232539867E}"/>
-              </a:ext>
-              <a:ext uri="{C183D7F6-B498-43B3-948B-1728B52AA6E4}">
-                <adec:decorative xmlns:adec="http://schemas.microsoft.com/office/drawing/2017/decorative" val="1"/>
+                <a16:creationId xmlns:a16="http://schemas.microsoft.com/office/drawing/2014/main" id="{95F69D8A-0EFC-5606-46FD-CA93259D2412}"/>
               </a:ext>
             </a:extLst>
           </p:cNvPr>
-          <p:cNvGraphicFramePr>
-            <a:graphicFrameLocks noGrp="1"/>
-          </p:cNvGraphicFramePr>
-          <p:nvPr>
-            <p:ph idx="1"/>
-            <p:extLst>
-              <p:ext uri="{D42A27DB-BD31-4B8C-83A1-F6EECF244321}">
-                <p14:modId xmlns:p14="http://schemas.microsoft.com/office/powerpoint/2010/main" val="1212579034"/>
-              </p:ext>
-            </p:extLst>
-          </p:nvPr>
-        </p:nvGraphicFramePr>
-        <p:xfrm>
-          <a:off x="628650" y="1690689"/>
-          <a:ext cx="7886700" cy="4486274"/>
-        </p:xfrm>
-        <a:graphic>
-          <a:graphicData uri="http://schemas.openxmlformats.org/drawingml/2006/diagram">
-            <dgm:relIds xmlns:dgm="http://schemas.openxmlformats.org/drawingml/2006/diagram" xmlns:r="http://schemas.openxmlformats.org/officeDocument/2006/relationships" r:dm="rId2" r:lo="rId3" r:qs="rId4" r:cs="rId5"/>
-          </a:graphicData>
-        </a:graphic>
-      </p:graphicFrame>
+          <p:cNvSpPr txBox="1"/>
+          <p:nvPr/>
+        </p:nvSpPr>
+        <p:spPr>
+          <a:xfrm>
+            <a:off x="893299" y="5365946"/>
+            <a:ext cx="6608298" cy="253916"/>
+          </a:xfrm>
+          <a:prstGeom prst="rect">
+            <a:avLst/>
+          </a:prstGeom>
+          <a:noFill/>
+        </p:spPr>
+        <p:txBody>
+          <a:bodyPr wrap="square" rtlCol="0">
+            <a:spAutoFit/>
+          </a:bodyPr>
+          <a:lstStyle/>
+          <a:p>
+            <a:r>
+              <a:rPr lang="en-US" sz="1050" dirty="0"/>
+              <a:t>See Code on </a:t>
+            </a:r>
+            <a:r>
+              <a:rPr lang="en-US" sz="1050" dirty="0">
+                <a:hlinkClick r:id="rId2"/>
+              </a:rPr>
+              <a:t>https://michael.hahsler.net/Introduction_to_Artificial_Intelligence/</a:t>
+            </a:r>
+            <a:r>
+              <a:rPr lang="en-US" sz="1050" dirty="0"/>
+              <a:t> </a:t>
+            </a:r>
+          </a:p>
+        </p:txBody>
+      </p:sp>
     </p:spTree>
     <p:extLst>
       <p:ext uri="{BB962C8B-B14F-4D97-AF65-F5344CB8AC3E}">
-        <p14:creationId xmlns:p14="http://schemas.microsoft.com/office/powerpoint/2010/main" val="4100430873"/>
+        <p14:creationId xmlns:p14="http://schemas.microsoft.com/office/powerpoint/2010/main" val="3086470427"/>
       </p:ext>
     </p:extLst>
   </p:cSld>
@@ -20599,7 +20826,7 @@
 </p:sld>
 </file>
 
-<file path=ppt/slides/slide20.xml><?xml version="1.0" encoding="utf-8"?>
+<file path=ppt/slides/slide22.xml><?xml version="1.0" encoding="utf-8"?>
 <p:sld xmlns:a="http://schemas.openxmlformats.org/drawingml/2006/main" xmlns:r="http://schemas.openxmlformats.org/officeDocument/2006/relationships" xmlns:p="http://schemas.openxmlformats.org/presentationml/2006/main">
   <p:cSld>
     <p:spTree>
@@ -20801,7 +21028,7 @@
 </p:sld>
 </file>
 
-<file path=ppt/slides/slide21.xml><?xml version="1.0" encoding="utf-8"?>
+<file path=ppt/slides/slide23.xml><?xml version="1.0" encoding="utf-8"?>
 <p:sld xmlns:a="http://schemas.openxmlformats.org/drawingml/2006/main" xmlns:r="http://schemas.openxmlformats.org/officeDocument/2006/relationships" xmlns:p="http://schemas.openxmlformats.org/presentationml/2006/main">
   <p:cSld>
     <p:spTree>
@@ -21131,7 +21358,7 @@
                     <m:d>
                       <m:dPr>
                         <m:ctrlPr>
-                          <a:rPr lang="en-US" b="0" i="1" dirty="0" smtClean="0">
+                          <a:rPr lang="en-US" i="1" dirty="0" smtClean="0">
                             <a:latin typeface="Cambria Math" panose="02040503050406030204" pitchFamily="18" charset="0"/>
                           </a:rPr>
                         </m:ctrlPr>
@@ -21183,7 +21410,7 @@
                     <m:d>
                       <m:dPr>
                         <m:ctrlPr>
-                          <a:rPr lang="en-US" b="0" i="1" dirty="0" smtClean="0">
+                          <a:rPr lang="en-US" i="1" dirty="0" smtClean="0">
                             <a:latin typeface="Cambria Math" panose="02040503050406030204" pitchFamily="18" charset="0"/>
                           </a:rPr>
                         </m:ctrlPr>
@@ -21661,7 +21888,7 @@
 </p:sld>
 </file>
 
-<file path=ppt/slides/slide22.xml><?xml version="1.0" encoding="utf-8"?>
+<file path=ppt/slides/slide24.xml><?xml version="1.0" encoding="utf-8"?>
 <p:sld xmlns:a="http://schemas.openxmlformats.org/drawingml/2006/main" xmlns:r="http://schemas.openxmlformats.org/officeDocument/2006/relationships" xmlns:p="http://schemas.openxmlformats.org/presentationml/2006/main">
   <p:cSld>
     <p:spTree>
@@ -22514,10 +22741,7 @@
                   <a:pPr/>
                   <a14:m>
                     <m:oMathPara xmlns:m="http://schemas.openxmlformats.org/officeDocument/2006/math">
-                      <m:oMathParaPr>
-                        <m:jc m:val="centerGroup"/>
-                      </m:oMathParaPr>
-                      <m:oMath xmlns:m="http://schemas.openxmlformats.org/officeDocument/2006/math">
+                      <m:oMath>
                         <m:r>
                           <a:rPr lang="en-US" sz="1200" b="0" i="1" dirty="0" smtClean="0">
                             <a:solidFill>
@@ -23022,10 +23246,7 @@
                   <a:pPr/>
                   <a14:m>
                     <m:oMathPara xmlns:m="http://schemas.openxmlformats.org/officeDocument/2006/math">
-                      <m:oMathParaPr>
-                        <m:jc m:val="centerGroup"/>
-                      </m:oMathParaPr>
-                      <m:oMath xmlns:m="http://schemas.openxmlformats.org/officeDocument/2006/math">
+                      <m:oMath>
                         <m:r>
                           <a:rPr lang="en-US" sz="1200" b="0" i="1" dirty="0" smtClean="0">
                             <a:solidFill>
@@ -23134,10 +23355,7 @@
                   <a:pPr/>
                   <a14:m>
                     <m:oMathPara xmlns:m="http://schemas.openxmlformats.org/officeDocument/2006/math">
-                      <m:oMathParaPr>
-                        <m:jc m:val="centerGroup"/>
-                      </m:oMathParaPr>
-                      <m:oMath xmlns:m="http://schemas.openxmlformats.org/officeDocument/2006/math">
+                      <m:oMath>
                         <m:r>
                           <a:rPr lang="en-US" sz="1200" i="1" dirty="0" smtClean="0">
                             <a:solidFill>
@@ -23634,10 +23852,7 @@
                   <a:pPr/>
                   <a14:m>
                     <m:oMathPara xmlns:m="http://schemas.openxmlformats.org/officeDocument/2006/math">
-                      <m:oMathParaPr>
-                        <m:jc m:val="centerGroup"/>
-                      </m:oMathParaPr>
-                      <m:oMath xmlns:m="http://schemas.openxmlformats.org/officeDocument/2006/math">
+                      <m:oMath>
                         <m:r>
                           <a:rPr lang="en-US" sz="1200" i="1" dirty="0" smtClean="0">
                             <a:solidFill>
@@ -24118,7 +24333,7 @@
 </p:sld>
 </file>
 
-<file path=ppt/slides/slide23.xml><?xml version="1.0" encoding="utf-8"?>
+<file path=ppt/slides/slide25.xml><?xml version="1.0" encoding="utf-8"?>
 <p:sld xmlns:a="http://schemas.openxmlformats.org/drawingml/2006/main" xmlns:r="http://schemas.openxmlformats.org/officeDocument/2006/relationships" xmlns:p="http://schemas.openxmlformats.org/presentationml/2006/main">
   <p:cSld>
     <p:spTree>
@@ -24785,7 +25000,7 @@
 </p:sld>
 </file>
 
-<file path=ppt/slides/slide24.xml><?xml version="1.0" encoding="utf-8"?>
+<file path=ppt/slides/slide26.xml><?xml version="1.0" encoding="utf-8"?>
 <p:sld xmlns:a="http://schemas.openxmlformats.org/drawingml/2006/main" xmlns:r="http://schemas.openxmlformats.org/officeDocument/2006/relationships" xmlns:p="http://schemas.openxmlformats.org/presentationml/2006/main">
   <p:cSld>
     <p:spTree>
@@ -26286,10 +26501,7 @@
                   <a:pPr/>
                   <a14:m>
                     <m:oMathPara xmlns:m="http://schemas.openxmlformats.org/officeDocument/2006/math">
-                      <m:oMathParaPr>
-                        <m:jc m:val="centerGroup"/>
-                      </m:oMathParaPr>
-                      <m:oMath xmlns:m="http://schemas.openxmlformats.org/officeDocument/2006/math">
+                      <m:oMath>
                         <m:sSub>
                           <m:sSubPr>
                             <m:ctrlPr>
@@ -26401,10 +26613,7 @@
                   <a:pPr/>
                   <a14:m>
                     <m:oMathPara xmlns:m="http://schemas.openxmlformats.org/officeDocument/2006/math">
-                      <m:oMathParaPr>
-                        <m:jc m:val="centerGroup"/>
-                      </m:oMathParaPr>
-                      <m:oMath xmlns:m="http://schemas.openxmlformats.org/officeDocument/2006/math">
+                      <m:oMath>
                         <m:sSub>
                           <m:sSubPr>
                             <m:ctrlPr>
@@ -26516,10 +26725,7 @@
                   <a:pPr/>
                   <a14:m>
                     <m:oMathPara xmlns:m="http://schemas.openxmlformats.org/officeDocument/2006/math">
-                      <m:oMathParaPr>
-                        <m:jc m:val="centerGroup"/>
-                      </m:oMathParaPr>
-                      <m:oMath xmlns:m="http://schemas.openxmlformats.org/officeDocument/2006/math">
+                      <m:oMath>
                         <m:sSub>
                           <m:sSubPr>
                             <m:ctrlPr>
@@ -26631,10 +26837,7 @@
                   <a:pPr/>
                   <a14:m>
                     <m:oMathPara xmlns:m="http://schemas.openxmlformats.org/officeDocument/2006/math">
-                      <m:oMathParaPr>
-                        <m:jc m:val="centerGroup"/>
-                      </m:oMathParaPr>
-                      <m:oMath xmlns:m="http://schemas.openxmlformats.org/officeDocument/2006/math">
+                      <m:oMath>
                         <m:sSub>
                           <m:sSubPr>
                             <m:ctrlPr>
@@ -26746,10 +26949,7 @@
                   <a:pPr/>
                   <a14:m>
                     <m:oMathPara xmlns:m="http://schemas.openxmlformats.org/officeDocument/2006/math">
-                      <m:oMathParaPr>
-                        <m:jc m:val="centerGroup"/>
-                      </m:oMathParaPr>
-                      <m:oMath xmlns:m="http://schemas.openxmlformats.org/officeDocument/2006/math">
+                      <m:oMath>
                         <m:sSub>
                           <m:sSubPr>
                             <m:ctrlPr>
@@ -26861,10 +27061,7 @@
                   <a:pPr/>
                   <a14:m>
                     <m:oMathPara xmlns:m="http://schemas.openxmlformats.org/officeDocument/2006/math">
-                      <m:oMathParaPr>
-                        <m:jc m:val="centerGroup"/>
-                      </m:oMathParaPr>
-                      <m:oMath xmlns:m="http://schemas.openxmlformats.org/officeDocument/2006/math">
+                      <m:oMath>
                         <m:sSub>
                           <m:sSubPr>
                             <m:ctrlPr>
@@ -26976,10 +27173,7 @@
                   <a:pPr/>
                   <a14:m>
                     <m:oMathPara xmlns:m="http://schemas.openxmlformats.org/officeDocument/2006/math">
-                      <m:oMathParaPr>
-                        <m:jc m:val="centerGroup"/>
-                      </m:oMathParaPr>
-                      <m:oMath xmlns:m="http://schemas.openxmlformats.org/officeDocument/2006/math">
+                      <m:oMath>
                         <m:sSub>
                           <m:sSubPr>
                             <m:ctrlPr>
@@ -27091,10 +27285,7 @@
                   <a:pPr/>
                   <a14:m>
                     <m:oMathPara xmlns:m="http://schemas.openxmlformats.org/officeDocument/2006/math">
-                      <m:oMathParaPr>
-                        <m:jc m:val="centerGroup"/>
-                      </m:oMathParaPr>
-                      <m:oMath xmlns:m="http://schemas.openxmlformats.org/officeDocument/2006/math">
+                      <m:oMath>
                         <m:sSub>
                           <m:sSubPr>
                             <m:ctrlPr>
@@ -27206,10 +27397,7 @@
                   <a:pPr/>
                   <a14:m>
                     <m:oMathPara xmlns:m="http://schemas.openxmlformats.org/officeDocument/2006/math">
-                      <m:oMathParaPr>
-                        <m:jc m:val="centerGroup"/>
-                      </m:oMathParaPr>
-                      <m:oMath xmlns:m="http://schemas.openxmlformats.org/officeDocument/2006/math">
+                      <m:oMath>
                         <m:sSub>
                           <m:sSubPr>
                             <m:ctrlPr>
@@ -27321,10 +27509,7 @@
                   <a:pPr/>
                   <a14:m>
                     <m:oMathPara xmlns:m="http://schemas.openxmlformats.org/officeDocument/2006/math">
-                      <m:oMathParaPr>
-                        <m:jc m:val="centerGroup"/>
-                      </m:oMathParaPr>
-                      <m:oMath xmlns:m="http://schemas.openxmlformats.org/officeDocument/2006/math">
+                      <m:oMath>
                         <m:sSub>
                           <m:sSubPr>
                             <m:ctrlPr>
@@ -27436,10 +27621,7 @@
                   <a:pPr/>
                   <a14:m>
                     <m:oMathPara xmlns:m="http://schemas.openxmlformats.org/officeDocument/2006/math">
-                      <m:oMathParaPr>
-                        <m:jc m:val="centerGroup"/>
-                      </m:oMathParaPr>
-                      <m:oMath xmlns:m="http://schemas.openxmlformats.org/officeDocument/2006/math">
+                      <m:oMath>
                         <m:sSub>
                           <m:sSubPr>
                             <m:ctrlPr>
@@ -27551,10 +27733,7 @@
                   <a:pPr/>
                   <a14:m>
                     <m:oMathPara xmlns:m="http://schemas.openxmlformats.org/officeDocument/2006/math">
-                      <m:oMathParaPr>
-                        <m:jc m:val="centerGroup"/>
-                      </m:oMathParaPr>
-                      <m:oMath xmlns:m="http://schemas.openxmlformats.org/officeDocument/2006/math">
+                      <m:oMath>
                         <m:sSub>
                           <m:sSubPr>
                             <m:ctrlPr>
@@ -27865,10 +28044,7 @@
                   <a:pPr/>
                   <a14:m>
                     <m:oMathPara xmlns:m="http://schemas.openxmlformats.org/officeDocument/2006/math">
-                      <m:oMathParaPr>
-                        <m:jc m:val="centerGroup"/>
-                      </m:oMathParaPr>
-                      <m:oMath xmlns:m="http://schemas.openxmlformats.org/officeDocument/2006/math">
+                      <m:oMath>
                         <m:r>
                           <a:rPr lang="en-US" i="1" dirty="0" smtClean="0">
                             <a:latin typeface="Cambria Math" panose="02040503050406030204" pitchFamily="18" charset="0"/>
@@ -27985,10 +28161,7 @@
                   <a:pPr/>
                   <a14:m>
                     <m:oMathPara xmlns:m="http://schemas.openxmlformats.org/officeDocument/2006/math">
-                      <m:oMathParaPr>
-                        <m:jc m:val="centerGroup"/>
-                      </m:oMathParaPr>
-                      <m:oMath xmlns:m="http://schemas.openxmlformats.org/officeDocument/2006/math">
+                      <m:oMath>
                         <m:r>
                           <a:rPr lang="en-US" i="1" dirty="0" smtClean="0">
                             <a:latin typeface="Cambria Math" panose="02040503050406030204" pitchFamily="18" charset="0"/>
@@ -28105,10 +28278,7 @@
                   <a:pPr/>
                   <a14:m>
                     <m:oMathPara xmlns:m="http://schemas.openxmlformats.org/officeDocument/2006/math">
-                      <m:oMathParaPr>
-                        <m:jc m:val="centerGroup"/>
-                      </m:oMathParaPr>
-                      <m:oMath xmlns:m="http://schemas.openxmlformats.org/officeDocument/2006/math">
+                      <m:oMath>
                         <m:r>
                           <a:rPr lang="en-US" i="1" dirty="0" smtClean="0">
                             <a:latin typeface="Cambria Math" panose="02040503050406030204" pitchFamily="18" charset="0"/>
@@ -28225,10 +28395,7 @@
                   <a:pPr/>
                   <a14:m>
                     <m:oMathPara xmlns:m="http://schemas.openxmlformats.org/officeDocument/2006/math">
-                      <m:oMathParaPr>
-                        <m:jc m:val="centerGroup"/>
-                      </m:oMathParaPr>
-                      <m:oMath xmlns:m="http://schemas.openxmlformats.org/officeDocument/2006/math">
+                      <m:oMath>
                         <m:r>
                           <a:rPr lang="en-US" i="1" dirty="0" smtClean="0">
                             <a:latin typeface="Cambria Math" panose="02040503050406030204" pitchFamily="18" charset="0"/>
@@ -28471,7 +28638,7 @@
 </p:sld>
 </file>
 
-<file path=ppt/slides/slide25.xml><?xml version="1.0" encoding="utf-8"?>
+<file path=ppt/slides/slide27.xml><?xml version="1.0" encoding="utf-8"?>
 <p:sld xmlns:a="http://schemas.openxmlformats.org/drawingml/2006/main" xmlns:r="http://schemas.openxmlformats.org/officeDocument/2006/relationships" xmlns:p="http://schemas.openxmlformats.org/presentationml/2006/main">
   <p:cSld>
     <p:spTree>
@@ -28638,7 +28805,7 @@
 </p:sld>
 </file>
 
-<file path=ppt/slides/slide26.xml><?xml version="1.0" encoding="utf-8"?>
+<file path=ppt/slides/slide28.xml><?xml version="1.0" encoding="utf-8"?>
 <p:sld xmlns:a="http://schemas.openxmlformats.org/drawingml/2006/main" xmlns:r="http://schemas.openxmlformats.org/officeDocument/2006/relationships" xmlns:p="http://schemas.openxmlformats.org/presentationml/2006/main">
   <p:cSld>
     <p:spTree>
@@ -30478,10 +30645,7 @@
                     <a:pPr/>
                     <a14:m>
                       <m:oMathPara xmlns:m="http://schemas.openxmlformats.org/officeDocument/2006/math">
-                        <m:oMathParaPr>
-                          <m:jc m:val="centerGroup"/>
-                        </m:oMathParaPr>
-                        <m:oMath xmlns:m="http://schemas.openxmlformats.org/officeDocument/2006/math">
+                        <m:oMath>
                           <m:sSub>
                             <m:sSubPr>
                               <m:ctrlPr>
@@ -30593,10 +30757,7 @@
                     <a:pPr/>
                     <a14:m>
                       <m:oMathPara xmlns:m="http://schemas.openxmlformats.org/officeDocument/2006/math">
-                        <m:oMathParaPr>
-                          <m:jc m:val="centerGroup"/>
-                        </m:oMathParaPr>
-                        <m:oMath xmlns:m="http://schemas.openxmlformats.org/officeDocument/2006/math">
+                        <m:oMath>
                           <m:sSub>
                             <m:sSubPr>
                               <m:ctrlPr>
@@ -30708,10 +30869,7 @@
                     <a:pPr/>
                     <a14:m>
                       <m:oMathPara xmlns:m="http://schemas.openxmlformats.org/officeDocument/2006/math">
-                        <m:oMathParaPr>
-                          <m:jc m:val="centerGroup"/>
-                        </m:oMathParaPr>
-                        <m:oMath xmlns:m="http://schemas.openxmlformats.org/officeDocument/2006/math">
+                        <m:oMath>
                           <m:sSub>
                             <m:sSubPr>
                               <m:ctrlPr>
@@ -30823,10 +30981,7 @@
                     <a:pPr/>
                     <a14:m>
                       <m:oMathPara xmlns:m="http://schemas.openxmlformats.org/officeDocument/2006/math">
-                        <m:oMathParaPr>
-                          <m:jc m:val="centerGroup"/>
-                        </m:oMathParaPr>
-                        <m:oMath xmlns:m="http://schemas.openxmlformats.org/officeDocument/2006/math">
+                        <m:oMath>
                           <m:sSub>
                             <m:sSubPr>
                               <m:ctrlPr>
@@ -30938,10 +31093,7 @@
                     <a:pPr/>
                     <a14:m>
                       <m:oMathPara xmlns:m="http://schemas.openxmlformats.org/officeDocument/2006/math">
-                        <m:oMathParaPr>
-                          <m:jc m:val="centerGroup"/>
-                        </m:oMathParaPr>
-                        <m:oMath xmlns:m="http://schemas.openxmlformats.org/officeDocument/2006/math">
+                        <m:oMath>
                           <m:sSub>
                             <m:sSubPr>
                               <m:ctrlPr>
@@ -31053,10 +31205,7 @@
                     <a:pPr/>
                     <a14:m>
                       <m:oMathPara xmlns:m="http://schemas.openxmlformats.org/officeDocument/2006/math">
-                        <m:oMathParaPr>
-                          <m:jc m:val="centerGroup"/>
-                        </m:oMathParaPr>
-                        <m:oMath xmlns:m="http://schemas.openxmlformats.org/officeDocument/2006/math">
+                        <m:oMath>
                           <m:sSub>
                             <m:sSubPr>
                               <m:ctrlPr>
@@ -31168,10 +31317,7 @@
                     <a:pPr/>
                     <a14:m>
                       <m:oMathPara xmlns:m="http://schemas.openxmlformats.org/officeDocument/2006/math">
-                        <m:oMathParaPr>
-                          <m:jc m:val="centerGroup"/>
-                        </m:oMathParaPr>
-                        <m:oMath xmlns:m="http://schemas.openxmlformats.org/officeDocument/2006/math">
+                        <m:oMath>
                           <m:sSub>
                             <m:sSubPr>
                               <m:ctrlPr>
@@ -31283,10 +31429,7 @@
                     <a:pPr/>
                     <a14:m>
                       <m:oMathPara xmlns:m="http://schemas.openxmlformats.org/officeDocument/2006/math">
-                        <m:oMathParaPr>
-                          <m:jc m:val="centerGroup"/>
-                        </m:oMathParaPr>
-                        <m:oMath xmlns:m="http://schemas.openxmlformats.org/officeDocument/2006/math">
+                        <m:oMath>
                           <m:sSub>
                             <m:sSubPr>
                               <m:ctrlPr>
@@ -31398,10 +31541,7 @@
                     <a:pPr/>
                     <a14:m>
                       <m:oMathPara xmlns:m="http://schemas.openxmlformats.org/officeDocument/2006/math">
-                        <m:oMathParaPr>
-                          <m:jc m:val="centerGroup"/>
-                        </m:oMathParaPr>
-                        <m:oMath xmlns:m="http://schemas.openxmlformats.org/officeDocument/2006/math">
+                        <m:oMath>
                           <m:sSub>
                             <m:sSubPr>
                               <m:ctrlPr>
@@ -31513,10 +31653,7 @@
                     <a:pPr/>
                     <a14:m>
                       <m:oMathPara xmlns:m="http://schemas.openxmlformats.org/officeDocument/2006/math">
-                        <m:oMathParaPr>
-                          <m:jc m:val="centerGroup"/>
-                        </m:oMathParaPr>
-                        <m:oMath xmlns:m="http://schemas.openxmlformats.org/officeDocument/2006/math">
+                        <m:oMath>
                           <m:sSub>
                             <m:sSubPr>
                               <m:ctrlPr>
@@ -31628,10 +31765,7 @@
                     <a:pPr/>
                     <a14:m>
                       <m:oMathPara xmlns:m="http://schemas.openxmlformats.org/officeDocument/2006/math">
-                        <m:oMathParaPr>
-                          <m:jc m:val="centerGroup"/>
-                        </m:oMathParaPr>
-                        <m:oMath xmlns:m="http://schemas.openxmlformats.org/officeDocument/2006/math">
+                        <m:oMath>
                           <m:sSub>
                             <m:sSubPr>
                               <m:ctrlPr>
@@ -31743,10 +31877,7 @@
                     <a:pPr/>
                     <a14:m>
                       <m:oMathPara xmlns:m="http://schemas.openxmlformats.org/officeDocument/2006/math">
-                        <m:oMathParaPr>
-                          <m:jc m:val="centerGroup"/>
-                        </m:oMathParaPr>
-                        <m:oMath xmlns:m="http://schemas.openxmlformats.org/officeDocument/2006/math">
+                        <m:oMath>
                           <m:sSub>
                             <m:sSubPr>
                               <m:ctrlPr>
@@ -31971,10 +32102,7 @@
                     <a:pPr/>
                     <a14:m>
                       <m:oMathPara xmlns:m="http://schemas.openxmlformats.org/officeDocument/2006/math">
-                        <m:oMathParaPr>
-                          <m:jc m:val="centerGroup"/>
-                        </m:oMathParaPr>
-                        <m:oMath xmlns:m="http://schemas.openxmlformats.org/officeDocument/2006/math">
+                        <m:oMath>
                           <m:r>
                             <a:rPr lang="en-US" i="1" dirty="0" smtClean="0">
                               <a:latin typeface="Cambria Math" panose="02040503050406030204" pitchFamily="18" charset="0"/>
@@ -32091,10 +32219,7 @@
                     <a:pPr/>
                     <a14:m>
                       <m:oMathPara xmlns:m="http://schemas.openxmlformats.org/officeDocument/2006/math">
-                        <m:oMathParaPr>
-                          <m:jc m:val="centerGroup"/>
-                        </m:oMathParaPr>
-                        <m:oMath xmlns:m="http://schemas.openxmlformats.org/officeDocument/2006/math">
+                        <m:oMath>
                           <m:r>
                             <a:rPr lang="en-US" i="1" dirty="0" smtClean="0">
                               <a:latin typeface="Cambria Math" panose="02040503050406030204" pitchFamily="18" charset="0"/>
@@ -32271,10 +32396,7 @@
                   <a:pPr/>
                   <a14:m>
                     <m:oMathPara xmlns:m="http://schemas.openxmlformats.org/officeDocument/2006/math">
-                      <m:oMathParaPr>
-                        <m:jc m:val="centerGroup"/>
-                      </m:oMathParaPr>
-                      <m:oMath xmlns:m="http://schemas.openxmlformats.org/officeDocument/2006/math">
+                      <m:oMath>
                         <m:r>
                           <a:rPr lang="en-US" i="1" dirty="0" smtClean="0">
                             <a:latin typeface="Cambria Math" panose="02040503050406030204" pitchFamily="18" charset="0"/>
@@ -32450,10 +32572,7 @@
                   <a:pPr/>
                   <a14:m>
                     <m:oMathPara xmlns:m="http://schemas.openxmlformats.org/officeDocument/2006/math">
-                      <m:oMathParaPr>
-                        <m:jc m:val="centerGroup"/>
-                      </m:oMathParaPr>
-                      <m:oMath xmlns:m="http://schemas.openxmlformats.org/officeDocument/2006/math">
+                      <m:oMath>
                         <m:r>
                           <a:rPr lang="en-US" i="1" dirty="0" smtClean="0">
                             <a:latin typeface="Cambria Math" panose="02040503050406030204" pitchFamily="18" charset="0"/>
@@ -32551,7 +32670,415 @@
 </p:sld>
 </file>
 
-<file path=ppt/slides/slide27.xml><?xml version="1.0" encoding="utf-8"?>
+<file path=ppt/slides/slide29.xml><?xml version="1.0" encoding="utf-8"?>
+<p:sld xmlns:a="http://schemas.openxmlformats.org/drawingml/2006/main" xmlns:r="http://schemas.openxmlformats.org/officeDocument/2006/relationships" xmlns:p="http://schemas.openxmlformats.org/presentationml/2006/main">
+  <p:cSld>
+    <p:spTree>
+      <p:nvGrpSpPr>
+        <p:cNvPr id="1" name="">
+          <a:extLst>
+            <a:ext uri="{FF2B5EF4-FFF2-40B4-BE49-F238E27FC236}">
+              <a16:creationId xmlns:a16="http://schemas.microsoft.com/office/drawing/2014/main" id="{7627890C-E29D-F3E4-FD62-76C179AD5A36}"/>
+            </a:ext>
+          </a:extLst>
+        </p:cNvPr>
+        <p:cNvGrpSpPr/>
+        <p:nvPr/>
+      </p:nvGrpSpPr>
+      <p:grpSpPr>
+        <a:xfrm>
+          <a:off x="0" y="0"/>
+          <a:ext cx="0" cy="0"/>
+          <a:chOff x="0" y="0"/>
+          <a:chExt cx="0" cy="0"/>
+        </a:xfrm>
+      </p:grpSpPr>
+      <p:sp>
+        <p:nvSpPr>
+          <p:cNvPr id="4" name="Title 3">
+            <a:extLst>
+              <a:ext uri="{FF2B5EF4-FFF2-40B4-BE49-F238E27FC236}">
+                <a16:creationId xmlns:a16="http://schemas.microsoft.com/office/drawing/2014/main" id="{CEB5BF72-518E-A05B-90C3-00CE6F8CC1D2}"/>
+              </a:ext>
+            </a:extLst>
+          </p:cNvPr>
+          <p:cNvSpPr>
+            <a:spLocks noGrp="1"/>
+          </p:cNvSpPr>
+          <p:nvPr>
+            <p:ph type="title"/>
+          </p:nvPr>
+        </p:nvSpPr>
+        <p:spPr>
+          <a:xfrm>
+            <a:off x="829115" y="2931914"/>
+            <a:ext cx="7886700" cy="876035"/>
+          </a:xfrm>
+        </p:spPr>
+        <p:txBody>
+          <a:bodyPr>
+            <a:noAutofit/>
+          </a:bodyPr>
+          <a:lstStyle/>
+          <a:p>
+            <a:r>
+              <a:rPr lang="en-US" sz="3200" b="1" dirty="0">
+                <a:latin typeface="+mn-lt"/>
+              </a:rPr>
+              <a:t>Code example</a:t>
+            </a:r>
+            <a:r>
+              <a:rPr lang="en-US" sz="3200" dirty="0">
+                <a:latin typeface="+mn-lt"/>
+              </a:rPr>
+              <a:t>: Solving Tic-Tac-Toe with Minimax Search with Alpha-Beta Pruning</a:t>
+            </a:r>
+          </a:p>
+        </p:txBody>
+      </p:sp>
+      <p:sp>
+        <p:nvSpPr>
+          <p:cNvPr id="5" name="TextBox 4">
+            <a:extLst>
+              <a:ext uri="{FF2B5EF4-FFF2-40B4-BE49-F238E27FC236}">
+                <a16:creationId xmlns:a16="http://schemas.microsoft.com/office/drawing/2014/main" id="{4F5FBCEC-A082-BB02-0CAA-35DAB4959F61}"/>
+              </a:ext>
+            </a:extLst>
+          </p:cNvPr>
+          <p:cNvSpPr txBox="1"/>
+          <p:nvPr/>
+        </p:nvSpPr>
+        <p:spPr>
+          <a:xfrm>
+            <a:off x="893299" y="5365946"/>
+            <a:ext cx="6608298" cy="253916"/>
+          </a:xfrm>
+          <a:prstGeom prst="rect">
+            <a:avLst/>
+          </a:prstGeom>
+          <a:noFill/>
+        </p:spPr>
+        <p:txBody>
+          <a:bodyPr wrap="square" rtlCol="0">
+            <a:spAutoFit/>
+          </a:bodyPr>
+          <a:lstStyle/>
+          <a:p>
+            <a:r>
+              <a:rPr lang="en-US" sz="1050" dirty="0"/>
+              <a:t>See Code on </a:t>
+            </a:r>
+            <a:r>
+              <a:rPr lang="en-US" sz="1050" dirty="0">
+                <a:hlinkClick r:id="rId2"/>
+              </a:rPr>
+              <a:t>https://michael.hahsler.net/Introduction_to_Artificial_Intelligence/</a:t>
+            </a:r>
+            <a:r>
+              <a:rPr lang="en-US" sz="1050" dirty="0"/>
+              <a:t> </a:t>
+            </a:r>
+          </a:p>
+        </p:txBody>
+      </p:sp>
+    </p:spTree>
+    <p:extLst>
+      <p:ext uri="{BB962C8B-B14F-4D97-AF65-F5344CB8AC3E}">
+        <p14:creationId xmlns:p14="http://schemas.microsoft.com/office/powerpoint/2010/main" val="2555502032"/>
+      </p:ext>
+    </p:extLst>
+  </p:cSld>
+  <p:clrMapOvr>
+    <a:masterClrMapping/>
+  </p:clrMapOvr>
+</p:sld>
+</file>
+
+<file path=ppt/slides/slide3.xml><?xml version="1.0" encoding="utf-8"?>
+<p:sld xmlns:a="http://schemas.openxmlformats.org/drawingml/2006/main" xmlns:r="http://schemas.openxmlformats.org/officeDocument/2006/relationships" xmlns:p="http://schemas.openxmlformats.org/presentationml/2006/main">
+  <p:cSld>
+    <p:bg>
+      <p:bgPr>
+        <a:solidFill>
+          <a:schemeClr val="bg1"/>
+        </a:solidFill>
+        <a:effectLst/>
+      </p:bgPr>
+    </p:bg>
+    <p:spTree>
+      <p:nvGrpSpPr>
+        <p:cNvPr id="1" name=""/>
+        <p:cNvGrpSpPr/>
+        <p:nvPr/>
+      </p:nvGrpSpPr>
+      <p:grpSpPr>
+        <a:xfrm>
+          <a:off x="0" y="0"/>
+          <a:ext cx="0" cy="0"/>
+          <a:chOff x="0" y="0"/>
+          <a:chExt cx="0" cy="0"/>
+        </a:xfrm>
+      </p:grpSpPr>
+      <p:sp>
+        <p:nvSpPr>
+          <p:cNvPr id="4" name="Title 3">
+            <a:extLst>
+              <a:ext uri="{FF2B5EF4-FFF2-40B4-BE49-F238E27FC236}">
+                <a16:creationId xmlns:a16="http://schemas.microsoft.com/office/drawing/2014/main" id="{673AB63A-583D-4BBD-914A-0A8056D0F4A2}"/>
+              </a:ext>
+            </a:extLst>
+          </p:cNvPr>
+          <p:cNvSpPr>
+            <a:spLocks noGrp="1"/>
+          </p:cNvSpPr>
+          <p:nvPr>
+            <p:ph type="title"/>
+          </p:nvPr>
+        </p:nvSpPr>
+        <p:spPr>
+          <a:xfrm>
+            <a:off x="3724072" y="629268"/>
+            <a:ext cx="4939868" cy="1286160"/>
+          </a:xfrm>
+        </p:spPr>
+        <p:txBody>
+          <a:bodyPr anchor="b">
+            <a:normAutofit/>
+          </a:bodyPr>
+          <a:lstStyle/>
+          <a:p>
+            <a:r>
+              <a:rPr lang="en-US" dirty="0"/>
+              <a:t>Games</a:t>
+            </a:r>
+          </a:p>
+        </p:txBody>
+      </p:sp>
+      <p:sp>
+        <p:nvSpPr>
+          <p:cNvPr id="5" name="Content Placeholder 4">
+            <a:extLst>
+              <a:ext uri="{FF2B5EF4-FFF2-40B4-BE49-F238E27FC236}">
+                <a16:creationId xmlns:a16="http://schemas.microsoft.com/office/drawing/2014/main" id="{3C1F6EBF-AF35-4215-9C0C-E67FFF86834E}"/>
+              </a:ext>
+            </a:extLst>
+          </p:cNvPr>
+          <p:cNvSpPr>
+            <a:spLocks noGrp="1"/>
+          </p:cNvSpPr>
+          <p:nvPr>
+            <p:ph idx="1"/>
+          </p:nvPr>
+        </p:nvSpPr>
+        <p:spPr>
+          <a:xfrm>
+            <a:off x="3724073" y="2438400"/>
+            <a:ext cx="4939867" cy="3785419"/>
+          </a:xfrm>
+        </p:spPr>
+        <p:txBody>
+          <a:bodyPr>
+            <a:normAutofit fontScale="85000" lnSpcReduction="10000"/>
+          </a:bodyPr>
+          <a:lstStyle/>
+          <a:p>
+            <a:r>
+              <a:rPr lang="en-US" sz="2000" b="1" dirty="0"/>
+              <a:t>Strategic environment</a:t>
+            </a:r>
+            <a:r>
+              <a:rPr lang="en-US" sz="2000" dirty="0"/>
+              <a:t>: Games typically feature an environment containing an opponent who wants to win against the agent.</a:t>
+            </a:r>
+          </a:p>
+          <a:p>
+            <a:r>
+              <a:rPr lang="en-US" sz="2000" b="1" dirty="0"/>
+              <a:t>Episodic environment</a:t>
+            </a:r>
+            <a:r>
+              <a:rPr lang="en-US" sz="2000" dirty="0"/>
+              <a:t>: One game does not affect the next.</a:t>
+            </a:r>
+          </a:p>
+          <a:p>
+            <a:r>
+              <a:rPr lang="en-US" sz="2000" dirty="0"/>
+              <a:t>We will focus on planning for</a:t>
+            </a:r>
+          </a:p>
+          <a:p>
+            <a:pPr lvl="1"/>
+            <a:r>
+              <a:rPr lang="en-US" sz="1600" dirty="0"/>
+              <a:t>two-player zero-sum games with </a:t>
+            </a:r>
+          </a:p>
+          <a:p>
+            <a:pPr lvl="1"/>
+            <a:r>
+              <a:rPr lang="en-US" sz="1600" dirty="0"/>
+              <a:t>deterministic game mechanics and </a:t>
+            </a:r>
+          </a:p>
+          <a:p>
+            <a:pPr lvl="1"/>
+            <a:r>
+              <a:rPr lang="en-US" sz="1600" dirty="0"/>
+              <a:t>perfect information (i.e., fully observable environment).</a:t>
+            </a:r>
+            <a:endParaRPr lang="en-US" sz="2000" dirty="0"/>
+          </a:p>
+          <a:p>
+            <a:endParaRPr lang="en-US" sz="2000" dirty="0"/>
+          </a:p>
+          <a:p>
+            <a:r>
+              <a:rPr lang="en-US" sz="2000" dirty="0"/>
+              <a:t>We call the two players: </a:t>
+            </a:r>
+          </a:p>
+          <a:p>
+            <a:pPr marL="914400" lvl="1" indent="-457200">
+              <a:buFont typeface="+mj-lt"/>
+              <a:buAutoNum type="arabicParenR"/>
+            </a:pPr>
+            <a:r>
+              <a:rPr lang="en-US" sz="2000" b="1" dirty="0"/>
+              <a:t>Max</a:t>
+            </a:r>
+            <a:r>
+              <a:rPr lang="en-US" sz="2000" dirty="0"/>
+              <a:t> tries to maximize its utility.</a:t>
+            </a:r>
+          </a:p>
+          <a:p>
+            <a:pPr marL="914400" lvl="1" indent="-457200">
+              <a:buFont typeface="+mj-lt"/>
+              <a:buAutoNum type="arabicParenR"/>
+            </a:pPr>
+            <a:r>
+              <a:rPr lang="en-US" sz="2000" b="1" dirty="0"/>
+              <a:t>Min</a:t>
+            </a:r>
+            <a:r>
+              <a:rPr lang="en-US" sz="2000" dirty="0"/>
+              <a:t> tries to minimize Max’s utility (zero-sum game).</a:t>
+            </a:r>
+          </a:p>
+        </p:txBody>
+      </p:sp>
+      <p:pic>
+        <p:nvPicPr>
+          <p:cNvPr id="7" name="Picture 6">
+            <a:extLst>
+              <a:ext uri="{FF2B5EF4-FFF2-40B4-BE49-F238E27FC236}">
+                <a16:creationId xmlns:a16="http://schemas.microsoft.com/office/drawing/2014/main" id="{175FC947-2DD1-4775-8699-AB039B7D98A1}"/>
+              </a:ext>
+              <a:ext uri="{C183D7F6-B498-43B3-948B-1728B52AA6E4}">
+                <adec:decorative xmlns:adec="http://schemas.microsoft.com/office/drawing/2017/decorative" val="1"/>
+              </a:ext>
+            </a:extLst>
+          </p:cNvPr>
+          <p:cNvPicPr>
+            <a:picLocks noChangeAspect="1"/>
+          </p:cNvPicPr>
+          <p:nvPr/>
+        </p:nvPicPr>
+        <p:blipFill rotWithShape="1">
+          <a:blip r:embed="rId2">
+            <a:extLst>
+              <a:ext uri="{BEBA8EAE-BF5A-486C-A8C5-ECC9F3942E4B}">
+                <a14:imgProps xmlns:a14="http://schemas.microsoft.com/office/drawing/2010/main">
+                  <a14:imgLayer r:embed="rId3">
+                    <a14:imgEffect>
+                      <a14:saturation sat="0"/>
+                    </a14:imgEffect>
+                  </a14:imgLayer>
+                </a14:imgProps>
+              </a:ext>
+            </a:extLst>
+          </a:blip>
+          <a:srcRect l="24221" r="37758"/>
+          <a:stretch/>
+        </p:blipFill>
+        <p:spPr>
+          <a:xfrm>
+            <a:off x="20" y="10"/>
+            <a:ext cx="3476673" cy="6857990"/>
+          </a:xfrm>
+          <a:prstGeom prst="rect">
+            <a:avLst/>
+          </a:prstGeom>
+          <a:effectLst/>
+        </p:spPr>
+      </p:pic>
+      <p:cxnSp>
+        <p:nvCxnSpPr>
+          <p:cNvPr id="11" name="Straight Connector 10">
+            <a:extLst>
+              <a:ext uri="{FF2B5EF4-FFF2-40B4-BE49-F238E27FC236}">
+                <a16:creationId xmlns:a16="http://schemas.microsoft.com/office/drawing/2014/main" id="{A7F400EE-A8A5-48AF-B4D6-291B52C6F0B0}"/>
+              </a:ext>
+              <a:ext uri="{C183D7F6-B498-43B3-948B-1728B52AA6E4}">
+                <adec:decorative xmlns:adec="http://schemas.microsoft.com/office/drawing/2017/decorative" val="1"/>
+              </a:ext>
+            </a:extLst>
+          </p:cNvPr>
+          <p:cNvCxnSpPr>
+            <a:cxnSpLocks noGrp="1" noRot="1" noChangeAspect="1" noMove="1" noResize="1" noEditPoints="1" noAdjustHandles="1" noChangeArrowheads="1" noChangeShapeType="1"/>
+          </p:cNvCxnSpPr>
+          <p:nvPr>
+            <p:extLst>
+              <p:ext uri="{386F3935-93C4-4BCD-93E2-E3B085C9AB24}">
+                <p16:designElem xmlns:p16="http://schemas.microsoft.com/office/powerpoint/2015/main" val="1"/>
+              </p:ext>
+            </p:extLst>
+          </p:nvPr>
+        </p:nvCxnSpPr>
+        <p:spPr>
+          <a:xfrm>
+            <a:off x="3810700" y="2115117"/>
+            <a:ext cx="4732020" cy="0"/>
+          </a:xfrm>
+          <a:prstGeom prst="line">
+            <a:avLst/>
+          </a:prstGeom>
+          <a:ln w="19050">
+            <a:solidFill>
+              <a:srgbClr val="5C8BBB"/>
+            </a:solidFill>
+          </a:ln>
+        </p:spPr>
+        <p:style>
+          <a:lnRef idx="1">
+            <a:schemeClr val="accent1"/>
+          </a:lnRef>
+          <a:fillRef idx="0">
+            <a:schemeClr val="accent1"/>
+          </a:fillRef>
+          <a:effectRef idx="0">
+            <a:schemeClr val="accent1"/>
+          </a:effectRef>
+          <a:fontRef idx="minor">
+            <a:schemeClr val="tx1"/>
+          </a:fontRef>
+        </p:style>
+      </p:cxnSp>
+    </p:spTree>
+    <p:extLst>
+      <p:ext uri="{BB962C8B-B14F-4D97-AF65-F5344CB8AC3E}">
+        <p14:creationId xmlns:p14="http://schemas.microsoft.com/office/powerpoint/2010/main" val="1068800212"/>
+      </p:ext>
+    </p:extLst>
+  </p:cSld>
+  <p:clrMapOvr>
+    <a:masterClrMapping/>
+  </p:clrMapOvr>
+</p:sld>
+</file>
+
+<file path=ppt/slides/slide30.xml><?xml version="1.0" encoding="utf-8"?>
 <p:sld xmlns:a="http://schemas.openxmlformats.org/drawingml/2006/main" xmlns:r="http://schemas.openxmlformats.org/officeDocument/2006/relationships" xmlns:p="http://schemas.openxmlformats.org/presentationml/2006/main">
   <p:cSld>
     <p:spTree>
@@ -33006,7 +33533,7 @@
 </p:sld>
 </file>
 
-<file path=ppt/slides/slide28.xml><?xml version="1.0" encoding="utf-8"?>
+<file path=ppt/slides/slide31.xml><?xml version="1.0" encoding="utf-8"?>
 <p:sld xmlns:a="http://schemas.openxmlformats.org/drawingml/2006/main" xmlns:r="http://schemas.openxmlformats.org/officeDocument/2006/relationships" xmlns:p="http://schemas.openxmlformats.org/presentationml/2006/main">
   <p:cSld>
     <p:spTree>
@@ -33131,7 +33658,7 @@
 </p:sld>
 </file>
 
-<file path=ppt/slides/slide29.xml><?xml version="1.0" encoding="utf-8"?>
+<file path=ppt/slides/slide32.xml><?xml version="1.0" encoding="utf-8"?>
 <p:sld xmlns:a="http://schemas.openxmlformats.org/drawingml/2006/main" xmlns:r="http://schemas.openxmlformats.org/officeDocument/2006/relationships" xmlns:p="http://schemas.openxmlformats.org/presentationml/2006/main">
   <p:cSld>
     <p:bg>
@@ -33403,291 +33930,7 @@
 </p:sld>
 </file>
 
-<file path=ppt/slides/slide3.xml><?xml version="1.0" encoding="utf-8"?>
-<p:sld xmlns:a="http://schemas.openxmlformats.org/drawingml/2006/main" xmlns:r="http://schemas.openxmlformats.org/officeDocument/2006/relationships" xmlns:p="http://schemas.openxmlformats.org/presentationml/2006/main">
-  <p:cSld>
-    <p:bg>
-      <p:bgPr>
-        <a:solidFill>
-          <a:schemeClr val="bg1"/>
-        </a:solidFill>
-        <a:effectLst/>
-      </p:bgPr>
-    </p:bg>
-    <p:spTree>
-      <p:nvGrpSpPr>
-        <p:cNvPr id="1" name=""/>
-        <p:cNvGrpSpPr/>
-        <p:nvPr/>
-      </p:nvGrpSpPr>
-      <p:grpSpPr>
-        <a:xfrm>
-          <a:off x="0" y="0"/>
-          <a:ext cx="0" cy="0"/>
-          <a:chOff x="0" y="0"/>
-          <a:chExt cx="0" cy="0"/>
-        </a:xfrm>
-      </p:grpSpPr>
-      <p:sp>
-        <p:nvSpPr>
-          <p:cNvPr id="4" name="Title 3">
-            <a:extLst>
-              <a:ext uri="{FF2B5EF4-FFF2-40B4-BE49-F238E27FC236}">
-                <a16:creationId xmlns:a16="http://schemas.microsoft.com/office/drawing/2014/main" id="{673AB63A-583D-4BBD-914A-0A8056D0F4A2}"/>
-              </a:ext>
-            </a:extLst>
-          </p:cNvPr>
-          <p:cNvSpPr>
-            <a:spLocks noGrp="1"/>
-          </p:cNvSpPr>
-          <p:nvPr>
-            <p:ph type="title"/>
-          </p:nvPr>
-        </p:nvSpPr>
-        <p:spPr>
-          <a:xfrm>
-            <a:off x="3724072" y="629268"/>
-            <a:ext cx="4939868" cy="1286160"/>
-          </a:xfrm>
-        </p:spPr>
-        <p:txBody>
-          <a:bodyPr anchor="b">
-            <a:normAutofit/>
-          </a:bodyPr>
-          <a:lstStyle/>
-          <a:p>
-            <a:r>
-              <a:rPr lang="en-US" dirty="0"/>
-              <a:t>Games</a:t>
-            </a:r>
-          </a:p>
-        </p:txBody>
-      </p:sp>
-      <p:sp>
-        <p:nvSpPr>
-          <p:cNvPr id="5" name="Content Placeholder 4">
-            <a:extLst>
-              <a:ext uri="{FF2B5EF4-FFF2-40B4-BE49-F238E27FC236}">
-                <a16:creationId xmlns:a16="http://schemas.microsoft.com/office/drawing/2014/main" id="{3C1F6EBF-AF35-4215-9C0C-E67FFF86834E}"/>
-              </a:ext>
-            </a:extLst>
-          </p:cNvPr>
-          <p:cNvSpPr>
-            <a:spLocks noGrp="1"/>
-          </p:cNvSpPr>
-          <p:nvPr>
-            <p:ph idx="1"/>
-          </p:nvPr>
-        </p:nvSpPr>
-        <p:spPr>
-          <a:xfrm>
-            <a:off x="3724073" y="2438400"/>
-            <a:ext cx="4939867" cy="3785419"/>
-          </a:xfrm>
-        </p:spPr>
-        <p:txBody>
-          <a:bodyPr>
-            <a:normAutofit fontScale="85000" lnSpcReduction="10000"/>
-          </a:bodyPr>
-          <a:lstStyle/>
-          <a:p>
-            <a:r>
-              <a:rPr lang="en-US" sz="2000" b="1" dirty="0"/>
-              <a:t>Strategic environment</a:t>
-            </a:r>
-            <a:r>
-              <a:rPr lang="en-US" sz="2000" dirty="0"/>
-              <a:t>: Games typically feature an environment containing an opponent who wants to win against the agent.</a:t>
-            </a:r>
-          </a:p>
-          <a:p>
-            <a:r>
-              <a:rPr lang="en-US" sz="2000" b="1" dirty="0"/>
-              <a:t>Episodic environment</a:t>
-            </a:r>
-            <a:r>
-              <a:rPr lang="en-US" sz="2000" dirty="0"/>
-              <a:t>: One game does not affect the next.</a:t>
-            </a:r>
-          </a:p>
-          <a:p>
-            <a:r>
-              <a:rPr lang="en-US" sz="2000" dirty="0"/>
-              <a:t>We will focus on planning for</a:t>
-            </a:r>
-          </a:p>
-          <a:p>
-            <a:pPr lvl="1"/>
-            <a:r>
-              <a:rPr lang="en-US" sz="1600" dirty="0"/>
-              <a:t>two-player zero-sum games with </a:t>
-            </a:r>
-          </a:p>
-          <a:p>
-            <a:pPr lvl="1"/>
-            <a:r>
-              <a:rPr lang="en-US" sz="1600" dirty="0"/>
-              <a:t>deterministic game mechanics and </a:t>
-            </a:r>
-          </a:p>
-          <a:p>
-            <a:pPr lvl="1"/>
-            <a:r>
-              <a:rPr lang="en-US" sz="1600" dirty="0"/>
-              <a:t>perfect information (i.e., fully observable environment).</a:t>
-            </a:r>
-            <a:endParaRPr lang="en-US" sz="2000" dirty="0"/>
-          </a:p>
-          <a:p>
-            <a:endParaRPr lang="en-US" sz="2000" dirty="0"/>
-          </a:p>
-          <a:p>
-            <a:r>
-              <a:rPr lang="en-US" sz="2000" dirty="0"/>
-              <a:t>We call the two players: </a:t>
-            </a:r>
-          </a:p>
-          <a:p>
-            <a:pPr marL="914400" lvl="1" indent="-457200">
-              <a:buFont typeface="+mj-lt"/>
-              <a:buAutoNum type="arabicParenR"/>
-            </a:pPr>
-            <a:r>
-              <a:rPr lang="en-US" sz="2000" b="1" dirty="0"/>
-              <a:t>Max</a:t>
-            </a:r>
-            <a:r>
-              <a:rPr lang="en-US" sz="2000" dirty="0"/>
-              <a:t> tries to maximize its utility.</a:t>
-            </a:r>
-          </a:p>
-          <a:p>
-            <a:pPr marL="914400" lvl="1" indent="-457200">
-              <a:buFont typeface="+mj-lt"/>
-              <a:buAutoNum type="arabicParenR"/>
-            </a:pPr>
-            <a:r>
-              <a:rPr lang="en-US" sz="2000" b="1" dirty="0"/>
-              <a:t>Min</a:t>
-            </a:r>
-            <a:r>
-              <a:rPr lang="en-US" sz="2000" dirty="0"/>
-              <a:t> tries to minimize Max’s utility (zero-sum game).</a:t>
-            </a:r>
-          </a:p>
-        </p:txBody>
-      </p:sp>
-      <p:pic>
-        <p:nvPicPr>
-          <p:cNvPr id="7" name="Picture 6">
-            <a:extLst>
-              <a:ext uri="{FF2B5EF4-FFF2-40B4-BE49-F238E27FC236}">
-                <a16:creationId xmlns:a16="http://schemas.microsoft.com/office/drawing/2014/main" id="{175FC947-2DD1-4775-8699-AB039B7D98A1}"/>
-              </a:ext>
-              <a:ext uri="{C183D7F6-B498-43B3-948B-1728B52AA6E4}">
-                <adec:decorative xmlns:adec="http://schemas.microsoft.com/office/drawing/2017/decorative" val="1"/>
-              </a:ext>
-            </a:extLst>
-          </p:cNvPr>
-          <p:cNvPicPr>
-            <a:picLocks noChangeAspect="1"/>
-          </p:cNvPicPr>
-          <p:nvPr/>
-        </p:nvPicPr>
-        <p:blipFill rotWithShape="1">
-          <a:blip r:embed="rId2">
-            <a:extLst>
-              <a:ext uri="{BEBA8EAE-BF5A-486C-A8C5-ECC9F3942E4B}">
-                <a14:imgProps xmlns:a14="http://schemas.microsoft.com/office/drawing/2010/main">
-                  <a14:imgLayer r:embed="rId3">
-                    <a14:imgEffect>
-                      <a14:saturation sat="0"/>
-                    </a14:imgEffect>
-                  </a14:imgLayer>
-                </a14:imgProps>
-              </a:ext>
-            </a:extLst>
-          </a:blip>
-          <a:srcRect l="24221" r="37758"/>
-          <a:stretch/>
-        </p:blipFill>
-        <p:spPr>
-          <a:xfrm>
-            <a:off x="20" y="10"/>
-            <a:ext cx="3476673" cy="6857990"/>
-          </a:xfrm>
-          <a:prstGeom prst="rect">
-            <a:avLst/>
-          </a:prstGeom>
-          <a:effectLst/>
-        </p:spPr>
-      </p:pic>
-      <p:cxnSp>
-        <p:nvCxnSpPr>
-          <p:cNvPr id="11" name="Straight Connector 10">
-            <a:extLst>
-              <a:ext uri="{FF2B5EF4-FFF2-40B4-BE49-F238E27FC236}">
-                <a16:creationId xmlns:a16="http://schemas.microsoft.com/office/drawing/2014/main" id="{A7F400EE-A8A5-48AF-B4D6-291B52C6F0B0}"/>
-              </a:ext>
-              <a:ext uri="{C183D7F6-B498-43B3-948B-1728B52AA6E4}">
-                <adec:decorative xmlns:adec="http://schemas.microsoft.com/office/drawing/2017/decorative" val="1"/>
-              </a:ext>
-            </a:extLst>
-          </p:cNvPr>
-          <p:cNvCxnSpPr>
-            <a:cxnSpLocks noGrp="1" noRot="1" noChangeAspect="1" noMove="1" noResize="1" noEditPoints="1" noAdjustHandles="1" noChangeArrowheads="1" noChangeShapeType="1"/>
-          </p:cNvCxnSpPr>
-          <p:nvPr>
-            <p:extLst>
-              <p:ext uri="{386F3935-93C4-4BCD-93E2-E3B085C9AB24}">
-                <p16:designElem xmlns:p16="http://schemas.microsoft.com/office/powerpoint/2015/main" val="1"/>
-              </p:ext>
-            </p:extLst>
-          </p:nvPr>
-        </p:nvCxnSpPr>
-        <p:spPr>
-          <a:xfrm>
-            <a:off x="3810700" y="2115117"/>
-            <a:ext cx="4732020" cy="0"/>
-          </a:xfrm>
-          <a:prstGeom prst="line">
-            <a:avLst/>
-          </a:prstGeom>
-          <a:ln w="19050">
-            <a:solidFill>
-              <a:srgbClr val="5C8BBB"/>
-            </a:solidFill>
-          </a:ln>
-        </p:spPr>
-        <p:style>
-          <a:lnRef idx="1">
-            <a:schemeClr val="accent1"/>
-          </a:lnRef>
-          <a:fillRef idx="0">
-            <a:schemeClr val="accent1"/>
-          </a:fillRef>
-          <a:effectRef idx="0">
-            <a:schemeClr val="accent1"/>
-          </a:effectRef>
-          <a:fontRef idx="minor">
-            <a:schemeClr val="tx1"/>
-          </a:fontRef>
-        </p:style>
-      </p:cxnSp>
-    </p:spTree>
-    <p:extLst>
-      <p:ext uri="{BB962C8B-B14F-4D97-AF65-F5344CB8AC3E}">
-        <p14:creationId xmlns:p14="http://schemas.microsoft.com/office/powerpoint/2010/main" val="1068800212"/>
-      </p:ext>
-    </p:extLst>
-  </p:cSld>
-  <p:clrMapOvr>
-    <a:masterClrMapping/>
-  </p:clrMapOvr>
-</p:sld>
-</file>
-
-<file path=ppt/slides/slide30.xml><?xml version="1.0" encoding="utf-8"?>
+<file path=ppt/slides/slide33.xml><?xml version="1.0" encoding="utf-8"?>
 <p:sld xmlns:a="http://schemas.openxmlformats.org/drawingml/2006/main" xmlns:r="http://schemas.openxmlformats.org/officeDocument/2006/relationships" xmlns:p="http://schemas.openxmlformats.org/presentationml/2006/main">
   <p:cSld>
     <p:spTree>
@@ -33841,7 +34084,7 @@
 </p:sld>
 </file>
 
-<file path=ppt/slides/slide31.xml><?xml version="1.0" encoding="utf-8"?>
+<file path=ppt/slides/slide34.xml><?xml version="1.0" encoding="utf-8"?>
 <p:sld xmlns:a="http://schemas.openxmlformats.org/drawingml/2006/main" xmlns:r="http://schemas.openxmlformats.org/officeDocument/2006/relationships" xmlns:p="http://schemas.openxmlformats.org/presentationml/2006/main">
   <p:cSld>
     <p:spTree>
@@ -34928,7 +35171,7 @@
 </p:sld>
 </file>
 
-<file path=ppt/slides/slide32.xml><?xml version="1.0" encoding="utf-8"?>
+<file path=ppt/slides/slide35.xml><?xml version="1.0" encoding="utf-8"?>
 <p:sld xmlns:a="http://schemas.openxmlformats.org/drawingml/2006/main" xmlns:r="http://schemas.openxmlformats.org/officeDocument/2006/relationships" xmlns:p="http://schemas.openxmlformats.org/presentationml/2006/main">
   <p:cSld>
     <p:spTree>
@@ -36563,7 +36806,131 @@
 </p:sld>
 </file>
 
-<file path=ppt/slides/slide33.xml><?xml version="1.0" encoding="utf-8"?>
+<file path=ppt/slides/slide36.xml><?xml version="1.0" encoding="utf-8"?>
+<p:sld xmlns:a="http://schemas.openxmlformats.org/drawingml/2006/main" xmlns:r="http://schemas.openxmlformats.org/officeDocument/2006/relationships" xmlns:p="http://schemas.openxmlformats.org/presentationml/2006/main">
+  <p:cSld>
+    <p:spTree>
+      <p:nvGrpSpPr>
+        <p:cNvPr id="1" name="">
+          <a:extLst>
+            <a:ext uri="{FF2B5EF4-FFF2-40B4-BE49-F238E27FC236}">
+              <a16:creationId xmlns:a16="http://schemas.microsoft.com/office/drawing/2014/main" id="{504AD86B-E5D9-B4D5-F5D9-4025AF7DB762}"/>
+            </a:ext>
+          </a:extLst>
+        </p:cNvPr>
+        <p:cNvGrpSpPr/>
+        <p:nvPr/>
+      </p:nvGrpSpPr>
+      <p:grpSpPr>
+        <a:xfrm>
+          <a:off x="0" y="0"/>
+          <a:ext cx="0" cy="0"/>
+          <a:chOff x="0" y="0"/>
+          <a:chExt cx="0" cy="0"/>
+        </a:xfrm>
+      </p:grpSpPr>
+      <p:sp>
+        <p:nvSpPr>
+          <p:cNvPr id="4" name="Title 3">
+            <a:extLst>
+              <a:ext uri="{FF2B5EF4-FFF2-40B4-BE49-F238E27FC236}">
+                <a16:creationId xmlns:a16="http://schemas.microsoft.com/office/drawing/2014/main" id="{35B34568-AE32-C21D-607F-E1964D05D5A2}"/>
+              </a:ext>
+            </a:extLst>
+          </p:cNvPr>
+          <p:cNvSpPr>
+            <a:spLocks noGrp="1"/>
+          </p:cNvSpPr>
+          <p:nvPr>
+            <p:ph type="title"/>
+          </p:nvPr>
+        </p:nvSpPr>
+        <p:spPr>
+          <a:xfrm>
+            <a:off x="829115" y="2931914"/>
+            <a:ext cx="7886700" cy="876035"/>
+          </a:xfrm>
+        </p:spPr>
+        <p:txBody>
+          <a:bodyPr>
+            <a:noAutofit/>
+          </a:bodyPr>
+          <a:lstStyle/>
+          <a:p>
+            <a:r>
+              <a:rPr lang="en-US" sz="3200" b="1" dirty="0">
+                <a:latin typeface="+mn-lt"/>
+              </a:rPr>
+              <a:t>Code example</a:t>
+            </a:r>
+            <a:r>
+              <a:rPr lang="en-US" sz="3200" dirty="0">
+                <a:latin typeface="+mn-lt"/>
+              </a:rPr>
+              <a:t>: Solving Tic-Tac-Toe with Heuristic Alpha-Beta Tree Search</a:t>
+            </a:r>
+          </a:p>
+        </p:txBody>
+      </p:sp>
+      <p:sp>
+        <p:nvSpPr>
+          <p:cNvPr id="5" name="TextBox 4">
+            <a:extLst>
+              <a:ext uri="{FF2B5EF4-FFF2-40B4-BE49-F238E27FC236}">
+                <a16:creationId xmlns:a16="http://schemas.microsoft.com/office/drawing/2014/main" id="{07288892-A5B5-4568-C2AA-FA7CFFF66CDB}"/>
+              </a:ext>
+            </a:extLst>
+          </p:cNvPr>
+          <p:cNvSpPr txBox="1"/>
+          <p:nvPr/>
+        </p:nvSpPr>
+        <p:spPr>
+          <a:xfrm>
+            <a:off x="893299" y="5365946"/>
+            <a:ext cx="6608298" cy="253916"/>
+          </a:xfrm>
+          <a:prstGeom prst="rect">
+            <a:avLst/>
+          </a:prstGeom>
+          <a:noFill/>
+        </p:spPr>
+        <p:txBody>
+          <a:bodyPr wrap="square" rtlCol="0">
+            <a:spAutoFit/>
+          </a:bodyPr>
+          <a:lstStyle/>
+          <a:p>
+            <a:r>
+              <a:rPr lang="en-US" sz="1050" dirty="0"/>
+              <a:t>See Code on </a:t>
+            </a:r>
+            <a:r>
+              <a:rPr lang="en-US" sz="1050" dirty="0">
+                <a:hlinkClick r:id="rId2"/>
+              </a:rPr>
+              <a:t>https://michael.hahsler.net/Introduction_to_Artificial_Intelligence/</a:t>
+            </a:r>
+            <a:r>
+              <a:rPr lang="en-US" sz="1050" dirty="0"/>
+              <a:t> </a:t>
+            </a:r>
+          </a:p>
+        </p:txBody>
+      </p:sp>
+    </p:spTree>
+    <p:extLst>
+      <p:ext uri="{BB962C8B-B14F-4D97-AF65-F5344CB8AC3E}">
+        <p14:creationId xmlns:p14="http://schemas.microsoft.com/office/powerpoint/2010/main" val="3701741482"/>
+      </p:ext>
+    </p:extLst>
+  </p:cSld>
+  <p:clrMapOvr>
+    <a:masterClrMapping/>
+  </p:clrMapOvr>
+</p:sld>
+</file>
+
+<file path=ppt/slides/slide37.xml><?xml version="1.0" encoding="utf-8"?>
 <p:sld xmlns:a="http://schemas.openxmlformats.org/drawingml/2006/main" xmlns:r="http://schemas.openxmlformats.org/officeDocument/2006/relationships" xmlns:p="http://schemas.openxmlformats.org/presentationml/2006/main">
   <p:cSld>
     <p:spTree>
@@ -37116,7 +37483,7 @@
 </p:sld>
 </file>
 
-<file path=ppt/slides/slide34.xml><?xml version="1.0" encoding="utf-8"?>
+<file path=ppt/slides/slide38.xml><?xml version="1.0" encoding="utf-8"?>
 <p:sld xmlns:a="http://schemas.openxmlformats.org/drawingml/2006/main" xmlns:r="http://schemas.openxmlformats.org/officeDocument/2006/relationships" xmlns:p="http://schemas.openxmlformats.org/presentationml/2006/main">
   <p:cSld>
     <p:spTree>
@@ -38943,7 +39310,7 @@
 </p:sld>
 </file>
 
-<file path=ppt/slides/slide35.xml><?xml version="1.0" encoding="utf-8"?>
+<file path=ppt/slides/slide39.xml><?xml version="1.0" encoding="utf-8"?>
 <p:sld xmlns:a="http://schemas.openxmlformats.org/drawingml/2006/main" xmlns:r="http://schemas.openxmlformats.org/officeDocument/2006/relationships" xmlns:p="http://schemas.openxmlformats.org/presentationml/2006/main">
   <p:cSld>
     <p:spTree>
@@ -39382,7 +39749,486 @@
 </p:sld>
 </file>
 
-<file path=ppt/slides/slide36.xml><?xml version="1.0" encoding="utf-8"?>
+<file path=ppt/slides/slide4.xml><?xml version="1.0" encoding="utf-8"?>
+<p:sld xmlns:a="http://schemas.openxmlformats.org/drawingml/2006/main" xmlns:r="http://schemas.openxmlformats.org/officeDocument/2006/relationships" xmlns:p="http://schemas.openxmlformats.org/presentationml/2006/main">
+  <p:cSld>
+    <p:bg>
+      <p:bgPr>
+        <a:solidFill>
+          <a:schemeClr val="bg1"/>
+        </a:solidFill>
+        <a:effectLst/>
+      </p:bgPr>
+    </p:bg>
+    <p:spTree>
+      <p:nvGrpSpPr>
+        <p:cNvPr id="1" name=""/>
+        <p:cNvGrpSpPr/>
+        <p:nvPr/>
+      </p:nvGrpSpPr>
+      <p:grpSpPr>
+        <a:xfrm>
+          <a:off x="0" y="0"/>
+          <a:ext cx="0" cy="0"/>
+          <a:chOff x="0" y="0"/>
+          <a:chExt cx="0" cy="0"/>
+        </a:xfrm>
+      </p:grpSpPr>
+      <p:sp>
+        <p:nvSpPr>
+          <p:cNvPr id="2" name="Title 1">
+            <a:extLst>
+              <a:ext uri="{FF2B5EF4-FFF2-40B4-BE49-F238E27FC236}">
+                <a16:creationId xmlns:a16="http://schemas.microsoft.com/office/drawing/2014/main" id="{BD828217-054C-40B5-85A9-DE0A5B353D0A}"/>
+              </a:ext>
+            </a:extLst>
+          </p:cNvPr>
+          <p:cNvSpPr>
+            <a:spLocks noGrp="1"/>
+          </p:cNvSpPr>
+          <p:nvPr>
+            <p:ph type="title"/>
+          </p:nvPr>
+        </p:nvSpPr>
+        <p:spPr>
+          <a:xfrm>
+            <a:off x="3724072" y="629268"/>
+            <a:ext cx="4939867" cy="1286160"/>
+          </a:xfrm>
+        </p:spPr>
+        <p:txBody>
+          <a:bodyPr anchor="b">
+            <a:normAutofit/>
+          </a:bodyPr>
+          <a:lstStyle/>
+          <a:p>
+            <a:r>
+              <a:rPr lang="en-US" sz="4100" dirty="0"/>
+              <a:t>Definition of a Game</a:t>
+            </a:r>
+          </a:p>
+        </p:txBody>
+      </p:sp>
+      <mc:AlternateContent xmlns:mc="http://schemas.openxmlformats.org/markup-compatibility/2006" xmlns:a14="http://schemas.microsoft.com/office/drawing/2010/main">
+        <mc:Choice Requires="a14">
+          <p:sp>
+            <p:nvSpPr>
+              <p:cNvPr id="3" name="Content Placeholder 2">
+                <a:extLst>
+                  <a:ext uri="{FF2B5EF4-FFF2-40B4-BE49-F238E27FC236}">
+                    <a16:creationId xmlns:a16="http://schemas.microsoft.com/office/drawing/2014/main" id="{CA91934C-64CB-4EB4-BD68-E07D357C904F}"/>
+                  </a:ext>
+                </a:extLst>
+              </p:cNvPr>
+              <p:cNvSpPr>
+                <a:spLocks noGrp="1"/>
+              </p:cNvSpPr>
+              <p:nvPr>
+                <p:ph idx="1"/>
+              </p:nvPr>
+            </p:nvSpPr>
+            <p:spPr>
+              <a:xfrm>
+                <a:off x="3724073" y="2590800"/>
+                <a:ext cx="5038927" cy="3633019"/>
+              </a:xfrm>
+            </p:spPr>
+            <p:txBody>
+              <a:bodyPr>
+                <a:noAutofit/>
+              </a:bodyPr>
+              <a:lstStyle/>
+              <a:p>
+                <a:pPr marL="0" indent="0">
+                  <a:buNone/>
+                </a:pPr>
+                <a:r>
+                  <a:rPr lang="en-US" sz="1600" b="1" dirty="0"/>
+                  <a:t>Definition:</a:t>
+                </a:r>
+                <a:endParaRPr lang="en-US" sz="2000" i="1" dirty="0">
+                  <a:latin typeface="Cambria Math" panose="02040503050406030204" pitchFamily="18" charset="0"/>
+                </a:endParaRPr>
+              </a:p>
+              <a:p>
+                <a:pPr marL="457200" lvl="1" indent="0">
+                  <a:buNone/>
+                </a:pPr>
+                <a14:m>
+                  <m:oMath xmlns:m="http://schemas.openxmlformats.org/officeDocument/2006/math">
+                    <m:sSub>
+                      <m:sSubPr>
+                        <m:ctrlPr>
+                          <a:rPr lang="en-US" sz="1400" i="1">
+                            <a:latin typeface="Cambria Math" panose="02040503050406030204" pitchFamily="18" charset="0"/>
+                          </a:rPr>
+                        </m:ctrlPr>
+                      </m:sSubPr>
+                      <m:e>
+                        <m:r>
+                          <a:rPr lang="en-US" sz="1400" i="1">
+                            <a:latin typeface="Cambria Math" panose="02040503050406030204" pitchFamily="18" charset="0"/>
+                          </a:rPr>
+                          <m:t>𝑠</m:t>
+                        </m:r>
+                      </m:e>
+                      <m:sub>
+                        <m:r>
+                          <a:rPr lang="en-US" sz="1400" i="1">
+                            <a:latin typeface="Cambria Math" panose="02040503050406030204" pitchFamily="18" charset="0"/>
+                          </a:rPr>
+                          <m:t>0</m:t>
+                        </m:r>
+                      </m:sub>
+                    </m:sSub>
+                  </m:oMath>
+                </a14:m>
+                <a:r>
+                  <a:rPr lang="en-US" sz="1400" dirty="0"/>
+                  <a:t>		The initial state (position, board, hand).</a:t>
+                </a:r>
+              </a:p>
+              <a:p>
+                <a:pPr marL="457200" lvl="1" indent="0">
+                  <a:buNone/>
+                </a:pPr>
+                <a14:m>
+                  <m:oMath xmlns:m="http://schemas.openxmlformats.org/officeDocument/2006/math">
+                    <m:r>
+                      <a:rPr lang="en-US" sz="1400" i="1">
+                        <a:latin typeface="Cambria Math" panose="02040503050406030204" pitchFamily="18" charset="0"/>
+                      </a:rPr>
+                      <m:t>𝐴𝑐𝑡𝑖𝑜𝑛𝑠</m:t>
+                    </m:r>
+                    <m:r>
+                      <a:rPr lang="en-US" sz="1400" i="1">
+                        <a:latin typeface="Cambria Math" panose="02040503050406030204" pitchFamily="18" charset="0"/>
+                      </a:rPr>
+                      <m:t>(</m:t>
+                    </m:r>
+                    <m:r>
+                      <a:rPr lang="en-US" sz="1400" i="1">
+                        <a:latin typeface="Cambria Math" panose="02040503050406030204" pitchFamily="18" charset="0"/>
+                      </a:rPr>
+                      <m:t>𝑠</m:t>
+                    </m:r>
+                    <m:r>
+                      <a:rPr lang="en-US" sz="1400" i="1">
+                        <a:latin typeface="Cambria Math" panose="02040503050406030204" pitchFamily="18" charset="0"/>
+                      </a:rPr>
+                      <m:t>)</m:t>
+                    </m:r>
+                  </m:oMath>
+                </a14:m>
+                <a:r>
+                  <a:rPr lang="en-US" sz="1400" dirty="0"/>
+                  <a:t> 	Legal moves in state </a:t>
+                </a:r>
+                <a14:m>
+                  <m:oMath xmlns:m="http://schemas.openxmlformats.org/officeDocument/2006/math">
+                    <m:r>
+                      <a:rPr lang="en-US" sz="1400" i="1">
+                        <a:latin typeface="Cambria Math" panose="02040503050406030204" pitchFamily="18" charset="0"/>
+                      </a:rPr>
+                      <m:t>𝑠</m:t>
+                    </m:r>
+                  </m:oMath>
+                </a14:m>
+                <a:r>
+                  <a:rPr lang="en-US" sz="1400" dirty="0"/>
+                  <a:t>. </a:t>
+                </a:r>
+              </a:p>
+              <a:p>
+                <a:pPr marL="457200" lvl="1" indent="0">
+                  <a:buNone/>
+                </a:pPr>
+                <a14:m>
+                  <m:oMath xmlns:m="http://schemas.openxmlformats.org/officeDocument/2006/math">
+                    <m:r>
+                      <a:rPr lang="en-US" sz="1400" i="1">
+                        <a:latin typeface="Cambria Math" panose="02040503050406030204" pitchFamily="18" charset="0"/>
+                      </a:rPr>
+                      <m:t>𝑅𝑒𝑠𝑢𝑙𝑡</m:t>
+                    </m:r>
+                    <m:r>
+                      <a:rPr lang="en-US" sz="1400" i="1">
+                        <a:latin typeface="Cambria Math" panose="02040503050406030204" pitchFamily="18" charset="0"/>
+                      </a:rPr>
+                      <m:t>(</m:t>
+                    </m:r>
+                    <m:r>
+                      <a:rPr lang="en-US" sz="1400" i="1">
+                        <a:latin typeface="Cambria Math" panose="02040503050406030204" pitchFamily="18" charset="0"/>
+                      </a:rPr>
+                      <m:t>𝑠</m:t>
+                    </m:r>
+                    <m:r>
+                      <a:rPr lang="en-US" sz="1400" i="1">
+                        <a:latin typeface="Cambria Math" panose="02040503050406030204" pitchFamily="18" charset="0"/>
+                      </a:rPr>
+                      <m:t>,</m:t>
+                    </m:r>
+                    <m:r>
+                      <a:rPr lang="en-US" sz="1400" i="1">
+                        <a:latin typeface="Cambria Math" panose="02040503050406030204" pitchFamily="18" charset="0"/>
+                      </a:rPr>
+                      <m:t>𝑎</m:t>
+                    </m:r>
+                    <m:r>
+                      <a:rPr lang="en-US" sz="1400" i="1">
+                        <a:latin typeface="Cambria Math" panose="02040503050406030204" pitchFamily="18" charset="0"/>
+                      </a:rPr>
+                      <m:t>)</m:t>
+                    </m:r>
+                  </m:oMath>
+                </a14:m>
+                <a:r>
+                  <a:rPr lang="en-US" sz="1400" dirty="0"/>
+                  <a:t>	Transition model.</a:t>
+                </a:r>
+              </a:p>
+              <a:p>
+                <a:pPr marL="457200" lvl="1" indent="0">
+                  <a:buNone/>
+                </a:pPr>
+                <a14:m>
+                  <m:oMath xmlns:m="http://schemas.openxmlformats.org/officeDocument/2006/math">
+                    <m:r>
+                      <a:rPr lang="en-US" sz="1400" b="0" i="1" smtClean="0">
+                        <a:latin typeface="Cambria Math" panose="02040503050406030204" pitchFamily="18" charset="0"/>
+                      </a:rPr>
+                      <m:t>𝑇</m:t>
+                    </m:r>
+                    <m:r>
+                      <a:rPr lang="en-US" sz="1400" i="1">
+                        <a:latin typeface="Cambria Math" panose="02040503050406030204" pitchFamily="18" charset="0"/>
+                      </a:rPr>
+                      <m:t>𝑒𝑟𝑚𝑖𝑛𝑎𝑙</m:t>
+                    </m:r>
+                    <m:r>
+                      <a:rPr lang="en-US" sz="1400" i="1">
+                        <a:latin typeface="Cambria Math" panose="02040503050406030204" pitchFamily="18" charset="0"/>
+                      </a:rPr>
+                      <m:t>(</m:t>
+                    </m:r>
+                    <m:r>
+                      <a:rPr lang="en-US" sz="1400" i="1">
+                        <a:latin typeface="Cambria Math" panose="02040503050406030204" pitchFamily="18" charset="0"/>
+                      </a:rPr>
+                      <m:t>𝑠</m:t>
+                    </m:r>
+                    <m:r>
+                      <a:rPr lang="en-US" sz="1400" i="1">
+                        <a:latin typeface="Cambria Math" panose="02040503050406030204" pitchFamily="18" charset="0"/>
+                      </a:rPr>
+                      <m:t>)</m:t>
+                    </m:r>
+                  </m:oMath>
+                </a14:m>
+                <a:r>
+                  <a:rPr lang="en-US" sz="1400" dirty="0"/>
+                  <a:t> 	Test for terminal states.</a:t>
+                </a:r>
+              </a:p>
+              <a:p>
+                <a:pPr marL="457200" lvl="1" indent="0">
+                  <a:buNone/>
+                </a:pPr>
+                <a14:m>
+                  <m:oMath xmlns:m="http://schemas.openxmlformats.org/officeDocument/2006/math">
+                    <m:r>
+                      <a:rPr lang="en-US" sz="1400" i="1">
+                        <a:latin typeface="Cambria Math" panose="02040503050406030204" pitchFamily="18" charset="0"/>
+                      </a:rPr>
+                      <m:t>𝑈𝑡𝑖𝑙𝑖𝑡𝑦</m:t>
+                    </m:r>
+                    <m:r>
+                      <a:rPr lang="en-US" sz="1400" i="1">
+                        <a:latin typeface="Cambria Math" panose="02040503050406030204" pitchFamily="18" charset="0"/>
+                      </a:rPr>
+                      <m:t>(</m:t>
+                    </m:r>
+                    <m:r>
+                      <a:rPr lang="en-US" sz="1400" i="1">
+                        <a:latin typeface="Cambria Math" panose="02040503050406030204" pitchFamily="18" charset="0"/>
+                      </a:rPr>
+                      <m:t>𝑠</m:t>
+                    </m:r>
+                    <m:r>
+                      <a:rPr lang="en-US" sz="1400" i="1">
+                        <a:latin typeface="Cambria Math" panose="02040503050406030204" pitchFamily="18" charset="0"/>
+                      </a:rPr>
+                      <m:t>)</m:t>
+                    </m:r>
+                  </m:oMath>
+                </a14:m>
+                <a:r>
+                  <a:rPr lang="en-US" sz="1400" dirty="0"/>
+                  <a:t>	Utility for player Max for terminal states.</a:t>
+                </a:r>
+              </a:p>
+            </p:txBody>
+          </p:sp>
+        </mc:Choice>
+        <mc:Fallback xmlns="">
+          <p:sp>
+            <p:nvSpPr>
+              <p:cNvPr id="3" name="Content Placeholder 2">
+                <a:extLst>
+                  <a:ext uri="{FF2B5EF4-FFF2-40B4-BE49-F238E27FC236}">
+                    <a16:creationId xmlns:a16="http://schemas.microsoft.com/office/drawing/2014/main" id="{CA91934C-64CB-4EB4-BD68-E07D357C904F}"/>
+                  </a:ext>
+                </a:extLst>
+              </p:cNvPr>
+              <p:cNvSpPr>
+                <a:spLocks noGrp="1" noRot="1" noChangeAspect="1" noMove="1" noResize="1" noEditPoints="1" noAdjustHandles="1" noChangeArrowheads="1" noChangeShapeType="1" noTextEdit="1"/>
+              </p:cNvSpPr>
+              <p:nvPr>
+                <p:ph idx="1"/>
+              </p:nvPr>
+            </p:nvSpPr>
+            <p:spPr>
+              <a:xfrm>
+                <a:off x="3724073" y="2590800"/>
+                <a:ext cx="5038927" cy="3633019"/>
+              </a:xfrm>
+              <a:blipFill>
+                <a:blip r:embed="rId2"/>
+                <a:stretch>
+                  <a:fillRect l="-726" t="-1174"/>
+                </a:stretch>
+              </a:blipFill>
+            </p:spPr>
+            <p:txBody>
+              <a:bodyPr/>
+              <a:lstStyle/>
+              <a:p>
+                <a:r>
+                  <a:rPr lang="en-US">
+                    <a:noFill/>
+                  </a:rPr>
+                  <a:t> </a:t>
+                </a:r>
+              </a:p>
+            </p:txBody>
+          </p:sp>
+        </mc:Fallback>
+      </mc:AlternateContent>
+      <p:cxnSp>
+        <p:nvCxnSpPr>
+          <p:cNvPr id="9" name="Straight Connector 8">
+            <a:extLst>
+              <a:ext uri="{FF2B5EF4-FFF2-40B4-BE49-F238E27FC236}">
+                <a16:creationId xmlns:a16="http://schemas.microsoft.com/office/drawing/2014/main" id="{A7F400EE-A8A5-48AF-B4D6-291B52C6F0B0}"/>
+              </a:ext>
+              <a:ext uri="{C183D7F6-B498-43B3-948B-1728B52AA6E4}">
+                <adec:decorative xmlns:adec="http://schemas.microsoft.com/office/drawing/2017/decorative" val="1"/>
+              </a:ext>
+            </a:extLst>
+          </p:cNvPr>
+          <p:cNvCxnSpPr>
+            <a:cxnSpLocks noGrp="1" noRot="1" noChangeAspect="1" noMove="1" noResize="1" noEditPoints="1" noAdjustHandles="1" noChangeArrowheads="1" noChangeShapeType="1"/>
+          </p:cNvCxnSpPr>
+          <p:nvPr>
+            <p:extLst>
+              <p:ext uri="{386F3935-93C4-4BCD-93E2-E3B085C9AB24}">
+                <p16:designElem xmlns:p16="http://schemas.microsoft.com/office/powerpoint/2015/main" val="1"/>
+              </p:ext>
+            </p:extLst>
+          </p:nvPr>
+        </p:nvCxnSpPr>
+        <p:spPr>
+          <a:xfrm>
+            <a:off x="3810700" y="2115117"/>
+            <a:ext cx="4732020" cy="0"/>
+          </a:xfrm>
+          <a:prstGeom prst="line">
+            <a:avLst/>
+          </a:prstGeom>
+          <a:ln w="19050">
+            <a:solidFill>
+              <a:schemeClr val="accent1"/>
+            </a:solidFill>
+          </a:ln>
+        </p:spPr>
+        <p:style>
+          <a:lnRef idx="1">
+            <a:schemeClr val="accent1"/>
+          </a:lnRef>
+          <a:fillRef idx="0">
+            <a:schemeClr val="accent1"/>
+          </a:fillRef>
+          <a:effectRef idx="0">
+            <a:schemeClr val="accent1"/>
+          </a:effectRef>
+          <a:fontRef idx="minor">
+            <a:schemeClr val="tx1"/>
+          </a:fontRef>
+        </p:style>
+      </p:cxnSp>
+      <p:pic>
+        <p:nvPicPr>
+          <p:cNvPr id="6" name="Picture 2">
+            <a:extLst>
+              <a:ext uri="{FF2B5EF4-FFF2-40B4-BE49-F238E27FC236}">
+                <a16:creationId xmlns:a16="http://schemas.microsoft.com/office/drawing/2014/main" id="{932AC7A2-B898-4053-9E19-C47E7A2F3659}"/>
+              </a:ext>
+              <a:ext uri="{C183D7F6-B498-43B3-948B-1728B52AA6E4}">
+                <adec:decorative xmlns:adec="http://schemas.microsoft.com/office/drawing/2017/decorative" val="1"/>
+              </a:ext>
+            </a:extLst>
+          </p:cNvPr>
+          <p:cNvPicPr>
+            <a:picLocks noChangeAspect="1" noChangeArrowheads="1"/>
+          </p:cNvPicPr>
+          <p:nvPr/>
+        </p:nvPicPr>
+        <p:blipFill rotWithShape="1">
+          <a:blip r:embed="rId3">
+            <a:extLst>
+              <a:ext uri="{28A0092B-C50C-407E-A947-70E740481C1C}">
+                <a14:useLocalDpi xmlns:a14="http://schemas.microsoft.com/office/drawing/2010/main" val="0"/>
+              </a:ext>
+            </a:extLst>
+          </a:blip>
+          <a:srcRect l="47863" t="1982" r="19372" b="938"/>
+          <a:stretch/>
+        </p:blipFill>
+        <p:spPr bwMode="auto">
+          <a:xfrm>
+            <a:off x="0" y="0"/>
+            <a:ext cx="3384395" cy="6842361"/>
+          </a:xfrm>
+          <a:prstGeom prst="rect">
+            <a:avLst/>
+          </a:prstGeom>
+          <a:noFill/>
+          <a:extLst>
+            <a:ext uri="{909E8E84-426E-40DD-AFC4-6F175D3DCCD1}">
+              <a14:hiddenFill xmlns:a14="http://schemas.microsoft.com/office/drawing/2010/main">
+                <a:solidFill>
+                  <a:srgbClr val="FFFFFF"/>
+                </a:solidFill>
+              </a14:hiddenFill>
+            </a:ext>
+          </a:extLst>
+        </p:spPr>
+      </p:pic>
+    </p:spTree>
+    <p:extLst>
+      <p:ext uri="{BB962C8B-B14F-4D97-AF65-F5344CB8AC3E}">
+        <p14:creationId xmlns:p14="http://schemas.microsoft.com/office/powerpoint/2010/main" val="2636748950"/>
+      </p:ext>
+    </p:extLst>
+  </p:cSld>
+  <p:clrMapOvr>
+    <a:masterClrMapping/>
+  </p:clrMapOvr>
+</p:sld>
+</file>
+
+<file path=ppt/slides/slide40.xml><?xml version="1.0" encoding="utf-8"?>
 <p:sld xmlns:a="http://schemas.openxmlformats.org/drawingml/2006/main" xmlns:r="http://schemas.openxmlformats.org/officeDocument/2006/relationships" xmlns:p="http://schemas.openxmlformats.org/presentationml/2006/main">
   <p:cSld>
     <p:bg>
@@ -39628,7 +40474,7 @@
 </p:sld>
 </file>
 
-<file path=ppt/slides/slide37.xml><?xml version="1.0" encoding="utf-8"?>
+<file path=ppt/slides/slide41.xml><?xml version="1.0" encoding="utf-8"?>
 <p:sld xmlns:a="http://schemas.openxmlformats.org/drawingml/2006/main" xmlns:r="http://schemas.openxmlformats.org/officeDocument/2006/relationships" xmlns:p="http://schemas.openxmlformats.org/presentationml/2006/main">
   <p:cSld>
     <p:spTree>
@@ -40261,7 +41107,7 @@
 </p:sld>
 </file>
 
-<file path=ppt/slides/slide38.xml><?xml version="1.0" encoding="utf-8"?>
+<file path=ppt/slides/slide42.xml><?xml version="1.0" encoding="utf-8"?>
 <p:sld xmlns:a="http://schemas.openxmlformats.org/drawingml/2006/main" xmlns:r="http://schemas.openxmlformats.org/officeDocument/2006/relationships" xmlns:p="http://schemas.openxmlformats.org/presentationml/2006/main">
   <p:cSld>
     <p:spTree>
@@ -41412,7 +42258,7 @@
 </p:sld>
 </file>
 
-<file path=ppt/slides/slide39.xml><?xml version="1.0" encoding="utf-8"?>
+<file path=ppt/slides/slide43.xml><?xml version="1.0" encoding="utf-8"?>
 <p:sld xmlns:a="http://schemas.openxmlformats.org/drawingml/2006/main" xmlns:r="http://schemas.openxmlformats.org/officeDocument/2006/relationships" xmlns:p="http://schemas.openxmlformats.org/presentationml/2006/main">
   <p:cSld>
     <p:spTree>
@@ -41595,20 +42441,18 @@
 </p:sld>
 </file>
 
-<file path=ppt/slides/slide4.xml><?xml version="1.0" encoding="utf-8"?>
+<file path=ppt/slides/slide44.xml><?xml version="1.0" encoding="utf-8"?>
 <p:sld xmlns:a="http://schemas.openxmlformats.org/drawingml/2006/main" xmlns:r="http://schemas.openxmlformats.org/officeDocument/2006/relationships" xmlns:p="http://schemas.openxmlformats.org/presentationml/2006/main">
   <p:cSld>
-    <p:bg>
-      <p:bgPr>
-        <a:solidFill>
-          <a:schemeClr val="bg1"/>
-        </a:solidFill>
-        <a:effectLst/>
-      </p:bgPr>
-    </p:bg>
     <p:spTree>
       <p:nvGrpSpPr>
-        <p:cNvPr id="1" name=""/>
+        <p:cNvPr id="1" name="">
+          <a:extLst>
+            <a:ext uri="{FF2B5EF4-FFF2-40B4-BE49-F238E27FC236}">
+              <a16:creationId xmlns:a16="http://schemas.microsoft.com/office/drawing/2014/main" id="{977E1ADF-6E56-3887-4770-EC7F540B001E}"/>
+            </a:ext>
+          </a:extLst>
+        </p:cNvPr>
         <p:cNvGrpSpPr/>
         <p:nvPr/>
       </p:nvGrpSpPr>
@@ -41622,10 +42466,10 @@
       </p:grpSpPr>
       <p:sp>
         <p:nvSpPr>
-          <p:cNvPr id="2" name="Title 1">
+          <p:cNvPr id="4" name="Title 3">
             <a:extLst>
               <a:ext uri="{FF2B5EF4-FFF2-40B4-BE49-F238E27FC236}">
-                <a16:creationId xmlns:a16="http://schemas.microsoft.com/office/drawing/2014/main" id="{BD828217-054C-40B5-85A9-DE0A5B353D0A}"/>
+                <a16:creationId xmlns:a16="http://schemas.microsoft.com/office/drawing/2014/main" id="{9D7DAA9D-2004-8B47-A8F5-38CA4A2389FE}"/>
               </a:ext>
             </a:extLst>
           </p:cNvPr>
@@ -41638,433 +42482,80 @@
         </p:nvSpPr>
         <p:spPr>
           <a:xfrm>
-            <a:off x="3724072" y="629268"/>
-            <a:ext cx="4939867" cy="1286160"/>
+            <a:off x="829115" y="2931914"/>
+            <a:ext cx="7886700" cy="876035"/>
           </a:xfrm>
         </p:spPr>
         <p:txBody>
-          <a:bodyPr anchor="b">
-            <a:normAutofit/>
+          <a:bodyPr>
+            <a:noAutofit/>
           </a:bodyPr>
           <a:lstStyle/>
           <a:p>
             <a:r>
-              <a:rPr lang="en-US" sz="4100" dirty="0"/>
-              <a:t>Definition of a Game</a:t>
+              <a:rPr lang="en-US" sz="3200" b="1" dirty="0">
+                <a:latin typeface="+mn-lt"/>
+              </a:rPr>
+              <a:t>Code example</a:t>
+            </a:r>
+            <a:r>
+              <a:rPr lang="en-US" sz="3200" dirty="0">
+                <a:latin typeface="+mn-lt"/>
+              </a:rPr>
+              <a:t>: Solving Tic-Tac-Toe with Pure Monte Carlo Search</a:t>
             </a:r>
           </a:p>
         </p:txBody>
       </p:sp>
-      <mc:AlternateContent xmlns:mc="http://schemas.openxmlformats.org/markup-compatibility/2006" xmlns:a14="http://schemas.microsoft.com/office/drawing/2010/main">
-        <mc:Choice Requires="a14">
-          <p:sp>
-            <p:nvSpPr>
-              <p:cNvPr id="3" name="Content Placeholder 2">
-                <a:extLst>
-                  <a:ext uri="{FF2B5EF4-FFF2-40B4-BE49-F238E27FC236}">
-                    <a16:creationId xmlns:a16="http://schemas.microsoft.com/office/drawing/2014/main" id="{CA91934C-64CB-4EB4-BD68-E07D357C904F}"/>
-                  </a:ext>
-                </a:extLst>
-              </p:cNvPr>
-              <p:cNvSpPr>
-                <a:spLocks noGrp="1"/>
-              </p:cNvSpPr>
-              <p:nvPr>
-                <p:ph idx="1"/>
-              </p:nvPr>
-            </p:nvSpPr>
-            <p:spPr>
-              <a:xfrm>
-                <a:off x="3724073" y="2590800"/>
-                <a:ext cx="5038927" cy="3633019"/>
-              </a:xfrm>
-            </p:spPr>
-            <p:txBody>
-              <a:bodyPr>
-                <a:noAutofit/>
-              </a:bodyPr>
-              <a:lstStyle/>
-              <a:p>
-                <a:pPr marL="0" indent="0">
-                  <a:buNone/>
-                </a:pPr>
-                <a:r>
-                  <a:rPr lang="en-US" sz="1600" b="1" dirty="0"/>
-                  <a:t>Definition:</a:t>
-                </a:r>
-                <a:endParaRPr lang="en-US" sz="2000" i="1" dirty="0">
-                  <a:latin typeface="Cambria Math" panose="02040503050406030204" pitchFamily="18" charset="0"/>
-                </a:endParaRPr>
-              </a:p>
-              <a:p>
-                <a:pPr marL="457200" lvl="1" indent="0">
-                  <a:buNone/>
-                </a:pPr>
-                <a14:m>
-                  <m:oMath xmlns:m="http://schemas.openxmlformats.org/officeDocument/2006/math">
-                    <m:sSub>
-                      <m:sSubPr>
-                        <m:ctrlPr>
-                          <a:rPr lang="en-US" sz="1400" i="1">
-                            <a:latin typeface="Cambria Math" panose="02040503050406030204" pitchFamily="18" charset="0"/>
-                          </a:rPr>
-                        </m:ctrlPr>
-                      </m:sSubPr>
-                      <m:e>
-                        <m:r>
-                          <a:rPr lang="en-US" sz="1400" i="1">
-                            <a:latin typeface="Cambria Math" panose="02040503050406030204" pitchFamily="18" charset="0"/>
-                          </a:rPr>
-                          <m:t>𝑠</m:t>
-                        </m:r>
-                      </m:e>
-                      <m:sub>
-                        <m:r>
-                          <a:rPr lang="en-US" sz="1400" i="1">
-                            <a:latin typeface="Cambria Math" panose="02040503050406030204" pitchFamily="18" charset="0"/>
-                          </a:rPr>
-                          <m:t>0</m:t>
-                        </m:r>
-                      </m:sub>
-                    </m:sSub>
-                  </m:oMath>
-                </a14:m>
-                <a:r>
-                  <a:rPr lang="en-US" sz="1400" dirty="0"/>
-                  <a:t>		The initial state (position, board, hand).</a:t>
-                </a:r>
-              </a:p>
-              <a:p>
-                <a:pPr marL="457200" lvl="1" indent="0">
-                  <a:buNone/>
-                </a:pPr>
-                <a14:m>
-                  <m:oMath xmlns:m="http://schemas.openxmlformats.org/officeDocument/2006/math">
-                    <m:r>
-                      <a:rPr lang="en-US" sz="1400" i="1">
-                        <a:latin typeface="Cambria Math" panose="02040503050406030204" pitchFamily="18" charset="0"/>
-                      </a:rPr>
-                      <m:t>𝐴𝑐𝑡𝑖𝑜𝑛𝑠</m:t>
-                    </m:r>
-                    <m:r>
-                      <a:rPr lang="en-US" sz="1400" i="1">
-                        <a:latin typeface="Cambria Math" panose="02040503050406030204" pitchFamily="18" charset="0"/>
-                      </a:rPr>
-                      <m:t>(</m:t>
-                    </m:r>
-                    <m:r>
-                      <a:rPr lang="en-US" sz="1400" i="1">
-                        <a:latin typeface="Cambria Math" panose="02040503050406030204" pitchFamily="18" charset="0"/>
-                      </a:rPr>
-                      <m:t>𝑠</m:t>
-                    </m:r>
-                    <m:r>
-                      <a:rPr lang="en-US" sz="1400" i="1">
-                        <a:latin typeface="Cambria Math" panose="02040503050406030204" pitchFamily="18" charset="0"/>
-                      </a:rPr>
-                      <m:t>)</m:t>
-                    </m:r>
-                  </m:oMath>
-                </a14:m>
-                <a:r>
-                  <a:rPr lang="en-US" sz="1400" dirty="0"/>
-                  <a:t> 	Legal moves in state </a:t>
-                </a:r>
-                <a14:m>
-                  <m:oMath xmlns:m="http://schemas.openxmlformats.org/officeDocument/2006/math">
-                    <m:r>
-                      <a:rPr lang="en-US" sz="1400" i="1">
-                        <a:latin typeface="Cambria Math" panose="02040503050406030204" pitchFamily="18" charset="0"/>
-                      </a:rPr>
-                      <m:t>𝑠</m:t>
-                    </m:r>
-                  </m:oMath>
-                </a14:m>
-                <a:r>
-                  <a:rPr lang="en-US" sz="1400" dirty="0"/>
-                  <a:t>. </a:t>
-                </a:r>
-              </a:p>
-              <a:p>
-                <a:pPr marL="457200" lvl="1" indent="0">
-                  <a:buNone/>
-                </a:pPr>
-                <a14:m>
-                  <m:oMath xmlns:m="http://schemas.openxmlformats.org/officeDocument/2006/math">
-                    <m:r>
-                      <a:rPr lang="en-US" sz="1400" i="1">
-                        <a:latin typeface="Cambria Math" panose="02040503050406030204" pitchFamily="18" charset="0"/>
-                      </a:rPr>
-                      <m:t>𝑅𝑒𝑠𝑢𝑙𝑡</m:t>
-                    </m:r>
-                    <m:r>
-                      <a:rPr lang="en-US" sz="1400" i="1">
-                        <a:latin typeface="Cambria Math" panose="02040503050406030204" pitchFamily="18" charset="0"/>
-                      </a:rPr>
-                      <m:t>(</m:t>
-                    </m:r>
-                    <m:r>
-                      <a:rPr lang="en-US" sz="1400" i="1">
-                        <a:latin typeface="Cambria Math" panose="02040503050406030204" pitchFamily="18" charset="0"/>
-                      </a:rPr>
-                      <m:t>𝑠</m:t>
-                    </m:r>
-                    <m:r>
-                      <a:rPr lang="en-US" sz="1400" i="1">
-                        <a:latin typeface="Cambria Math" panose="02040503050406030204" pitchFamily="18" charset="0"/>
-                      </a:rPr>
-                      <m:t>,</m:t>
-                    </m:r>
-                    <m:r>
-                      <a:rPr lang="en-US" sz="1400" i="1">
-                        <a:latin typeface="Cambria Math" panose="02040503050406030204" pitchFamily="18" charset="0"/>
-                      </a:rPr>
-                      <m:t>𝑎</m:t>
-                    </m:r>
-                    <m:r>
-                      <a:rPr lang="en-US" sz="1400" i="1">
-                        <a:latin typeface="Cambria Math" panose="02040503050406030204" pitchFamily="18" charset="0"/>
-                      </a:rPr>
-                      <m:t>)</m:t>
-                    </m:r>
-                  </m:oMath>
-                </a14:m>
-                <a:r>
-                  <a:rPr lang="en-US" sz="1400" dirty="0"/>
-                  <a:t>	Transition model.</a:t>
-                </a:r>
-              </a:p>
-              <a:p>
-                <a:pPr marL="457200" lvl="1" indent="0">
-                  <a:buNone/>
-                </a:pPr>
-                <a14:m>
-                  <m:oMath xmlns:m="http://schemas.openxmlformats.org/officeDocument/2006/math">
-                    <m:r>
-                      <a:rPr lang="en-US" sz="1400" b="0" i="1" smtClean="0">
-                        <a:latin typeface="Cambria Math" panose="02040503050406030204" pitchFamily="18" charset="0"/>
-                      </a:rPr>
-                      <m:t>𝑇</m:t>
-                    </m:r>
-                    <m:r>
-                      <a:rPr lang="en-US" sz="1400" i="1">
-                        <a:latin typeface="Cambria Math" panose="02040503050406030204" pitchFamily="18" charset="0"/>
-                      </a:rPr>
-                      <m:t>𝑒𝑟𝑚𝑖𝑛𝑎𝑙</m:t>
-                    </m:r>
-                    <m:r>
-                      <a:rPr lang="en-US" sz="1400" i="1">
-                        <a:latin typeface="Cambria Math" panose="02040503050406030204" pitchFamily="18" charset="0"/>
-                      </a:rPr>
-                      <m:t>(</m:t>
-                    </m:r>
-                    <m:r>
-                      <a:rPr lang="en-US" sz="1400" i="1">
-                        <a:latin typeface="Cambria Math" panose="02040503050406030204" pitchFamily="18" charset="0"/>
-                      </a:rPr>
-                      <m:t>𝑠</m:t>
-                    </m:r>
-                    <m:r>
-                      <a:rPr lang="en-US" sz="1400" i="1">
-                        <a:latin typeface="Cambria Math" panose="02040503050406030204" pitchFamily="18" charset="0"/>
-                      </a:rPr>
-                      <m:t>)</m:t>
-                    </m:r>
-                  </m:oMath>
-                </a14:m>
-                <a:r>
-                  <a:rPr lang="en-US" sz="1400" dirty="0"/>
-                  <a:t> 	Test for terminal states.</a:t>
-                </a:r>
-              </a:p>
-              <a:p>
-                <a:pPr marL="457200" lvl="1" indent="0">
-                  <a:buNone/>
-                </a:pPr>
-                <a14:m>
-                  <m:oMath xmlns:m="http://schemas.openxmlformats.org/officeDocument/2006/math">
-                    <m:r>
-                      <a:rPr lang="en-US" sz="1400" i="1">
-                        <a:latin typeface="Cambria Math" panose="02040503050406030204" pitchFamily="18" charset="0"/>
-                      </a:rPr>
-                      <m:t>𝑈𝑡𝑖𝑙𝑖𝑡𝑦</m:t>
-                    </m:r>
-                    <m:r>
-                      <a:rPr lang="en-US" sz="1400" i="1">
-                        <a:latin typeface="Cambria Math" panose="02040503050406030204" pitchFamily="18" charset="0"/>
-                      </a:rPr>
-                      <m:t>(</m:t>
-                    </m:r>
-                    <m:r>
-                      <a:rPr lang="en-US" sz="1400" i="1">
-                        <a:latin typeface="Cambria Math" panose="02040503050406030204" pitchFamily="18" charset="0"/>
-                      </a:rPr>
-                      <m:t>𝑠</m:t>
-                    </m:r>
-                    <m:r>
-                      <a:rPr lang="en-US" sz="1400" i="1">
-                        <a:latin typeface="Cambria Math" panose="02040503050406030204" pitchFamily="18" charset="0"/>
-                      </a:rPr>
-                      <m:t>)</m:t>
-                    </m:r>
-                  </m:oMath>
-                </a14:m>
-                <a:r>
-                  <a:rPr lang="en-US" sz="1400" dirty="0"/>
-                  <a:t>	Utility for player Max for terminal states.</a:t>
-                </a:r>
-              </a:p>
-            </p:txBody>
-          </p:sp>
-        </mc:Choice>
-        <mc:Fallback xmlns="">
-          <p:sp>
-            <p:nvSpPr>
-              <p:cNvPr id="3" name="Content Placeholder 2">
-                <a:extLst>
-                  <a:ext uri="{FF2B5EF4-FFF2-40B4-BE49-F238E27FC236}">
-                    <a16:creationId xmlns:a16="http://schemas.microsoft.com/office/drawing/2014/main" id="{CA91934C-64CB-4EB4-BD68-E07D357C904F}"/>
-                  </a:ext>
-                </a:extLst>
-              </p:cNvPr>
-              <p:cNvSpPr>
-                <a:spLocks noGrp="1" noRot="1" noChangeAspect="1" noMove="1" noResize="1" noEditPoints="1" noAdjustHandles="1" noChangeArrowheads="1" noChangeShapeType="1" noTextEdit="1"/>
-              </p:cNvSpPr>
-              <p:nvPr>
-                <p:ph idx="1"/>
-              </p:nvPr>
-            </p:nvSpPr>
-            <p:spPr>
-              <a:xfrm>
-                <a:off x="3724073" y="2590800"/>
-                <a:ext cx="5038927" cy="3633019"/>
-              </a:xfrm>
-              <a:blipFill>
-                <a:blip r:embed="rId2"/>
-                <a:stretch>
-                  <a:fillRect l="-726" t="-1174"/>
-                </a:stretch>
-              </a:blipFill>
-            </p:spPr>
-            <p:txBody>
-              <a:bodyPr/>
-              <a:lstStyle/>
-              <a:p>
-                <a:r>
-                  <a:rPr lang="en-US">
-                    <a:noFill/>
-                  </a:rPr>
-                  <a:t> </a:t>
-                </a:r>
-              </a:p>
-            </p:txBody>
-          </p:sp>
-        </mc:Fallback>
-      </mc:AlternateContent>
-      <p:cxnSp>
-        <p:nvCxnSpPr>
-          <p:cNvPr id="9" name="Straight Connector 8">
+      <p:sp>
+        <p:nvSpPr>
+          <p:cNvPr id="5" name="TextBox 4">
             <a:extLst>
               <a:ext uri="{FF2B5EF4-FFF2-40B4-BE49-F238E27FC236}">
-                <a16:creationId xmlns:a16="http://schemas.microsoft.com/office/drawing/2014/main" id="{A7F400EE-A8A5-48AF-B4D6-291B52C6F0B0}"/>
-              </a:ext>
-              <a:ext uri="{C183D7F6-B498-43B3-948B-1728B52AA6E4}">
-                <adec:decorative xmlns:adec="http://schemas.microsoft.com/office/drawing/2017/decorative" val="1"/>
+                <a16:creationId xmlns:a16="http://schemas.microsoft.com/office/drawing/2014/main" id="{6AA1FFCA-9B19-AD58-158A-D35E60D2280C}"/>
               </a:ext>
             </a:extLst>
           </p:cNvPr>
-          <p:cNvCxnSpPr>
-            <a:cxnSpLocks noGrp="1" noRot="1" noChangeAspect="1" noMove="1" noResize="1" noEditPoints="1" noAdjustHandles="1" noChangeArrowheads="1" noChangeShapeType="1"/>
-          </p:cNvCxnSpPr>
-          <p:nvPr>
-            <p:extLst>
-              <p:ext uri="{386F3935-93C4-4BCD-93E2-E3B085C9AB24}">
-                <p16:designElem xmlns:p16="http://schemas.microsoft.com/office/powerpoint/2015/main" val="1"/>
-              </p:ext>
-            </p:extLst>
-          </p:nvPr>
-        </p:nvCxnSpPr>
+          <p:cNvSpPr txBox="1"/>
+          <p:nvPr/>
+        </p:nvSpPr>
         <p:spPr>
           <a:xfrm>
-            <a:off x="3810700" y="2115117"/>
-            <a:ext cx="4732020" cy="0"/>
-          </a:xfrm>
-          <a:prstGeom prst="line">
-            <a:avLst/>
-          </a:prstGeom>
-          <a:ln w="19050">
-            <a:solidFill>
-              <a:schemeClr val="accent1"/>
-            </a:solidFill>
-          </a:ln>
-        </p:spPr>
-        <p:style>
-          <a:lnRef idx="1">
-            <a:schemeClr val="accent1"/>
-          </a:lnRef>
-          <a:fillRef idx="0">
-            <a:schemeClr val="accent1"/>
-          </a:fillRef>
-          <a:effectRef idx="0">
-            <a:schemeClr val="accent1"/>
-          </a:effectRef>
-          <a:fontRef idx="minor">
-            <a:schemeClr val="tx1"/>
-          </a:fontRef>
-        </p:style>
-      </p:cxnSp>
-      <p:pic>
-        <p:nvPicPr>
-          <p:cNvPr id="6" name="Picture 2">
-            <a:extLst>
-              <a:ext uri="{FF2B5EF4-FFF2-40B4-BE49-F238E27FC236}">
-                <a16:creationId xmlns:a16="http://schemas.microsoft.com/office/drawing/2014/main" id="{932AC7A2-B898-4053-9E19-C47E7A2F3659}"/>
-              </a:ext>
-              <a:ext uri="{C183D7F6-B498-43B3-948B-1728B52AA6E4}">
-                <adec:decorative xmlns:adec="http://schemas.microsoft.com/office/drawing/2017/decorative" val="1"/>
-              </a:ext>
-            </a:extLst>
-          </p:cNvPr>
-          <p:cNvPicPr>
-            <a:picLocks noChangeAspect="1" noChangeArrowheads="1"/>
-          </p:cNvPicPr>
-          <p:nvPr/>
-        </p:nvPicPr>
-        <p:blipFill rotWithShape="1">
-          <a:blip r:embed="rId3">
-            <a:extLst>
-              <a:ext uri="{28A0092B-C50C-407E-A947-70E740481C1C}">
-                <a14:useLocalDpi xmlns:a14="http://schemas.microsoft.com/office/drawing/2010/main" val="0"/>
-              </a:ext>
-            </a:extLst>
-          </a:blip>
-          <a:srcRect l="47863" t="1982" r="19372" b="938"/>
-          <a:stretch/>
-        </p:blipFill>
-        <p:spPr bwMode="auto">
-          <a:xfrm>
-            <a:off x="0" y="0"/>
-            <a:ext cx="3384395" cy="6842361"/>
+            <a:off x="893299" y="5365946"/>
+            <a:ext cx="6608298" cy="253916"/>
           </a:xfrm>
           <a:prstGeom prst="rect">
             <a:avLst/>
           </a:prstGeom>
           <a:noFill/>
-          <a:extLst>
-            <a:ext uri="{909E8E84-426E-40DD-AFC4-6F175D3DCCD1}">
-              <a14:hiddenFill xmlns:a14="http://schemas.microsoft.com/office/drawing/2010/main">
-                <a:solidFill>
-                  <a:srgbClr val="FFFFFF"/>
-                </a:solidFill>
-              </a14:hiddenFill>
-            </a:ext>
-          </a:extLst>
         </p:spPr>
-      </p:pic>
+        <p:txBody>
+          <a:bodyPr wrap="square" rtlCol="0">
+            <a:spAutoFit/>
+          </a:bodyPr>
+          <a:lstStyle/>
+          <a:p>
+            <a:r>
+              <a:rPr lang="en-US" sz="1050" dirty="0"/>
+              <a:t>See Code on </a:t>
+            </a:r>
+            <a:r>
+              <a:rPr lang="en-US" sz="1050" dirty="0">
+                <a:hlinkClick r:id="rId2"/>
+              </a:rPr>
+              <a:t>https://michael.hahsler.net/Introduction_to_Artificial_Intelligence/</a:t>
+            </a:r>
+            <a:r>
+              <a:rPr lang="en-US" sz="1050" dirty="0"/>
+              <a:t> </a:t>
+            </a:r>
+          </a:p>
+        </p:txBody>
+      </p:sp>
     </p:spTree>
     <p:extLst>
       <p:ext uri="{BB962C8B-B14F-4D97-AF65-F5344CB8AC3E}">
-        <p14:creationId xmlns:p14="http://schemas.microsoft.com/office/powerpoint/2010/main" val="2636748950"/>
+        <p14:creationId xmlns:p14="http://schemas.microsoft.com/office/powerpoint/2010/main" val="1011918414"/>
       </p:ext>
     </p:extLst>
   </p:cSld>
@@ -42074,7 +42565,7 @@
 </p:sld>
 </file>
 
-<file path=ppt/slides/slide40.xml><?xml version="1.0" encoding="utf-8"?>
+<file path=ppt/slides/slide45.xml><?xml version="1.0" encoding="utf-8"?>
 <p:sld xmlns:a="http://schemas.openxmlformats.org/drawingml/2006/main" xmlns:r="http://schemas.openxmlformats.org/officeDocument/2006/relationships" xmlns:p="http://schemas.openxmlformats.org/presentationml/2006/main">
   <p:cSld>
     <p:spTree>
@@ -42532,7 +43023,7 @@
 </p:sld>
 </file>
 
-<file path=ppt/slides/slide41.xml><?xml version="1.0" encoding="utf-8"?>
+<file path=ppt/slides/slide46.xml><?xml version="1.0" encoding="utf-8"?>
 <p:sld xmlns:a="http://schemas.openxmlformats.org/drawingml/2006/main" xmlns:r="http://schemas.openxmlformats.org/officeDocument/2006/relationships" xmlns:p="http://schemas.openxmlformats.org/presentationml/2006/main">
   <p:cSld>
     <p:spTree>
@@ -42739,7 +43230,7 @@
                             <m:func>
                               <m:funcPr>
                                 <m:ctrlPr>
-                                  <a:rPr lang="en-US" sz="2800" i="1">
+                                  <a:rPr lang="en-US" sz="2800">
                                     <a:latin typeface="Cambria Math" panose="02040503050406030204" pitchFamily="18" charset="0"/>
                                   </a:rPr>
                                 </m:ctrlPr>
@@ -43619,7 +44110,139 @@
 </p:sld>
 </file>
 
-<file path=ppt/slides/slide42.xml><?xml version="1.0" encoding="utf-8"?>
+<file path=ppt/slides/slide47.xml><?xml version="1.0" encoding="utf-8"?>
+<p:sld xmlns:a="http://schemas.openxmlformats.org/drawingml/2006/main" xmlns:r="http://schemas.openxmlformats.org/officeDocument/2006/relationships" xmlns:p="http://schemas.openxmlformats.org/presentationml/2006/main">
+  <p:cSld>
+    <p:spTree>
+      <p:nvGrpSpPr>
+        <p:cNvPr id="1" name="">
+          <a:extLst>
+            <a:ext uri="{FF2B5EF4-FFF2-40B4-BE49-F238E27FC236}">
+              <a16:creationId xmlns:a16="http://schemas.microsoft.com/office/drawing/2014/main" id="{6A8C3977-2832-8B61-9E11-CB83195F52F3}"/>
+            </a:ext>
+          </a:extLst>
+        </p:cNvPr>
+        <p:cNvGrpSpPr/>
+        <p:nvPr/>
+      </p:nvGrpSpPr>
+      <p:grpSpPr>
+        <a:xfrm>
+          <a:off x="0" y="0"/>
+          <a:ext cx="0" cy="0"/>
+          <a:chOff x="0" y="0"/>
+          <a:chExt cx="0" cy="0"/>
+        </a:xfrm>
+      </p:grpSpPr>
+      <p:sp>
+        <p:nvSpPr>
+          <p:cNvPr id="4" name="Title 3">
+            <a:extLst>
+              <a:ext uri="{FF2B5EF4-FFF2-40B4-BE49-F238E27FC236}">
+                <a16:creationId xmlns:a16="http://schemas.microsoft.com/office/drawing/2014/main" id="{22C2372E-0591-CB16-7B18-E3E621AB90DB}"/>
+              </a:ext>
+            </a:extLst>
+          </p:cNvPr>
+          <p:cNvSpPr>
+            <a:spLocks noGrp="1"/>
+          </p:cNvSpPr>
+          <p:nvPr>
+            <p:ph type="title"/>
+          </p:nvPr>
+        </p:nvSpPr>
+        <p:spPr>
+          <a:xfrm>
+            <a:off x="829115" y="2931914"/>
+            <a:ext cx="7886700" cy="876035"/>
+          </a:xfrm>
+        </p:spPr>
+        <p:txBody>
+          <a:bodyPr>
+            <a:noAutofit/>
+          </a:bodyPr>
+          <a:lstStyle/>
+          <a:p>
+            <a:r>
+              <a:rPr lang="en-US" sz="3200" b="1" dirty="0">
+                <a:latin typeface="+mn-lt"/>
+              </a:rPr>
+              <a:t>Code example</a:t>
+            </a:r>
+            <a:r>
+              <a:rPr lang="en-US" sz="3200" dirty="0">
+                <a:latin typeface="+mn-lt"/>
+              </a:rPr>
+              <a:t>: Solving Tic-Tac-Toe with Pure Monte Carlo Search + UCB1 Selection Policy</a:t>
+            </a:r>
+            <a:br>
+              <a:rPr lang="en-US" sz="3200" dirty="0">
+                <a:latin typeface="+mn-lt"/>
+              </a:rPr>
+            </a:br>
+            <a:endParaRPr lang="en-US" sz="3200" dirty="0">
+              <a:latin typeface="+mn-lt"/>
+            </a:endParaRPr>
+          </a:p>
+        </p:txBody>
+      </p:sp>
+      <p:sp>
+        <p:nvSpPr>
+          <p:cNvPr id="5" name="TextBox 4">
+            <a:extLst>
+              <a:ext uri="{FF2B5EF4-FFF2-40B4-BE49-F238E27FC236}">
+                <a16:creationId xmlns:a16="http://schemas.microsoft.com/office/drawing/2014/main" id="{1CE4B090-9949-8920-6CDF-83A3322D16FD}"/>
+              </a:ext>
+            </a:extLst>
+          </p:cNvPr>
+          <p:cNvSpPr txBox="1"/>
+          <p:nvPr/>
+        </p:nvSpPr>
+        <p:spPr>
+          <a:xfrm>
+            <a:off x="893299" y="5365946"/>
+            <a:ext cx="6608298" cy="253916"/>
+          </a:xfrm>
+          <a:prstGeom prst="rect">
+            <a:avLst/>
+          </a:prstGeom>
+          <a:noFill/>
+        </p:spPr>
+        <p:txBody>
+          <a:bodyPr wrap="square" rtlCol="0">
+            <a:spAutoFit/>
+          </a:bodyPr>
+          <a:lstStyle/>
+          <a:p>
+            <a:r>
+              <a:rPr lang="en-US" sz="1050" dirty="0"/>
+              <a:t>See Code on </a:t>
+            </a:r>
+            <a:r>
+              <a:rPr lang="en-US" sz="1050" dirty="0">
+                <a:hlinkClick r:id="rId2"/>
+              </a:rPr>
+              <a:t>https://michael.hahsler.net/Introduction_to_Artificial_Intelligence/</a:t>
+            </a:r>
+            <a:r>
+              <a:rPr lang="en-US" sz="1050" dirty="0"/>
+              <a:t> </a:t>
+            </a:r>
+          </a:p>
+        </p:txBody>
+      </p:sp>
+    </p:spTree>
+    <p:extLst>
+      <p:ext uri="{BB962C8B-B14F-4D97-AF65-F5344CB8AC3E}">
+        <p14:creationId xmlns:p14="http://schemas.microsoft.com/office/powerpoint/2010/main" val="2019459623"/>
+      </p:ext>
+    </p:extLst>
+  </p:cSld>
+  <p:clrMapOvr>
+    <a:masterClrMapping/>
+  </p:clrMapOvr>
+</p:sld>
+</file>
+
+<file path=ppt/slides/slide48.xml><?xml version="1.0" encoding="utf-8"?>
 <p:sld xmlns:a="http://schemas.openxmlformats.org/drawingml/2006/main" xmlns:r="http://schemas.openxmlformats.org/officeDocument/2006/relationships" xmlns:p="http://schemas.openxmlformats.org/presentationml/2006/main">
   <p:cSld>
     <p:spTree>
@@ -43941,7 +44564,7 @@
 </p:sld>
 </file>
 
-<file path=ppt/slides/slide43.xml><?xml version="1.0" encoding="utf-8"?>
+<file path=ppt/slides/slide49.xml><?xml version="1.0" encoding="utf-8"?>
 <p:sld xmlns:a="http://schemas.openxmlformats.org/drawingml/2006/main" xmlns:r="http://schemas.openxmlformats.org/officeDocument/2006/relationships" xmlns:p="http://schemas.openxmlformats.org/presentationml/2006/main">
   <p:cSld>
     <p:spTree>
@@ -45905,7 +46528,509 @@
 </p:sld>
 </file>
 
-<file path=ppt/slides/slide44.xml><?xml version="1.0" encoding="utf-8"?>
+<file path=ppt/slides/slide5.xml><?xml version="1.0" encoding="utf-8"?>
+<p:sld xmlns:a="http://schemas.openxmlformats.org/drawingml/2006/main" xmlns:r="http://schemas.openxmlformats.org/officeDocument/2006/relationships" xmlns:p="http://schemas.openxmlformats.org/presentationml/2006/main">
+  <p:cSld>
+    <p:spTree>
+      <p:nvGrpSpPr>
+        <p:cNvPr id="1" name=""/>
+        <p:cNvGrpSpPr/>
+        <p:nvPr/>
+      </p:nvGrpSpPr>
+      <p:grpSpPr>
+        <a:xfrm>
+          <a:off x="0" y="0"/>
+          <a:ext cx="0" cy="0"/>
+          <a:chOff x="0" y="0"/>
+          <a:chExt cx="0" cy="0"/>
+        </a:xfrm>
+      </p:grpSpPr>
+      <p:sp>
+        <p:nvSpPr>
+          <p:cNvPr id="2" name="Title 1">
+            <a:extLst>
+              <a:ext uri="{FF2B5EF4-FFF2-40B4-BE49-F238E27FC236}">
+                <a16:creationId xmlns:a16="http://schemas.microsoft.com/office/drawing/2014/main" id="{F0EB8DA0-F19D-42E7-B106-99DA6BC8B3C0}"/>
+              </a:ext>
+            </a:extLst>
+          </p:cNvPr>
+          <p:cNvSpPr>
+            <a:spLocks noGrp="1"/>
+          </p:cNvSpPr>
+          <p:nvPr>
+            <p:ph type="title"/>
+          </p:nvPr>
+        </p:nvSpPr>
+        <p:spPr/>
+        <p:txBody>
+          <a:bodyPr/>
+          <a:lstStyle/>
+          <a:p>
+            <a:r>
+              <a:rPr lang="en-US" dirty="0"/>
+              <a:t>Example: Tic-tac-toe</a:t>
+            </a:r>
+          </a:p>
+        </p:txBody>
+      </p:sp>
+      <mc:AlternateContent xmlns:mc="http://schemas.openxmlformats.org/markup-compatibility/2006" xmlns:a14="http://schemas.microsoft.com/office/drawing/2010/main">
+        <mc:Choice Requires="a14">
+          <p:sp>
+            <p:nvSpPr>
+              <p:cNvPr id="3" name="Content Placeholder 2">
+                <a:extLst>
+                  <a:ext uri="{FF2B5EF4-FFF2-40B4-BE49-F238E27FC236}">
+                    <a16:creationId xmlns:a16="http://schemas.microsoft.com/office/drawing/2014/main" id="{5EF77323-E4B1-4168-B791-DFDF7C7ADB94}"/>
+                  </a:ext>
+                </a:extLst>
+              </p:cNvPr>
+              <p:cNvSpPr>
+                <a:spLocks noGrp="1"/>
+              </p:cNvSpPr>
+              <p:nvPr>
+                <p:ph idx="1"/>
+              </p:nvPr>
+            </p:nvSpPr>
+            <p:spPr>
+              <a:xfrm>
+                <a:off x="628650" y="2362199"/>
+                <a:ext cx="7981950" cy="3814763"/>
+              </a:xfrm>
+            </p:spPr>
+            <p:txBody>
+              <a:bodyPr>
+                <a:normAutofit/>
+              </a:bodyPr>
+              <a:lstStyle/>
+              <a:p>
+                <a:pPr marL="0" indent="0">
+                  <a:buNone/>
+                </a:pPr>
+                <a14:m>
+                  <m:oMath xmlns:m="http://schemas.openxmlformats.org/officeDocument/2006/math">
+                    <m:sSub>
+                      <m:sSubPr>
+                        <m:ctrlPr>
+                          <a:rPr lang="en-US" sz="2400" i="1">
+                            <a:latin typeface="Cambria Math" panose="02040503050406030204" pitchFamily="18" charset="0"/>
+                          </a:rPr>
+                        </m:ctrlPr>
+                      </m:sSubPr>
+                      <m:e>
+                        <m:r>
+                          <a:rPr lang="en-US" sz="2400" i="1">
+                            <a:latin typeface="Cambria Math" panose="02040503050406030204" pitchFamily="18" charset="0"/>
+                          </a:rPr>
+                          <m:t>𝑠</m:t>
+                        </m:r>
+                      </m:e>
+                      <m:sub>
+                        <m:r>
+                          <a:rPr lang="en-US" sz="2400" i="1">
+                            <a:latin typeface="Cambria Math" panose="02040503050406030204" pitchFamily="18" charset="0"/>
+                          </a:rPr>
+                          <m:t>0</m:t>
+                        </m:r>
+                      </m:sub>
+                    </m:sSub>
+                  </m:oMath>
+                </a14:m>
+                <a:r>
+                  <a:rPr lang="en-US" sz="2400" dirty="0"/>
+                  <a:t> 			Empty board.</a:t>
+                </a:r>
+              </a:p>
+              <a:p>
+                <a:pPr marL="0" indent="0">
+                  <a:buNone/>
+                </a:pPr>
+                <a14:m>
+                  <m:oMath xmlns:m="http://schemas.openxmlformats.org/officeDocument/2006/math">
+                    <m:r>
+                      <a:rPr lang="en-US" sz="2400" i="1">
+                        <a:latin typeface="Cambria Math" panose="02040503050406030204" pitchFamily="18" charset="0"/>
+                      </a:rPr>
+                      <m:t>𝐴𝑐𝑡𝑖𝑜𝑛𝑠</m:t>
+                    </m:r>
+                    <m:r>
+                      <a:rPr lang="en-US" sz="2400" i="1">
+                        <a:latin typeface="Cambria Math" panose="02040503050406030204" pitchFamily="18" charset="0"/>
+                      </a:rPr>
+                      <m:t>(</m:t>
+                    </m:r>
+                    <m:r>
+                      <a:rPr lang="en-US" sz="2400" i="1">
+                        <a:latin typeface="Cambria Math" panose="02040503050406030204" pitchFamily="18" charset="0"/>
+                      </a:rPr>
+                      <m:t>𝑠</m:t>
+                    </m:r>
+                    <m:r>
+                      <a:rPr lang="en-US" sz="2400" i="1">
+                        <a:latin typeface="Cambria Math" panose="02040503050406030204" pitchFamily="18" charset="0"/>
+                      </a:rPr>
+                      <m:t>)</m:t>
+                    </m:r>
+                  </m:oMath>
+                </a14:m>
+                <a:r>
+                  <a:rPr lang="en-US" sz="2400" dirty="0"/>
+                  <a:t>		Play empty squares.</a:t>
+                </a:r>
+              </a:p>
+              <a:p>
+                <a:pPr marL="0" indent="0">
+                  <a:buNone/>
+                </a:pPr>
+                <a14:m>
+                  <m:oMath xmlns:m="http://schemas.openxmlformats.org/officeDocument/2006/math">
+                    <m:r>
+                      <a:rPr lang="en-US" sz="2400" i="1">
+                        <a:latin typeface="Cambria Math" panose="02040503050406030204" pitchFamily="18" charset="0"/>
+                      </a:rPr>
+                      <m:t>𝑅𝑒𝑠𝑢𝑙𝑡</m:t>
+                    </m:r>
+                    <m:r>
+                      <a:rPr lang="en-US" sz="2400" i="1">
+                        <a:latin typeface="Cambria Math" panose="02040503050406030204" pitchFamily="18" charset="0"/>
+                      </a:rPr>
+                      <m:t>(</m:t>
+                    </m:r>
+                    <m:r>
+                      <a:rPr lang="en-US" sz="2400" i="1">
+                        <a:latin typeface="Cambria Math" panose="02040503050406030204" pitchFamily="18" charset="0"/>
+                      </a:rPr>
+                      <m:t>𝑠</m:t>
+                    </m:r>
+                    <m:r>
+                      <a:rPr lang="en-US" sz="2400" i="1">
+                        <a:latin typeface="Cambria Math" panose="02040503050406030204" pitchFamily="18" charset="0"/>
+                      </a:rPr>
+                      <m:t>,</m:t>
+                    </m:r>
+                    <m:r>
+                      <a:rPr lang="en-US" sz="2400" i="1">
+                        <a:latin typeface="Cambria Math" panose="02040503050406030204" pitchFamily="18" charset="0"/>
+                      </a:rPr>
+                      <m:t>𝑎</m:t>
+                    </m:r>
+                    <m:r>
+                      <a:rPr lang="en-US" sz="2400" i="1">
+                        <a:latin typeface="Cambria Math" panose="02040503050406030204" pitchFamily="18" charset="0"/>
+                      </a:rPr>
+                      <m:t>)</m:t>
+                    </m:r>
+                  </m:oMath>
+                </a14:m>
+                <a:r>
+                  <a:rPr lang="en-US" sz="2400" dirty="0"/>
+                  <a:t>		Symbol (x/o) is placed on empty square.</a:t>
+                </a:r>
+              </a:p>
+              <a:p>
+                <a:pPr marL="0" indent="0">
+                  <a:buNone/>
+                </a:pPr>
+                <a14:m>
+                  <m:oMath xmlns:m="http://schemas.openxmlformats.org/officeDocument/2006/math">
+                    <m:r>
+                      <a:rPr lang="en-US" sz="2400" b="0" i="1" smtClean="0">
+                        <a:latin typeface="Cambria Math" panose="02040503050406030204" pitchFamily="18" charset="0"/>
+                      </a:rPr>
+                      <m:t>𝑇𝑒</m:t>
+                    </m:r>
+                    <m:r>
+                      <a:rPr lang="en-US" sz="2400" i="1">
+                        <a:latin typeface="Cambria Math" panose="02040503050406030204" pitchFamily="18" charset="0"/>
+                      </a:rPr>
+                      <m:t>𝑟𝑚𝑖𝑛𝑎𝑙</m:t>
+                    </m:r>
+                    <m:r>
+                      <a:rPr lang="en-US" sz="2400" i="1">
+                        <a:latin typeface="Cambria Math" panose="02040503050406030204" pitchFamily="18" charset="0"/>
+                      </a:rPr>
+                      <m:t>(</m:t>
+                    </m:r>
+                    <m:r>
+                      <a:rPr lang="en-US" sz="2400" i="1">
+                        <a:latin typeface="Cambria Math" panose="02040503050406030204" pitchFamily="18" charset="0"/>
+                      </a:rPr>
+                      <m:t>𝑠</m:t>
+                    </m:r>
+                    <m:r>
+                      <a:rPr lang="en-US" sz="2400" i="1">
+                        <a:latin typeface="Cambria Math" panose="02040503050406030204" pitchFamily="18" charset="0"/>
+                      </a:rPr>
+                      <m:t>)</m:t>
+                    </m:r>
+                  </m:oMath>
+                </a14:m>
+                <a:r>
+                  <a:rPr lang="en-US" sz="2400" dirty="0"/>
+                  <a:t>	 	Did a player win or is the game a draw?</a:t>
+                </a:r>
+              </a:p>
+              <a:p>
+                <a:pPr marL="0" indent="0">
+                  <a:buNone/>
+                </a:pPr>
+                <a14:m>
+                  <m:oMath xmlns:m="http://schemas.openxmlformats.org/officeDocument/2006/math">
+                    <m:r>
+                      <a:rPr lang="en-US" sz="2400" i="1">
+                        <a:latin typeface="Cambria Math" panose="02040503050406030204" pitchFamily="18" charset="0"/>
+                      </a:rPr>
+                      <m:t>𝑈𝑡𝑖𝑙𝑖𝑡𝑦</m:t>
+                    </m:r>
+                    <m:r>
+                      <a:rPr lang="en-US" sz="2400" i="1">
+                        <a:latin typeface="Cambria Math" panose="02040503050406030204" pitchFamily="18" charset="0"/>
+                      </a:rPr>
+                      <m:t>(</m:t>
+                    </m:r>
+                    <m:r>
+                      <a:rPr lang="en-US" sz="2400" i="1">
+                        <a:latin typeface="Cambria Math" panose="02040503050406030204" pitchFamily="18" charset="0"/>
+                      </a:rPr>
+                      <m:t>𝑠</m:t>
+                    </m:r>
+                    <m:r>
+                      <a:rPr lang="en-US" sz="2400" i="1">
+                        <a:latin typeface="Cambria Math" panose="02040503050406030204" pitchFamily="18" charset="0"/>
+                      </a:rPr>
+                      <m:t>)</m:t>
+                    </m:r>
+                  </m:oMath>
+                </a14:m>
+                <a:r>
+                  <a:rPr lang="en-US" sz="2400" dirty="0"/>
+                  <a:t>		+1 if x wins, -1 if o wins and 0 for a draw.</a:t>
+                </a:r>
+              </a:p>
+              <a:p>
+                <a:pPr marL="0" indent="0">
+                  <a:buNone/>
+                </a:pPr>
+                <a:r>
+                  <a:rPr lang="en-US" sz="2400" dirty="0"/>
+                  <a:t>			Utility is only defined for terminal states.</a:t>
+                </a:r>
+              </a:p>
+              <a:p>
+                <a:endParaRPr lang="en-US" sz="2400" dirty="0"/>
+              </a:p>
+            </p:txBody>
+          </p:sp>
+        </mc:Choice>
+        <mc:Fallback xmlns="">
+          <p:sp>
+            <p:nvSpPr>
+              <p:cNvPr id="3" name="Content Placeholder 2">
+                <a:extLst>
+                  <a:ext uri="{FF2B5EF4-FFF2-40B4-BE49-F238E27FC236}">
+                    <a16:creationId xmlns:a16="http://schemas.microsoft.com/office/drawing/2014/main" id="{5EF77323-E4B1-4168-B791-DFDF7C7ADB94}"/>
+                  </a:ext>
+                </a:extLst>
+              </p:cNvPr>
+              <p:cNvSpPr>
+                <a:spLocks noGrp="1" noRot="1" noChangeAspect="1" noMove="1" noResize="1" noEditPoints="1" noAdjustHandles="1" noChangeArrowheads="1" noChangeShapeType="1" noTextEdit="1"/>
+              </p:cNvSpPr>
+              <p:nvPr>
+                <p:ph idx="1"/>
+              </p:nvPr>
+            </p:nvSpPr>
+            <p:spPr>
+              <a:xfrm>
+                <a:off x="628650" y="2362199"/>
+                <a:ext cx="7981950" cy="3814763"/>
+              </a:xfrm>
+              <a:blipFill>
+                <a:blip r:embed="rId2"/>
+                <a:stretch>
+                  <a:fillRect l="-611" t="-2077" r="-840"/>
+                </a:stretch>
+              </a:blipFill>
+            </p:spPr>
+            <p:txBody>
+              <a:bodyPr/>
+              <a:lstStyle/>
+              <a:p>
+                <a:r>
+                  <a:rPr lang="en-US">
+                    <a:noFill/>
+                  </a:rPr>
+                  <a:t> </a:t>
+                </a:r>
+              </a:p>
+            </p:txBody>
+          </p:sp>
+        </mc:Fallback>
+      </mc:AlternateContent>
+      <p:pic>
+        <p:nvPicPr>
+          <p:cNvPr id="2050" name="Picture 2">
+            <a:extLst>
+              <a:ext uri="{FF2B5EF4-FFF2-40B4-BE49-F238E27FC236}">
+                <a16:creationId xmlns:a16="http://schemas.microsoft.com/office/drawing/2014/main" id="{F68A6481-403B-4C1E-92D1-373A514882D5}"/>
+              </a:ext>
+              <a:ext uri="{C183D7F6-B498-43B3-948B-1728B52AA6E4}">
+                <adec:decorative xmlns:adec="http://schemas.microsoft.com/office/drawing/2017/decorative" val="1"/>
+              </a:ext>
+            </a:extLst>
+          </p:cNvPr>
+          <p:cNvPicPr>
+            <a:picLocks noChangeAspect="1" noChangeArrowheads="1"/>
+          </p:cNvPicPr>
+          <p:nvPr/>
+        </p:nvPicPr>
+        <p:blipFill>
+          <a:blip r:embed="rId3" cstate="print">
+            <a:extLst>
+              <a:ext uri="{28A0092B-C50C-407E-A947-70E740481C1C}">
+                <a14:useLocalDpi xmlns:a14="http://schemas.microsoft.com/office/drawing/2010/main" val="0"/>
+              </a:ext>
+            </a:extLst>
+          </a:blip>
+          <a:srcRect/>
+          <a:stretch>
+            <a:fillRect/>
+          </a:stretch>
+        </p:blipFill>
+        <p:spPr bwMode="auto">
+          <a:xfrm>
+            <a:off x="5967397" y="401221"/>
+            <a:ext cx="2547953" cy="2265779"/>
+          </a:xfrm>
+          <a:prstGeom prst="rect">
+            <a:avLst/>
+          </a:prstGeom>
+          <a:noFill/>
+          <a:extLst>
+            <a:ext uri="{909E8E84-426E-40DD-AFC4-6F175D3DCCD1}">
+              <a14:hiddenFill xmlns:a14="http://schemas.microsoft.com/office/drawing/2010/main">
+                <a:solidFill>
+                  <a:srgbClr val="FFFFFF"/>
+                </a:solidFill>
+              </a14:hiddenFill>
+            </a:ext>
+          </a:extLst>
+        </p:spPr>
+      </p:pic>
+      <p:sp>
+        <p:nvSpPr>
+          <p:cNvPr id="4" name="Speech Bubble: Rectangle 3">
+            <a:extLst>
+              <a:ext uri="{FF2B5EF4-FFF2-40B4-BE49-F238E27FC236}">
+                <a16:creationId xmlns:a16="http://schemas.microsoft.com/office/drawing/2014/main" id="{FC16888F-411D-4B9A-B95F-9197D878E77C}"/>
+              </a:ext>
+            </a:extLst>
+          </p:cNvPr>
+          <p:cNvSpPr/>
+          <p:nvPr/>
+        </p:nvSpPr>
+        <p:spPr>
+          <a:xfrm>
+            <a:off x="838200" y="5414962"/>
+            <a:ext cx="2514600" cy="762000"/>
+          </a:xfrm>
+          <a:prstGeom prst="wedgeRectCallout">
+            <a:avLst>
+              <a:gd name="adj1" fmla="val 53330"/>
+              <a:gd name="adj2" fmla="val -187640"/>
+            </a:avLst>
+          </a:prstGeom>
+        </p:spPr>
+        <p:style>
+          <a:lnRef idx="3">
+            <a:schemeClr val="lt1"/>
+          </a:lnRef>
+          <a:fillRef idx="1">
+            <a:schemeClr val="accent6"/>
+          </a:fillRef>
+          <a:effectRef idx="1">
+            <a:schemeClr val="accent6"/>
+          </a:effectRef>
+          <a:fontRef idx="minor">
+            <a:schemeClr val="lt1"/>
+          </a:fontRef>
+        </p:style>
+        <p:txBody>
+          <a:bodyPr rtlCol="0" anchor="ctr"/>
+          <a:lstStyle/>
+          <a:p>
+            <a:pPr algn="ctr"/>
+            <a:r>
+              <a:rPr lang="en-US" sz="2000" dirty="0"/>
+              <a:t>Here player x is Max and player o is Min.</a:t>
+            </a:r>
+          </a:p>
+        </p:txBody>
+      </p:sp>
+      <p:sp>
+        <p:nvSpPr>
+          <p:cNvPr id="6" name="TextBox 5">
+            <a:extLst>
+              <a:ext uri="{FF2B5EF4-FFF2-40B4-BE49-F238E27FC236}">
+                <a16:creationId xmlns:a16="http://schemas.microsoft.com/office/drawing/2014/main" id="{269212AB-8DD7-9004-3B87-B2B1784AD06E}"/>
+              </a:ext>
+            </a:extLst>
+          </p:cNvPr>
+          <p:cNvSpPr txBox="1"/>
+          <p:nvPr/>
+        </p:nvSpPr>
+        <p:spPr>
+          <a:xfrm>
+            <a:off x="3562350" y="5943600"/>
+            <a:ext cx="5334000" cy="707886"/>
+          </a:xfrm>
+          <a:prstGeom prst="rect">
+            <a:avLst/>
+          </a:prstGeom>
+        </p:spPr>
+        <p:style>
+          <a:lnRef idx="3">
+            <a:schemeClr val="lt1"/>
+          </a:lnRef>
+          <a:fillRef idx="1">
+            <a:schemeClr val="accent2"/>
+          </a:fillRef>
+          <a:effectRef idx="1">
+            <a:schemeClr val="accent2"/>
+          </a:effectRef>
+          <a:fontRef idx="minor">
+            <a:schemeClr val="lt1"/>
+          </a:fontRef>
+        </p:style>
+        <p:txBody>
+          <a:bodyPr wrap="square" rtlCol="0">
+            <a:spAutoFit/>
+          </a:bodyPr>
+          <a:lstStyle/>
+          <a:p>
+            <a:r>
+              <a:rPr lang="en-US" sz="2000" b="1" dirty="0"/>
+              <a:t>Note</a:t>
+            </a:r>
+            <a:r>
+              <a:rPr lang="en-US" sz="2000" dirty="0"/>
+              <a:t>: This game still uses a goal-based agent that plans actions to reach a winning terminal  state!</a:t>
+            </a:r>
+          </a:p>
+        </p:txBody>
+      </p:sp>
+    </p:spTree>
+    <p:extLst>
+      <p:ext uri="{BB962C8B-B14F-4D97-AF65-F5344CB8AC3E}">
+        <p14:creationId xmlns:p14="http://schemas.microsoft.com/office/powerpoint/2010/main" val="872051194"/>
+      </p:ext>
+    </p:extLst>
+  </p:cSld>
+  <p:clrMapOvr>
+    <a:masterClrMapping/>
+  </p:clrMapOvr>
+</p:sld>
+</file>
+
+<file path=ppt/slides/slide50.xml><?xml version="1.0" encoding="utf-8"?>
 <p:sld xmlns:a="http://schemas.openxmlformats.org/drawingml/2006/main" xmlns:r="http://schemas.openxmlformats.org/officeDocument/2006/relationships" xmlns:p="http://schemas.openxmlformats.org/presentationml/2006/main">
   <p:cSld>
     <p:spTree>
@@ -46072,7 +47197,7 @@
 </p:sld>
 </file>
 
-<file path=ppt/slides/slide45.xml><?xml version="1.0" encoding="utf-8"?>
+<file path=ppt/slides/slide51.xml><?xml version="1.0" encoding="utf-8"?>
 <p:sld xmlns:a="http://schemas.openxmlformats.org/drawingml/2006/main" xmlns:r="http://schemas.openxmlformats.org/officeDocument/2006/relationships" xmlns:p="http://schemas.openxmlformats.org/presentationml/2006/main">
   <p:cSld>
     <p:bg>
@@ -46306,7 +47431,7 @@
 </p:sld>
 </file>
 
-<file path=ppt/slides/slide46.xml><?xml version="1.0" encoding="utf-8"?>
+<file path=ppt/slides/slide52.xml><?xml version="1.0" encoding="utf-8"?>
 <p:sld xmlns:a="http://schemas.openxmlformats.org/drawingml/2006/main" xmlns:r="http://schemas.openxmlformats.org/officeDocument/2006/relationships" xmlns:p="http://schemas.openxmlformats.org/presentationml/2006/main">
   <p:cSld>
     <p:spTree>
@@ -46897,7 +48022,7 @@
 </p:sld>
 </file>
 
-<file path=ppt/slides/slide47.xml><?xml version="1.0" encoding="utf-8"?>
+<file path=ppt/slides/slide53.xml><?xml version="1.0" encoding="utf-8"?>
 <p:sld xmlns:a="http://schemas.openxmlformats.org/drawingml/2006/main" xmlns:r="http://schemas.openxmlformats.org/officeDocument/2006/relationships" xmlns:p="http://schemas.openxmlformats.org/presentationml/2006/main">
   <p:cSld>
     <p:spTree>
@@ -47015,10 +48140,7 @@
                 </a:pPr>
                 <a14:m>
                   <m:oMathPara xmlns:m="http://schemas.openxmlformats.org/officeDocument/2006/math">
-                    <m:oMathParaPr>
-                      <m:jc m:val="centerGroup"/>
-                    </m:oMathParaPr>
-                    <m:oMath xmlns:m="http://schemas.openxmlformats.org/officeDocument/2006/math">
+                    <m:oMath>
                       <m:r>
                         <a:rPr lang="en-US" b="0" i="1" smtClean="0">
                           <a:latin typeface="Cambria Math" panose="02040503050406030204" pitchFamily="18" charset="0"/>
@@ -47055,7 +48177,7 @@
                         <m:t>=</m:t>
                       </m:r>
                     </m:oMath>
-                    <m:oMath xmlns:m="http://schemas.openxmlformats.org/officeDocument/2006/math">
+                    <m:oMath>
                       <m:r>
                         <a:rPr lang="en-US" i="1">
                           <a:latin typeface="Cambria Math" panose="02040503050406030204" pitchFamily="18" charset="0"/>
@@ -47063,13 +48185,13 @@
                         <m:t> </m:t>
                       </m:r>
                     </m:oMath>
-                    <m:oMath xmlns:m="http://schemas.openxmlformats.org/officeDocument/2006/math">
+                    <m:oMath>
                       <m:d>
                         <m:dPr>
                           <m:begChr m:val="{"/>
                           <m:endChr m:val=""/>
                           <m:ctrlPr>
-                            <a:rPr lang="en-US" i="1">
+                            <a:rPr lang="en-US" i="1" smtClean="0">
                               <a:latin typeface="Cambria Math" panose="02040503050406030204" pitchFamily="18" charset="0"/>
                             </a:rPr>
                           </m:ctrlPr>
@@ -47117,7 +48239,7 @@
                                 <m:rPr>
                                   <m:nor/>
                                 </m:rPr>
-                                <a:rPr lang="en-US">
+                                <a:rPr lang="en-US" i="0">
                                   <a:latin typeface="Cambria Math" panose="02040503050406030204" pitchFamily="18" charset="0"/>
                                 </a:rPr>
                                 <m:t>                                                          </m:t>
@@ -47135,7 +48257,7 @@
                                 <m:rPr>
                                   <m:nor/>
                                 </m:rPr>
-                                <a:rPr lang="en-US">
+                                <a:rPr lang="en-US" i="0">
                                   <a:latin typeface="Cambria Math" panose="02040503050406030204" pitchFamily="18" charset="0"/>
                                 </a:rPr>
                                 <m:t>if</m:t>
@@ -47193,7 +48315,7 @@
                                       <m:limLow>
                                         <m:limLowPr>
                                           <m:ctrlPr>
-                                            <a:rPr lang="en-US" i="1">
+                                            <a:rPr lang="en-US">
                                               <a:latin typeface="Cambria Math" panose="02040503050406030204" pitchFamily="18" charset="0"/>
                                             </a:rPr>
                                           </m:ctrlPr>
@@ -47322,19 +48444,10 @@
                                 <m:rPr>
                                   <m:nor/>
                                 </m:rPr>
-                                <a:rPr lang="en-US">
+                                <a:rPr lang="en-US" i="0">
                                   <a:latin typeface="Cambria Math" panose="02040503050406030204" pitchFamily="18" charset="0"/>
                                 </a:rPr>
-                                <m:t>    </m:t>
-                              </m:r>
-                              <m:r>
-                                <m:rPr>
-                                  <m:nor/>
-                                </m:rPr>
-                                <a:rPr lang="en-US">
-                                  <a:latin typeface="Cambria Math" panose="02040503050406030204" pitchFamily="18" charset="0"/>
-                                </a:rPr>
-                                <m:t>if</m:t>
+                                <m:t>    if</m:t>
                               </m:r>
                               <m:r>
                                 <a:rPr lang="en-US" i="1">
@@ -47374,7 +48487,7 @@
                                   <m:limLow>
                                     <m:limLowPr>
                                       <m:ctrlPr>
-                                        <a:rPr lang="en-US" i="1">
+                                        <a:rPr lang="en-US">
                                           <a:latin typeface="Cambria Math" panose="02040503050406030204" pitchFamily="18" charset="0"/>
                                         </a:rPr>
                                       </m:ctrlPr>
@@ -47506,7 +48619,7 @@
                                 <m:rPr>
                                   <m:nor/>
                                 </m:rPr>
-                                <a:rPr lang="en-US">
+                                <a:rPr lang="en-US" i="0">
                                   <a:latin typeface="Cambria Math" panose="02040503050406030204" pitchFamily="18" charset="0"/>
                                 </a:rPr>
                                 <m:t>if</m:t>
@@ -47649,28 +48762,10 @@
                                 <m:rPr>
                                   <m:nor/>
                                 </m:rPr>
-                                <a:rPr lang="en-US">
+                                <a:rPr lang="en-US" i="0">
                                   <a:latin typeface="Cambria Math" panose="02040503050406030204" pitchFamily="18" charset="0"/>
                                 </a:rPr>
-                                <m:t>               </m:t>
-                              </m:r>
-                              <m:r>
-                                <m:rPr>
-                                  <m:nor/>
-                                </m:rPr>
-                                <a:rPr lang="en-US">
-                                  <a:latin typeface="Cambria Math" panose="02040503050406030204" pitchFamily="18" charset="0"/>
-                                </a:rPr>
-                                <m:t>if</m:t>
-                              </m:r>
-                              <m:r>
-                                <m:rPr>
-                                  <m:nor/>
-                                </m:rPr>
-                                <a:rPr lang="en-US">
-                                  <a:latin typeface="Cambria Math" panose="02040503050406030204" pitchFamily="18" charset="0"/>
-                                </a:rPr>
-                                <m:t> </m:t>
+                                <m:t>               if </m:t>
                               </m:r>
                               <m:r>
                                 <a:rPr lang="en-US" i="1">
@@ -47688,7 +48783,7 @@
                                 <a:rPr lang="en-US" i="1">
                                   <a:latin typeface="Cambria Math" panose="02040503050406030204" pitchFamily="18" charset="0"/>
                                 </a:rPr>
-                                <m:t>𝐶h𝑎𝑛𝑐𝑒</m:t>
+                                <m:t>𝐶ℎ𝑎𝑛𝑐𝑒</m:t>
                               </m:r>
                             </m:e>
                           </m:eqArr>
@@ -47845,7 +48940,7 @@
 </p:sld>
 </file>
 
-<file path=ppt/slides/slide48.xml><?xml version="1.0" encoding="utf-8"?>
+<file path=ppt/slides/slide54.xml><?xml version="1.0" encoding="utf-8"?>
 <p:sld xmlns:a="http://schemas.openxmlformats.org/drawingml/2006/main" xmlns:r="http://schemas.openxmlformats.org/officeDocument/2006/relationships" xmlns:p="http://schemas.openxmlformats.org/presentationml/2006/main">
   <p:cSld>
     <p:spTree>
@@ -47989,7 +49084,7 @@
 </p:sld>
 </file>
 
-<file path=ppt/slides/slide49.xml><?xml version="1.0" encoding="utf-8"?>
+<file path=ppt/slides/slide55.xml><?xml version="1.0" encoding="utf-8"?>
 <p:sld xmlns:a="http://schemas.openxmlformats.org/drawingml/2006/main" xmlns:r="http://schemas.openxmlformats.org/officeDocument/2006/relationships" xmlns:p="http://schemas.openxmlformats.org/presentationml/2006/main">
   <p:cSld>
     <p:bg>
@@ -48885,508 +49980,6 @@
 </p:sld>
 </file>
 
-<file path=ppt/slides/slide5.xml><?xml version="1.0" encoding="utf-8"?>
-<p:sld xmlns:a="http://schemas.openxmlformats.org/drawingml/2006/main" xmlns:r="http://schemas.openxmlformats.org/officeDocument/2006/relationships" xmlns:p="http://schemas.openxmlformats.org/presentationml/2006/main">
-  <p:cSld>
-    <p:spTree>
-      <p:nvGrpSpPr>
-        <p:cNvPr id="1" name=""/>
-        <p:cNvGrpSpPr/>
-        <p:nvPr/>
-      </p:nvGrpSpPr>
-      <p:grpSpPr>
-        <a:xfrm>
-          <a:off x="0" y="0"/>
-          <a:ext cx="0" cy="0"/>
-          <a:chOff x="0" y="0"/>
-          <a:chExt cx="0" cy="0"/>
-        </a:xfrm>
-      </p:grpSpPr>
-      <p:sp>
-        <p:nvSpPr>
-          <p:cNvPr id="2" name="Title 1">
-            <a:extLst>
-              <a:ext uri="{FF2B5EF4-FFF2-40B4-BE49-F238E27FC236}">
-                <a16:creationId xmlns:a16="http://schemas.microsoft.com/office/drawing/2014/main" id="{F0EB8DA0-F19D-42E7-B106-99DA6BC8B3C0}"/>
-              </a:ext>
-            </a:extLst>
-          </p:cNvPr>
-          <p:cNvSpPr>
-            <a:spLocks noGrp="1"/>
-          </p:cNvSpPr>
-          <p:nvPr>
-            <p:ph type="title"/>
-          </p:nvPr>
-        </p:nvSpPr>
-        <p:spPr/>
-        <p:txBody>
-          <a:bodyPr/>
-          <a:lstStyle/>
-          <a:p>
-            <a:r>
-              <a:rPr lang="en-US" dirty="0"/>
-              <a:t>Example: Tic-tac-toe</a:t>
-            </a:r>
-          </a:p>
-        </p:txBody>
-      </p:sp>
-      <mc:AlternateContent xmlns:mc="http://schemas.openxmlformats.org/markup-compatibility/2006" xmlns:a14="http://schemas.microsoft.com/office/drawing/2010/main">
-        <mc:Choice Requires="a14">
-          <p:sp>
-            <p:nvSpPr>
-              <p:cNvPr id="3" name="Content Placeholder 2">
-                <a:extLst>
-                  <a:ext uri="{FF2B5EF4-FFF2-40B4-BE49-F238E27FC236}">
-                    <a16:creationId xmlns:a16="http://schemas.microsoft.com/office/drawing/2014/main" id="{5EF77323-E4B1-4168-B791-DFDF7C7ADB94}"/>
-                  </a:ext>
-                </a:extLst>
-              </p:cNvPr>
-              <p:cNvSpPr>
-                <a:spLocks noGrp="1"/>
-              </p:cNvSpPr>
-              <p:nvPr>
-                <p:ph idx="1"/>
-              </p:nvPr>
-            </p:nvSpPr>
-            <p:spPr>
-              <a:xfrm>
-                <a:off x="628650" y="2362199"/>
-                <a:ext cx="7981950" cy="3814763"/>
-              </a:xfrm>
-            </p:spPr>
-            <p:txBody>
-              <a:bodyPr>
-                <a:normAutofit/>
-              </a:bodyPr>
-              <a:lstStyle/>
-              <a:p>
-                <a:pPr marL="0" indent="0">
-                  <a:buNone/>
-                </a:pPr>
-                <a14:m>
-                  <m:oMath xmlns:m="http://schemas.openxmlformats.org/officeDocument/2006/math">
-                    <m:sSub>
-                      <m:sSubPr>
-                        <m:ctrlPr>
-                          <a:rPr lang="en-US" sz="2400" i="1" smtClean="0">
-                            <a:latin typeface="Cambria Math" panose="02040503050406030204" pitchFamily="18" charset="0"/>
-                          </a:rPr>
-                        </m:ctrlPr>
-                      </m:sSubPr>
-                      <m:e>
-                        <m:r>
-                          <a:rPr lang="en-US" sz="2400" i="1">
-                            <a:latin typeface="Cambria Math" panose="02040503050406030204" pitchFamily="18" charset="0"/>
-                          </a:rPr>
-                          <m:t>𝑠</m:t>
-                        </m:r>
-                      </m:e>
-                      <m:sub>
-                        <m:r>
-                          <a:rPr lang="en-US" sz="2400" i="1">
-                            <a:latin typeface="Cambria Math" panose="02040503050406030204" pitchFamily="18" charset="0"/>
-                          </a:rPr>
-                          <m:t>0</m:t>
-                        </m:r>
-                      </m:sub>
-                    </m:sSub>
-                  </m:oMath>
-                </a14:m>
-                <a:r>
-                  <a:rPr lang="en-US" sz="2400" dirty="0"/>
-                  <a:t> 			Empty board.</a:t>
-                </a:r>
-              </a:p>
-              <a:p>
-                <a:pPr marL="0" indent="0">
-                  <a:buNone/>
-                </a:pPr>
-                <a14:m>
-                  <m:oMath xmlns:m="http://schemas.openxmlformats.org/officeDocument/2006/math">
-                    <m:r>
-                      <a:rPr lang="en-US" sz="2400" i="1">
-                        <a:latin typeface="Cambria Math" panose="02040503050406030204" pitchFamily="18" charset="0"/>
-                      </a:rPr>
-                      <m:t>𝐴𝑐𝑡𝑖𝑜𝑛𝑠</m:t>
-                    </m:r>
-                    <m:r>
-                      <a:rPr lang="en-US" sz="2400" i="1">
-                        <a:latin typeface="Cambria Math" panose="02040503050406030204" pitchFamily="18" charset="0"/>
-                      </a:rPr>
-                      <m:t>(</m:t>
-                    </m:r>
-                    <m:r>
-                      <a:rPr lang="en-US" sz="2400" i="1">
-                        <a:latin typeface="Cambria Math" panose="02040503050406030204" pitchFamily="18" charset="0"/>
-                      </a:rPr>
-                      <m:t>𝑠</m:t>
-                    </m:r>
-                    <m:r>
-                      <a:rPr lang="en-US" sz="2400" i="1">
-                        <a:latin typeface="Cambria Math" panose="02040503050406030204" pitchFamily="18" charset="0"/>
-                      </a:rPr>
-                      <m:t>)</m:t>
-                    </m:r>
-                  </m:oMath>
-                </a14:m>
-                <a:r>
-                  <a:rPr lang="en-US" sz="2400" dirty="0"/>
-                  <a:t>		Play empty squares.</a:t>
-                </a:r>
-              </a:p>
-              <a:p>
-                <a:pPr marL="0" indent="0">
-                  <a:buNone/>
-                </a:pPr>
-                <a14:m>
-                  <m:oMath xmlns:m="http://schemas.openxmlformats.org/officeDocument/2006/math">
-                    <m:r>
-                      <a:rPr lang="en-US" sz="2400" i="1">
-                        <a:latin typeface="Cambria Math" panose="02040503050406030204" pitchFamily="18" charset="0"/>
-                      </a:rPr>
-                      <m:t>𝑅𝑒𝑠𝑢𝑙𝑡</m:t>
-                    </m:r>
-                    <m:r>
-                      <a:rPr lang="en-US" sz="2400" i="1">
-                        <a:latin typeface="Cambria Math" panose="02040503050406030204" pitchFamily="18" charset="0"/>
-                      </a:rPr>
-                      <m:t>(</m:t>
-                    </m:r>
-                    <m:r>
-                      <a:rPr lang="en-US" sz="2400" i="1">
-                        <a:latin typeface="Cambria Math" panose="02040503050406030204" pitchFamily="18" charset="0"/>
-                      </a:rPr>
-                      <m:t>𝑠</m:t>
-                    </m:r>
-                    <m:r>
-                      <a:rPr lang="en-US" sz="2400" i="1">
-                        <a:latin typeface="Cambria Math" panose="02040503050406030204" pitchFamily="18" charset="0"/>
-                      </a:rPr>
-                      <m:t>,</m:t>
-                    </m:r>
-                    <m:r>
-                      <a:rPr lang="en-US" sz="2400" i="1">
-                        <a:latin typeface="Cambria Math" panose="02040503050406030204" pitchFamily="18" charset="0"/>
-                      </a:rPr>
-                      <m:t>𝑎</m:t>
-                    </m:r>
-                    <m:r>
-                      <a:rPr lang="en-US" sz="2400" i="1">
-                        <a:latin typeface="Cambria Math" panose="02040503050406030204" pitchFamily="18" charset="0"/>
-                      </a:rPr>
-                      <m:t>)</m:t>
-                    </m:r>
-                  </m:oMath>
-                </a14:m>
-                <a:r>
-                  <a:rPr lang="en-US" sz="2400" dirty="0"/>
-                  <a:t>		Symbol (x/o) is placed on empty square.</a:t>
-                </a:r>
-              </a:p>
-              <a:p>
-                <a:pPr marL="0" indent="0">
-                  <a:buNone/>
-                </a:pPr>
-                <a14:m>
-                  <m:oMath xmlns:m="http://schemas.openxmlformats.org/officeDocument/2006/math">
-                    <m:r>
-                      <a:rPr lang="en-US" sz="2400" b="0" i="1" smtClean="0">
-                        <a:latin typeface="Cambria Math" panose="02040503050406030204" pitchFamily="18" charset="0"/>
-                      </a:rPr>
-                      <m:t>𝑇𝑒</m:t>
-                    </m:r>
-                    <m:r>
-                      <a:rPr lang="en-US" sz="2400" i="1">
-                        <a:latin typeface="Cambria Math" panose="02040503050406030204" pitchFamily="18" charset="0"/>
-                      </a:rPr>
-                      <m:t>𝑟𝑚𝑖𝑛𝑎𝑙</m:t>
-                    </m:r>
-                    <m:r>
-                      <a:rPr lang="en-US" sz="2400" i="1">
-                        <a:latin typeface="Cambria Math" panose="02040503050406030204" pitchFamily="18" charset="0"/>
-                      </a:rPr>
-                      <m:t>(</m:t>
-                    </m:r>
-                    <m:r>
-                      <a:rPr lang="en-US" sz="2400" i="1">
-                        <a:latin typeface="Cambria Math" panose="02040503050406030204" pitchFamily="18" charset="0"/>
-                      </a:rPr>
-                      <m:t>𝑠</m:t>
-                    </m:r>
-                    <m:r>
-                      <a:rPr lang="en-US" sz="2400" i="1">
-                        <a:latin typeface="Cambria Math" panose="02040503050406030204" pitchFamily="18" charset="0"/>
-                      </a:rPr>
-                      <m:t>)</m:t>
-                    </m:r>
-                  </m:oMath>
-                </a14:m>
-                <a:r>
-                  <a:rPr lang="en-US" sz="2400" dirty="0"/>
-                  <a:t>	 	Did a player win or is the game a draw?</a:t>
-                </a:r>
-              </a:p>
-              <a:p>
-                <a:pPr marL="0" indent="0">
-                  <a:buNone/>
-                </a:pPr>
-                <a14:m>
-                  <m:oMath xmlns:m="http://schemas.openxmlformats.org/officeDocument/2006/math">
-                    <m:r>
-                      <a:rPr lang="en-US" sz="2400" i="1">
-                        <a:latin typeface="Cambria Math" panose="02040503050406030204" pitchFamily="18" charset="0"/>
-                      </a:rPr>
-                      <m:t>𝑈𝑡𝑖𝑙𝑖𝑡𝑦</m:t>
-                    </m:r>
-                    <m:r>
-                      <a:rPr lang="en-US" sz="2400" i="1">
-                        <a:latin typeface="Cambria Math" panose="02040503050406030204" pitchFamily="18" charset="0"/>
-                      </a:rPr>
-                      <m:t>(</m:t>
-                    </m:r>
-                    <m:r>
-                      <a:rPr lang="en-US" sz="2400" i="1">
-                        <a:latin typeface="Cambria Math" panose="02040503050406030204" pitchFamily="18" charset="0"/>
-                      </a:rPr>
-                      <m:t>𝑠</m:t>
-                    </m:r>
-                    <m:r>
-                      <a:rPr lang="en-US" sz="2400" i="1">
-                        <a:latin typeface="Cambria Math" panose="02040503050406030204" pitchFamily="18" charset="0"/>
-                      </a:rPr>
-                      <m:t>)</m:t>
-                    </m:r>
-                  </m:oMath>
-                </a14:m>
-                <a:r>
-                  <a:rPr lang="en-US" sz="2400" dirty="0"/>
-                  <a:t>		+1 if x wins, -1 if o wins and 0 for a draw.</a:t>
-                </a:r>
-              </a:p>
-              <a:p>
-                <a:pPr marL="0" indent="0">
-                  <a:buNone/>
-                </a:pPr>
-                <a:r>
-                  <a:rPr lang="en-US" sz="2400" dirty="0"/>
-                  <a:t>			Utility is only defined for terminal states.</a:t>
-                </a:r>
-              </a:p>
-              <a:p>
-                <a:endParaRPr lang="en-US" sz="2400" dirty="0"/>
-              </a:p>
-            </p:txBody>
-          </p:sp>
-        </mc:Choice>
-        <mc:Fallback xmlns="">
-          <p:sp>
-            <p:nvSpPr>
-              <p:cNvPr id="3" name="Content Placeholder 2">
-                <a:extLst>
-                  <a:ext uri="{FF2B5EF4-FFF2-40B4-BE49-F238E27FC236}">
-                    <a16:creationId xmlns:a16="http://schemas.microsoft.com/office/drawing/2014/main" id="{5EF77323-E4B1-4168-B791-DFDF7C7ADB94}"/>
-                  </a:ext>
-                </a:extLst>
-              </p:cNvPr>
-              <p:cNvSpPr>
-                <a:spLocks noGrp="1" noRot="1" noChangeAspect="1" noMove="1" noResize="1" noEditPoints="1" noAdjustHandles="1" noChangeArrowheads="1" noChangeShapeType="1" noTextEdit="1"/>
-              </p:cNvSpPr>
-              <p:nvPr>
-                <p:ph idx="1"/>
-              </p:nvPr>
-            </p:nvSpPr>
-            <p:spPr>
-              <a:xfrm>
-                <a:off x="628650" y="2362199"/>
-                <a:ext cx="7981950" cy="3814763"/>
-              </a:xfrm>
-              <a:blipFill>
-                <a:blip r:embed="rId2"/>
-                <a:stretch>
-                  <a:fillRect l="-611" t="-2077" r="-840"/>
-                </a:stretch>
-              </a:blipFill>
-            </p:spPr>
-            <p:txBody>
-              <a:bodyPr/>
-              <a:lstStyle/>
-              <a:p>
-                <a:r>
-                  <a:rPr lang="en-US">
-                    <a:noFill/>
-                  </a:rPr>
-                  <a:t> </a:t>
-                </a:r>
-              </a:p>
-            </p:txBody>
-          </p:sp>
-        </mc:Fallback>
-      </mc:AlternateContent>
-      <p:pic>
-        <p:nvPicPr>
-          <p:cNvPr id="2050" name="Picture 2">
-            <a:extLst>
-              <a:ext uri="{FF2B5EF4-FFF2-40B4-BE49-F238E27FC236}">
-                <a16:creationId xmlns:a16="http://schemas.microsoft.com/office/drawing/2014/main" id="{F68A6481-403B-4C1E-92D1-373A514882D5}"/>
-              </a:ext>
-              <a:ext uri="{C183D7F6-B498-43B3-948B-1728B52AA6E4}">
-                <adec:decorative xmlns:adec="http://schemas.microsoft.com/office/drawing/2017/decorative" val="1"/>
-              </a:ext>
-            </a:extLst>
-          </p:cNvPr>
-          <p:cNvPicPr>
-            <a:picLocks noChangeAspect="1" noChangeArrowheads="1"/>
-          </p:cNvPicPr>
-          <p:nvPr/>
-        </p:nvPicPr>
-        <p:blipFill>
-          <a:blip r:embed="rId3" cstate="print">
-            <a:extLst>
-              <a:ext uri="{28A0092B-C50C-407E-A947-70E740481C1C}">
-                <a14:useLocalDpi xmlns:a14="http://schemas.microsoft.com/office/drawing/2010/main" val="0"/>
-              </a:ext>
-            </a:extLst>
-          </a:blip>
-          <a:srcRect/>
-          <a:stretch>
-            <a:fillRect/>
-          </a:stretch>
-        </p:blipFill>
-        <p:spPr bwMode="auto">
-          <a:xfrm>
-            <a:off x="5967397" y="401221"/>
-            <a:ext cx="2547953" cy="2265779"/>
-          </a:xfrm>
-          <a:prstGeom prst="rect">
-            <a:avLst/>
-          </a:prstGeom>
-          <a:noFill/>
-          <a:extLst>
-            <a:ext uri="{909E8E84-426E-40DD-AFC4-6F175D3DCCD1}">
-              <a14:hiddenFill xmlns:a14="http://schemas.microsoft.com/office/drawing/2010/main">
-                <a:solidFill>
-                  <a:srgbClr val="FFFFFF"/>
-                </a:solidFill>
-              </a14:hiddenFill>
-            </a:ext>
-          </a:extLst>
-        </p:spPr>
-      </p:pic>
-      <p:sp>
-        <p:nvSpPr>
-          <p:cNvPr id="4" name="Speech Bubble: Rectangle 3">
-            <a:extLst>
-              <a:ext uri="{FF2B5EF4-FFF2-40B4-BE49-F238E27FC236}">
-                <a16:creationId xmlns:a16="http://schemas.microsoft.com/office/drawing/2014/main" id="{FC16888F-411D-4B9A-B95F-9197D878E77C}"/>
-              </a:ext>
-            </a:extLst>
-          </p:cNvPr>
-          <p:cNvSpPr/>
-          <p:nvPr/>
-        </p:nvSpPr>
-        <p:spPr>
-          <a:xfrm>
-            <a:off x="838200" y="5414962"/>
-            <a:ext cx="2514600" cy="762000"/>
-          </a:xfrm>
-          <a:prstGeom prst="wedgeRectCallout">
-            <a:avLst>
-              <a:gd name="adj1" fmla="val 53330"/>
-              <a:gd name="adj2" fmla="val -187640"/>
-            </a:avLst>
-          </a:prstGeom>
-        </p:spPr>
-        <p:style>
-          <a:lnRef idx="3">
-            <a:schemeClr val="lt1"/>
-          </a:lnRef>
-          <a:fillRef idx="1">
-            <a:schemeClr val="accent6"/>
-          </a:fillRef>
-          <a:effectRef idx="1">
-            <a:schemeClr val="accent6"/>
-          </a:effectRef>
-          <a:fontRef idx="minor">
-            <a:schemeClr val="lt1"/>
-          </a:fontRef>
-        </p:style>
-        <p:txBody>
-          <a:bodyPr rtlCol="0" anchor="ctr"/>
-          <a:lstStyle/>
-          <a:p>
-            <a:pPr algn="ctr"/>
-            <a:r>
-              <a:rPr lang="en-US" sz="2000" dirty="0"/>
-              <a:t>Here player x is Max and player o is Min.</a:t>
-            </a:r>
-          </a:p>
-        </p:txBody>
-      </p:sp>
-      <p:sp>
-        <p:nvSpPr>
-          <p:cNvPr id="6" name="TextBox 5">
-            <a:extLst>
-              <a:ext uri="{FF2B5EF4-FFF2-40B4-BE49-F238E27FC236}">
-                <a16:creationId xmlns:a16="http://schemas.microsoft.com/office/drawing/2014/main" id="{269212AB-8DD7-9004-3B87-B2B1784AD06E}"/>
-              </a:ext>
-            </a:extLst>
-          </p:cNvPr>
-          <p:cNvSpPr txBox="1"/>
-          <p:nvPr/>
-        </p:nvSpPr>
-        <p:spPr>
-          <a:xfrm>
-            <a:off x="3562350" y="5943600"/>
-            <a:ext cx="5334000" cy="707886"/>
-          </a:xfrm>
-          <a:prstGeom prst="rect">
-            <a:avLst/>
-          </a:prstGeom>
-        </p:spPr>
-        <p:style>
-          <a:lnRef idx="3">
-            <a:schemeClr val="lt1"/>
-          </a:lnRef>
-          <a:fillRef idx="1">
-            <a:schemeClr val="accent2"/>
-          </a:fillRef>
-          <a:effectRef idx="1">
-            <a:schemeClr val="accent2"/>
-          </a:effectRef>
-          <a:fontRef idx="minor">
-            <a:schemeClr val="lt1"/>
-          </a:fontRef>
-        </p:style>
-        <p:txBody>
-          <a:bodyPr wrap="square" rtlCol="0">
-            <a:spAutoFit/>
-          </a:bodyPr>
-          <a:lstStyle/>
-          <a:p>
-            <a:r>
-              <a:rPr lang="en-US" sz="2000" b="1" dirty="0"/>
-              <a:t>Note</a:t>
-            </a:r>
-            <a:r>
-              <a:rPr lang="en-US" sz="2000" dirty="0"/>
-              <a:t>: This game still uses a goal-based agent that plans actions to reach a winning terminal  state!</a:t>
-            </a:r>
-          </a:p>
-        </p:txBody>
-      </p:sp>
-    </p:spTree>
-    <p:extLst>
-      <p:ext uri="{BB962C8B-B14F-4D97-AF65-F5344CB8AC3E}">
-        <p14:creationId xmlns:p14="http://schemas.microsoft.com/office/powerpoint/2010/main" val="872051194"/>
-      </p:ext>
-    </p:extLst>
-  </p:cSld>
-  <p:clrMapOvr>
-    <a:masterClrMapping/>
-  </p:clrMapOvr>
-</p:sld>
-</file>
-
 <file path=ppt/slides/slide6.xml><?xml version="1.0" encoding="utf-8"?>
 <p:sld xmlns:a="http://schemas.openxmlformats.org/drawingml/2006/main" xmlns:r="http://schemas.openxmlformats.org/officeDocument/2006/relationships" xmlns:p="http://schemas.openxmlformats.org/presentationml/2006/main">
   <p:cSld>
@@ -50191,10 +50784,7 @@
                   <a:pPr/>
                   <a14:m>
                     <m:oMathPara xmlns:m="http://schemas.openxmlformats.org/officeDocument/2006/math">
-                      <m:oMathParaPr>
-                        <m:jc m:val="centerGroup"/>
-                      </m:oMathParaPr>
-                      <m:oMath xmlns:m="http://schemas.openxmlformats.org/officeDocument/2006/math">
+                      <m:oMath>
                         <m:r>
                           <a:rPr lang="en-US" b="0" i="1" smtClean="0">
                             <a:latin typeface="Cambria Math" panose="02040503050406030204" pitchFamily="18" charset="0"/>
@@ -50745,8 +51335,8 @@
           </a:p>
         </p:txBody>
       </p:sp>
-      <mc:AlternateContent xmlns:mc="http://schemas.openxmlformats.org/markup-compatibility/2006">
-        <mc:Choice xmlns:a14="http://schemas.microsoft.com/office/drawing/2010/main" Requires="a14">
+      <mc:AlternateContent xmlns:mc="http://schemas.openxmlformats.org/markup-compatibility/2006" xmlns:a14="http://schemas.microsoft.com/office/drawing/2010/main">
+        <mc:Choice Requires="a14">
           <p:sp>
             <p:nvSpPr>
               <p:cNvPr id="3" name="TextBox 2">
@@ -50900,10 +51490,7 @@
                 <a:pPr algn="ctr"/>
                 <a14:m>
                   <m:oMathPara xmlns:m="http://schemas.openxmlformats.org/officeDocument/2006/math">
-                    <m:oMathParaPr>
-                      <m:jc m:val="centerGroup"/>
-                    </m:oMathParaPr>
-                    <m:oMath xmlns:m="http://schemas.openxmlformats.org/officeDocument/2006/math">
+                    <m:oMath>
                       <m:r>
                         <a:rPr lang="en-US" sz="1400" b="0" i="0" smtClean="0">
                           <a:latin typeface="Cambria Math" panose="02040503050406030204" pitchFamily="18" charset="0"/>
@@ -50965,7 +51552,7 @@
                       <m:d>
                         <m:dPr>
                           <m:ctrlPr>
-                            <a:rPr lang="en-US" sz="1400" b="0" i="1" smtClean="0">
+                            <a:rPr lang="en-US" sz="1400" i="1">
                               <a:latin typeface="Cambria Math" panose="02040503050406030204" pitchFamily="18" charset="0"/>
                             </a:rPr>
                           </m:ctrlPr>
@@ -50999,7 +51586,7 @@
                       <m:rPr>
                         <m:nor/>
                       </m:rPr>
-                      <a:rPr lang="en-US" sz="1400" dirty="0"/>
+                      <a:rPr lang="en-US" sz="1400" i="0" dirty="0"/>
                       <m:t>986,409</m:t>
                     </m:r>
                   </m:oMath>
@@ -51010,7 +51597,6 @@
                 </a:r>
               </a:p>
               <a:p>
-                <a:pPr/>
                 <a:r>
                   <a:rPr lang="en-US" sz="1400" b="1" dirty="0"/>
                   <a:t>Note</a:t>
@@ -51040,7 +51626,7 @@
             </p:txBody>
           </p:sp>
         </mc:Choice>
-        <mc:Fallback>
+        <mc:Fallback xmlns="">
           <p:sp>
             <p:nvSpPr>
               <p:cNvPr id="3" name="TextBox 2">

--- a/slides/05_games.pptx
+++ b/slides/05_games.pptx
@@ -5,7 +5,7 @@
     <p:sldMasterId id="2147483708" r:id="rId1"/>
   </p:sldMasterIdLst>
   <p:notesMasterIdLst>
-    <p:notesMasterId r:id="rId57"/>
+    <p:notesMasterId r:id="rId58"/>
   </p:notesMasterIdLst>
   <p:sldIdLst>
     <p:sldId id="256" r:id="rId2"/>
@@ -21,48 +21,49 @@
     <p:sldId id="301" r:id="rId12"/>
     <p:sldId id="264" r:id="rId13"/>
     <p:sldId id="486" r:id="rId14"/>
-    <p:sldId id="270" r:id="rId15"/>
-    <p:sldId id="398" r:id="rId16"/>
-    <p:sldId id="271" r:id="rId17"/>
-    <p:sldId id="294" r:id="rId18"/>
-    <p:sldId id="272" r:id="rId19"/>
-    <p:sldId id="306" r:id="rId20"/>
-    <p:sldId id="274" r:id="rId21"/>
-    <p:sldId id="487" r:id="rId22"/>
-    <p:sldId id="403" r:id="rId23"/>
-    <p:sldId id="275" r:id="rId24"/>
-    <p:sldId id="302" r:id="rId25"/>
-    <p:sldId id="276" r:id="rId26"/>
-    <p:sldId id="397" r:id="rId27"/>
-    <p:sldId id="305" r:id="rId28"/>
-    <p:sldId id="307" r:id="rId29"/>
-    <p:sldId id="488" r:id="rId30"/>
-    <p:sldId id="399" r:id="rId31"/>
-    <p:sldId id="400" r:id="rId32"/>
-    <p:sldId id="277" r:id="rId33"/>
-    <p:sldId id="404" r:id="rId34"/>
-    <p:sldId id="289" r:id="rId35"/>
-    <p:sldId id="297" r:id="rId36"/>
-    <p:sldId id="489" r:id="rId37"/>
-    <p:sldId id="278" r:id="rId38"/>
-    <p:sldId id="298" r:id="rId39"/>
-    <p:sldId id="401" r:id="rId40"/>
-    <p:sldId id="279" r:id="rId41"/>
-    <p:sldId id="280" r:id="rId42"/>
-    <p:sldId id="281" r:id="rId43"/>
-    <p:sldId id="304" r:id="rId44"/>
-    <p:sldId id="490" r:id="rId45"/>
-    <p:sldId id="282" r:id="rId46"/>
-    <p:sldId id="284" r:id="rId47"/>
-    <p:sldId id="491" r:id="rId48"/>
-    <p:sldId id="406" r:id="rId49"/>
-    <p:sldId id="283" r:id="rId50"/>
-    <p:sldId id="402" r:id="rId51"/>
-    <p:sldId id="286" r:id="rId52"/>
-    <p:sldId id="287" r:id="rId53"/>
-    <p:sldId id="300" r:id="rId54"/>
-    <p:sldId id="405" r:id="rId55"/>
-    <p:sldId id="288" r:id="rId56"/>
+    <p:sldId id="492" r:id="rId15"/>
+    <p:sldId id="270" r:id="rId16"/>
+    <p:sldId id="398" r:id="rId17"/>
+    <p:sldId id="271" r:id="rId18"/>
+    <p:sldId id="294" r:id="rId19"/>
+    <p:sldId id="272" r:id="rId20"/>
+    <p:sldId id="306" r:id="rId21"/>
+    <p:sldId id="274" r:id="rId22"/>
+    <p:sldId id="487" r:id="rId23"/>
+    <p:sldId id="403" r:id="rId24"/>
+    <p:sldId id="275" r:id="rId25"/>
+    <p:sldId id="302" r:id="rId26"/>
+    <p:sldId id="276" r:id="rId27"/>
+    <p:sldId id="397" r:id="rId28"/>
+    <p:sldId id="305" r:id="rId29"/>
+    <p:sldId id="307" r:id="rId30"/>
+    <p:sldId id="488" r:id="rId31"/>
+    <p:sldId id="399" r:id="rId32"/>
+    <p:sldId id="400" r:id="rId33"/>
+    <p:sldId id="277" r:id="rId34"/>
+    <p:sldId id="404" r:id="rId35"/>
+    <p:sldId id="289" r:id="rId36"/>
+    <p:sldId id="297" r:id="rId37"/>
+    <p:sldId id="489" r:id="rId38"/>
+    <p:sldId id="278" r:id="rId39"/>
+    <p:sldId id="298" r:id="rId40"/>
+    <p:sldId id="401" r:id="rId41"/>
+    <p:sldId id="279" r:id="rId42"/>
+    <p:sldId id="280" r:id="rId43"/>
+    <p:sldId id="281" r:id="rId44"/>
+    <p:sldId id="304" r:id="rId45"/>
+    <p:sldId id="490" r:id="rId46"/>
+    <p:sldId id="282" r:id="rId47"/>
+    <p:sldId id="284" r:id="rId48"/>
+    <p:sldId id="491" r:id="rId49"/>
+    <p:sldId id="406" r:id="rId50"/>
+    <p:sldId id="283" r:id="rId51"/>
+    <p:sldId id="402" r:id="rId52"/>
+    <p:sldId id="286" r:id="rId53"/>
+    <p:sldId id="287" r:id="rId54"/>
+    <p:sldId id="300" r:id="rId55"/>
+    <p:sldId id="405" r:id="rId56"/>
+    <p:sldId id="288" r:id="rId57"/>
   </p:sldIdLst>
   <p:sldSz cx="9144000" cy="6858000" type="screen4x3"/>
   <p:notesSz cx="7315200" cy="9601200"/>
@@ -183,6 +184,7 @@
             <p14:sldId id="301"/>
             <p14:sldId id="264"/>
             <p14:sldId id="486"/>
+            <p14:sldId id="492"/>
           </p14:sldIdLst>
         </p14:section>
         <p14:section name="Minimax Search" id="{BE4E356D-5995-40BA-BA7E-7B6F0663D408}">
@@ -5983,7 +5985,7 @@
             <a:fld id="{CA8F1D18-9638-4932-8910-B6EDCB447AA8}" type="slidenum">
               <a:rPr lang="en-US" smtClean="0"/>
               <a:pPr/>
-              <a:t>33</a:t>
+              <a:t>34</a:t>
             </a:fld>
             <a:endParaRPr lang="en-US"/>
           </a:p>
@@ -6068,7 +6070,7 @@
             <a:fld id="{CA8F1D18-9638-4932-8910-B6EDCB447AA8}" type="slidenum">
               <a:rPr lang="en-US" smtClean="0"/>
               <a:pPr/>
-              <a:t>54</a:t>
+              <a:t>55</a:t>
             </a:fld>
             <a:endParaRPr lang="en-US"/>
           </a:p>
@@ -11821,13 +11823,14 @@
               <a:rPr lang="en-US" sz="3200" dirty="0">
                 <a:latin typeface="+mn-lt"/>
               </a:rPr>
-              <a:t>Frequentist vs. Bayesian Inference: Coin Toss</a:t>
+              <a:t>Solving Tic-Tac-Toe with </a:t>
             </a:r>
-            <a:br>
-              <a:rPr lang="en-US" sz="3200" dirty="0">
+            <a:r>
+              <a:rPr lang="en-US" sz="3200">
                 <a:latin typeface="+mn-lt"/>
               </a:rPr>
-            </a:br>
+              <a:t>AND-OR Search Trees</a:t>
+            </a:r>
             <a:endParaRPr lang="en-US" sz="3200" dirty="0">
               <a:latin typeface="+mn-lt"/>
             </a:endParaRPr>
@@ -11893,6 +11896,170 @@
 </file>
 
 <file path=ppt/slides/slide14.xml><?xml version="1.0" encoding="utf-8"?>
+<p:sld xmlns:a="http://schemas.openxmlformats.org/drawingml/2006/main" xmlns:r="http://schemas.openxmlformats.org/officeDocument/2006/relationships" xmlns:p="http://schemas.openxmlformats.org/presentationml/2006/main">
+  <p:cSld>
+    <p:spTree>
+      <p:nvGrpSpPr>
+        <p:cNvPr id="1" name=""/>
+        <p:cNvGrpSpPr/>
+        <p:nvPr/>
+      </p:nvGrpSpPr>
+      <p:grpSpPr>
+        <a:xfrm>
+          <a:off x="0" y="0"/>
+          <a:ext cx="0" cy="0"/>
+          <a:chOff x="0" y="0"/>
+          <a:chExt cx="0" cy="0"/>
+        </a:xfrm>
+      </p:grpSpPr>
+      <p:sp>
+        <p:nvSpPr>
+          <p:cNvPr id="2" name="Title 1">
+            <a:extLst>
+              <a:ext uri="{FF2B5EF4-FFF2-40B4-BE49-F238E27FC236}">
+                <a16:creationId xmlns:a16="http://schemas.microsoft.com/office/drawing/2014/main" id="{BBDE3880-3C43-FD9F-6516-F43D8DB60410}"/>
+              </a:ext>
+            </a:extLst>
+          </p:cNvPr>
+          <p:cNvSpPr>
+            <a:spLocks noGrp="1"/>
+          </p:cNvSpPr>
+          <p:nvPr>
+            <p:ph type="title"/>
+          </p:nvPr>
+        </p:nvSpPr>
+        <p:spPr/>
+        <p:txBody>
+          <a:bodyPr/>
+          <a:lstStyle/>
+          <a:p>
+            <a:r>
+              <a:rPr lang="en-US" dirty="0"/>
+              <a:t>Issues: AND-OR DFS Search</a:t>
+            </a:r>
+          </a:p>
+        </p:txBody>
+      </p:sp>
+      <mc:AlternateContent xmlns:mc="http://schemas.openxmlformats.org/markup-compatibility/2006" xmlns:a14="http://schemas.microsoft.com/office/drawing/2010/main">
+        <mc:Choice Requires="a14">
+          <p:sp>
+            <p:nvSpPr>
+              <p:cNvPr id="3" name="Content Placeholder 2">
+                <a:extLst>
+                  <a:ext uri="{FF2B5EF4-FFF2-40B4-BE49-F238E27FC236}">
+                    <a16:creationId xmlns:a16="http://schemas.microsoft.com/office/drawing/2014/main" id="{C9CB1972-A2D4-16A4-D3BD-D05B6B3FB8F1}"/>
+                  </a:ext>
+                </a:extLst>
+              </p:cNvPr>
+              <p:cNvSpPr>
+                <a:spLocks noGrp="1"/>
+              </p:cNvSpPr>
+              <p:nvPr>
+                <p:ph idx="1"/>
+              </p:nvPr>
+            </p:nvSpPr>
+            <p:spPr/>
+            <p:txBody>
+              <a:bodyPr/>
+              <a:lstStyle/>
+              <a:p>
+                <a:r>
+                  <a:rPr lang="en-US" dirty="0"/>
+                  <a:t>Exact solution </a:t>
+                </a:r>
+                <a14:m>
+                  <m:oMath xmlns:m="http://schemas.openxmlformats.org/officeDocument/2006/math">
+                    <m:r>
+                      <a:rPr lang="en-US" b="0" i="1" smtClean="0">
+                        <a:latin typeface="Cambria Math" panose="02040503050406030204" pitchFamily="18" charset="0"/>
+                      </a:rPr>
+                      <m:t>≠</m:t>
+                    </m:r>
+                  </m:oMath>
+                </a14:m>
+                <a:r>
+                  <a:rPr lang="en-US" dirty="0"/>
+                  <a:t> win fast (i.e., the optimal path)</a:t>
+                </a:r>
+              </a:p>
+              <a:p>
+                <a:r>
+                  <a:rPr lang="en-US" dirty="0"/>
+                  <a:t>Runtime: DFS cannot avoid redundant paths.</a:t>
+                </a:r>
+              </a:p>
+              <a:p>
+                <a:r>
+                  <a:rPr lang="en-US" dirty="0"/>
+                  <a:t>Returns no plan when no subtree with only goal leaf nodes can be found.</a:t>
+                </a:r>
+              </a:p>
+              <a:p>
+                <a:r>
+                  <a:rPr lang="en-US" dirty="0"/>
+                  <a:t>The conditional plan can be come very large.</a:t>
+                </a:r>
+              </a:p>
+              <a:p>
+                <a:endParaRPr lang="en-US" dirty="0"/>
+              </a:p>
+            </p:txBody>
+          </p:sp>
+        </mc:Choice>
+        <mc:Fallback xmlns="">
+          <p:sp>
+            <p:nvSpPr>
+              <p:cNvPr id="3" name="Content Placeholder 2">
+                <a:extLst>
+                  <a:ext uri="{FF2B5EF4-FFF2-40B4-BE49-F238E27FC236}">
+                    <a16:creationId xmlns:a16="http://schemas.microsoft.com/office/drawing/2014/main" id="{C9CB1972-A2D4-16A4-D3BD-D05B6B3FB8F1}"/>
+                  </a:ext>
+                </a:extLst>
+              </p:cNvPr>
+              <p:cNvSpPr>
+                <a:spLocks noGrp="1" noRot="1" noChangeAspect="1" noMove="1" noResize="1" noEditPoints="1" noAdjustHandles="1" noChangeArrowheads="1" noChangeShapeType="1" noTextEdit="1"/>
+              </p:cNvSpPr>
+              <p:nvPr>
+                <p:ph idx="1"/>
+              </p:nvPr>
+            </p:nvSpPr>
+            <p:spPr>
+              <a:blipFill>
+                <a:blip r:embed="rId2"/>
+                <a:stretch>
+                  <a:fillRect l="-1391" t="-2241"/>
+                </a:stretch>
+              </a:blipFill>
+            </p:spPr>
+            <p:txBody>
+              <a:bodyPr/>
+              <a:lstStyle/>
+              <a:p>
+                <a:r>
+                  <a:rPr lang="en-US">
+                    <a:noFill/>
+                  </a:rPr>
+                  <a:t> </a:t>
+                </a:r>
+              </a:p>
+            </p:txBody>
+          </p:sp>
+        </mc:Fallback>
+      </mc:AlternateContent>
+    </p:spTree>
+    <p:extLst>
+      <p:ext uri="{BB962C8B-B14F-4D97-AF65-F5344CB8AC3E}">
+        <p14:creationId xmlns:p14="http://schemas.microsoft.com/office/powerpoint/2010/main" val="388361549"/>
+      </p:ext>
+    </p:extLst>
+  </p:cSld>
+  <p:clrMapOvr>
+    <a:masterClrMapping/>
+  </p:clrMapOvr>
+</p:sld>
+</file>
+
+<file path=ppt/slides/slide15.xml><?xml version="1.0" encoding="utf-8"?>
 <p:sld xmlns:a="http://schemas.openxmlformats.org/drawingml/2006/main" xmlns:r="http://schemas.openxmlformats.org/officeDocument/2006/relationships" xmlns:p="http://schemas.openxmlformats.org/presentationml/2006/main">
   <p:cSld>
     <p:bg>
@@ -12193,7 +12360,7 @@
 </p:sld>
 </file>
 
-<file path=ppt/slides/slide15.xml><?xml version="1.0" encoding="utf-8"?>
+<file path=ppt/slides/slide16.xml><?xml version="1.0" encoding="utf-8"?>
 <p:sld xmlns:a="http://schemas.openxmlformats.org/drawingml/2006/main" xmlns:r="http://schemas.openxmlformats.org/officeDocument/2006/relationships" xmlns:p="http://schemas.openxmlformats.org/presentationml/2006/main">
   <p:cSld>
     <p:spTree>
@@ -12952,7 +13119,7 @@
 </p:sld>
 </file>
 
-<file path=ppt/slides/slide16.xml><?xml version="1.0" encoding="utf-8"?>
+<file path=ppt/slides/slide17.xml><?xml version="1.0" encoding="utf-8"?>
 <p:sld xmlns:a="http://schemas.openxmlformats.org/drawingml/2006/main" xmlns:r="http://schemas.openxmlformats.org/officeDocument/2006/relationships" xmlns:p="http://schemas.openxmlformats.org/presentationml/2006/main">
   <p:cSld>
     <p:spTree>
@@ -13635,7 +13802,7 @@
 </p:sld>
 </file>
 
-<file path=ppt/slides/slide17.xml><?xml version="1.0" encoding="utf-8"?>
+<file path=ppt/slides/slide18.xml><?xml version="1.0" encoding="utf-8"?>
 <p:sld xmlns:a="http://schemas.openxmlformats.org/drawingml/2006/main" xmlns:r="http://schemas.openxmlformats.org/officeDocument/2006/relationships" xmlns:p="http://schemas.openxmlformats.org/presentationml/2006/main">
   <p:cSld>
     <p:spTree>
@@ -15933,7 +16100,7 @@
 </p:sld>
 </file>
 
-<file path=ppt/slides/slide18.xml><?xml version="1.0" encoding="utf-8"?>
+<file path=ppt/slides/slide19.xml><?xml version="1.0" encoding="utf-8"?>
 <p:sld xmlns:a="http://schemas.openxmlformats.org/drawingml/2006/main" xmlns:r="http://schemas.openxmlformats.org/officeDocument/2006/relationships" xmlns:p="http://schemas.openxmlformats.org/presentationml/2006/main">
   <p:cSld>
     <p:spTree>
@@ -16699,7 +16866,99 @@
 </p:sld>
 </file>
 
-<file path=ppt/slides/slide19.xml><?xml version="1.0" encoding="utf-8"?>
+<file path=ppt/slides/slide2.xml><?xml version="1.0" encoding="utf-8"?>
+<p:sld xmlns:a="http://schemas.openxmlformats.org/drawingml/2006/main" xmlns:r="http://schemas.openxmlformats.org/officeDocument/2006/relationships" xmlns:p="http://schemas.openxmlformats.org/presentationml/2006/main">
+  <p:cSld>
+    <p:spTree>
+      <p:nvGrpSpPr>
+        <p:cNvPr id="1" name=""/>
+        <p:cNvGrpSpPr/>
+        <p:nvPr/>
+      </p:nvGrpSpPr>
+      <p:grpSpPr>
+        <a:xfrm>
+          <a:off x="0" y="0"/>
+          <a:ext cx="0" cy="0"/>
+          <a:chOff x="0" y="0"/>
+          <a:chExt cx="0" cy="0"/>
+        </a:xfrm>
+      </p:grpSpPr>
+      <p:sp>
+        <p:nvSpPr>
+          <p:cNvPr id="2" name="Title 1">
+            <a:extLst>
+              <a:ext uri="{FF2B5EF4-FFF2-40B4-BE49-F238E27FC236}">
+                <a16:creationId xmlns:a16="http://schemas.microsoft.com/office/drawing/2014/main" id="{0637A84F-7178-4E19-A3E7-3440EE65CBC6}"/>
+              </a:ext>
+            </a:extLst>
+          </p:cNvPr>
+          <p:cNvSpPr>
+            <a:spLocks noGrp="1"/>
+          </p:cNvSpPr>
+          <p:nvPr>
+            <p:ph type="title"/>
+          </p:nvPr>
+        </p:nvSpPr>
+        <p:spPr/>
+        <p:txBody>
+          <a:bodyPr/>
+          <a:lstStyle/>
+          <a:p>
+            <a:r>
+              <a:rPr lang="en-US" dirty="0"/>
+              <a:t>Contents</a:t>
+            </a:r>
+          </a:p>
+        </p:txBody>
+      </p:sp>
+      <p:graphicFrame>
+        <p:nvGraphicFramePr>
+          <p:cNvPr id="7" name="Content Placeholder 6">
+            <a:extLst>
+              <a:ext uri="{FF2B5EF4-FFF2-40B4-BE49-F238E27FC236}">
+                <a16:creationId xmlns:a16="http://schemas.microsoft.com/office/drawing/2014/main" id="{B238EBBB-C40E-49A2-AEE3-55232539867E}"/>
+              </a:ext>
+              <a:ext uri="{C183D7F6-B498-43B3-948B-1728B52AA6E4}">
+                <adec:decorative xmlns:adec="http://schemas.microsoft.com/office/drawing/2017/decorative" val="1"/>
+              </a:ext>
+            </a:extLst>
+          </p:cNvPr>
+          <p:cNvGraphicFramePr>
+            <a:graphicFrameLocks noGrp="1"/>
+          </p:cNvGraphicFramePr>
+          <p:nvPr>
+            <p:ph idx="1"/>
+            <p:extLst>
+              <p:ext uri="{D42A27DB-BD31-4B8C-83A1-F6EECF244321}">
+                <p14:modId xmlns:p14="http://schemas.microsoft.com/office/powerpoint/2010/main" val="1212579034"/>
+              </p:ext>
+            </p:extLst>
+          </p:nvPr>
+        </p:nvGraphicFramePr>
+        <p:xfrm>
+          <a:off x="628650" y="1690689"/>
+          <a:ext cx="7886700" cy="4486274"/>
+        </p:xfrm>
+        <a:graphic>
+          <a:graphicData uri="http://schemas.openxmlformats.org/drawingml/2006/diagram">
+            <dgm:relIds xmlns:dgm="http://schemas.openxmlformats.org/drawingml/2006/diagram" xmlns:r="http://schemas.openxmlformats.org/officeDocument/2006/relationships" r:dm="rId2" r:lo="rId3" r:qs="rId4" r:cs="rId5"/>
+          </a:graphicData>
+        </a:graphic>
+      </p:graphicFrame>
+    </p:spTree>
+    <p:extLst>
+      <p:ext uri="{BB962C8B-B14F-4D97-AF65-F5344CB8AC3E}">
+        <p14:creationId xmlns:p14="http://schemas.microsoft.com/office/powerpoint/2010/main" val="4100430873"/>
+      </p:ext>
+    </p:extLst>
+  </p:cSld>
+  <p:clrMapOvr>
+    <a:masterClrMapping/>
+  </p:clrMapOvr>
+</p:sld>
+</file>
+
+<file path=ppt/slides/slide20.xml><?xml version="1.0" encoding="utf-8"?>
 <p:sld xmlns:a="http://schemas.openxmlformats.org/drawingml/2006/main" xmlns:r="http://schemas.openxmlformats.org/officeDocument/2006/relationships" xmlns:p="http://schemas.openxmlformats.org/presentationml/2006/main">
   <p:cSld>
     <p:spTree>
@@ -19756,99 +20015,7 @@
 </p:sld>
 </file>
 
-<file path=ppt/slides/slide2.xml><?xml version="1.0" encoding="utf-8"?>
-<p:sld xmlns:a="http://schemas.openxmlformats.org/drawingml/2006/main" xmlns:r="http://schemas.openxmlformats.org/officeDocument/2006/relationships" xmlns:p="http://schemas.openxmlformats.org/presentationml/2006/main">
-  <p:cSld>
-    <p:spTree>
-      <p:nvGrpSpPr>
-        <p:cNvPr id="1" name=""/>
-        <p:cNvGrpSpPr/>
-        <p:nvPr/>
-      </p:nvGrpSpPr>
-      <p:grpSpPr>
-        <a:xfrm>
-          <a:off x="0" y="0"/>
-          <a:ext cx="0" cy="0"/>
-          <a:chOff x="0" y="0"/>
-          <a:chExt cx="0" cy="0"/>
-        </a:xfrm>
-      </p:grpSpPr>
-      <p:sp>
-        <p:nvSpPr>
-          <p:cNvPr id="2" name="Title 1">
-            <a:extLst>
-              <a:ext uri="{FF2B5EF4-FFF2-40B4-BE49-F238E27FC236}">
-                <a16:creationId xmlns:a16="http://schemas.microsoft.com/office/drawing/2014/main" id="{0637A84F-7178-4E19-A3E7-3440EE65CBC6}"/>
-              </a:ext>
-            </a:extLst>
-          </p:cNvPr>
-          <p:cNvSpPr>
-            <a:spLocks noGrp="1"/>
-          </p:cNvSpPr>
-          <p:nvPr>
-            <p:ph type="title"/>
-          </p:nvPr>
-        </p:nvSpPr>
-        <p:spPr/>
-        <p:txBody>
-          <a:bodyPr/>
-          <a:lstStyle/>
-          <a:p>
-            <a:r>
-              <a:rPr lang="en-US" dirty="0"/>
-              <a:t>Contents</a:t>
-            </a:r>
-          </a:p>
-        </p:txBody>
-      </p:sp>
-      <p:graphicFrame>
-        <p:nvGraphicFramePr>
-          <p:cNvPr id="7" name="Content Placeholder 6">
-            <a:extLst>
-              <a:ext uri="{FF2B5EF4-FFF2-40B4-BE49-F238E27FC236}">
-                <a16:creationId xmlns:a16="http://schemas.microsoft.com/office/drawing/2014/main" id="{B238EBBB-C40E-49A2-AEE3-55232539867E}"/>
-              </a:ext>
-              <a:ext uri="{C183D7F6-B498-43B3-948B-1728B52AA6E4}">
-                <adec:decorative xmlns:adec="http://schemas.microsoft.com/office/drawing/2017/decorative" val="1"/>
-              </a:ext>
-            </a:extLst>
-          </p:cNvPr>
-          <p:cNvGraphicFramePr>
-            <a:graphicFrameLocks noGrp="1"/>
-          </p:cNvGraphicFramePr>
-          <p:nvPr>
-            <p:ph idx="1"/>
-            <p:extLst>
-              <p:ext uri="{D42A27DB-BD31-4B8C-83A1-F6EECF244321}">
-                <p14:modId xmlns:p14="http://schemas.microsoft.com/office/powerpoint/2010/main" val="1212579034"/>
-              </p:ext>
-            </p:extLst>
-          </p:nvPr>
-        </p:nvGraphicFramePr>
-        <p:xfrm>
-          <a:off x="628650" y="1690689"/>
-          <a:ext cx="7886700" cy="4486274"/>
-        </p:xfrm>
-        <a:graphic>
-          <a:graphicData uri="http://schemas.openxmlformats.org/drawingml/2006/diagram">
-            <dgm:relIds xmlns:dgm="http://schemas.openxmlformats.org/drawingml/2006/diagram" xmlns:r="http://schemas.openxmlformats.org/officeDocument/2006/relationships" r:dm="rId2" r:lo="rId3" r:qs="rId4" r:cs="rId5"/>
-          </a:graphicData>
-        </a:graphic>
-      </p:graphicFrame>
-    </p:spTree>
-    <p:extLst>
-      <p:ext uri="{BB962C8B-B14F-4D97-AF65-F5344CB8AC3E}">
-        <p14:creationId xmlns:p14="http://schemas.microsoft.com/office/powerpoint/2010/main" val="4100430873"/>
-      </p:ext>
-    </p:extLst>
-  </p:cSld>
-  <p:clrMapOvr>
-    <a:masterClrMapping/>
-  </p:clrMapOvr>
-</p:sld>
-</file>
-
-<file path=ppt/slides/slide20.xml><?xml version="1.0" encoding="utf-8"?>
+<file path=ppt/slides/slide21.xml><?xml version="1.0" encoding="utf-8"?>
 <p:sld xmlns:a="http://schemas.openxmlformats.org/drawingml/2006/main" xmlns:r="http://schemas.openxmlformats.org/officeDocument/2006/relationships" xmlns:p="http://schemas.openxmlformats.org/presentationml/2006/main">
   <p:cSld>
     <p:spTree>
@@ -19893,7 +20060,7 @@
           <a:p>
             <a:r>
               <a:rPr lang="en-US" dirty="0"/>
-              <a:t>Issue: Search Time</a:t>
+              <a:t>Issue: Minimax Search</a:t>
             </a:r>
           </a:p>
         </p:txBody>
@@ -20691,7 +20858,7 @@
 </p:sld>
 </file>
 
-<file path=ppt/slides/slide21.xml><?xml version="1.0" encoding="utf-8"?>
+<file path=ppt/slides/slide22.xml><?xml version="1.0" encoding="utf-8"?>
 <p:sld xmlns:a="http://schemas.openxmlformats.org/drawingml/2006/main" xmlns:r="http://schemas.openxmlformats.org/officeDocument/2006/relationships" xmlns:p="http://schemas.openxmlformats.org/presentationml/2006/main">
   <p:cSld>
     <p:spTree>
@@ -20826,7 +20993,7 @@
 </p:sld>
 </file>
 
-<file path=ppt/slides/slide22.xml><?xml version="1.0" encoding="utf-8"?>
+<file path=ppt/slides/slide23.xml><?xml version="1.0" encoding="utf-8"?>
 <p:sld xmlns:a="http://schemas.openxmlformats.org/drawingml/2006/main" xmlns:r="http://schemas.openxmlformats.org/officeDocument/2006/relationships" xmlns:p="http://schemas.openxmlformats.org/presentationml/2006/main">
   <p:cSld>
     <p:spTree>
@@ -21028,7 +21195,7 @@
 </p:sld>
 </file>
 
-<file path=ppt/slides/slide23.xml><?xml version="1.0" encoding="utf-8"?>
+<file path=ppt/slides/slide24.xml><?xml version="1.0" encoding="utf-8"?>
 <p:sld xmlns:a="http://schemas.openxmlformats.org/drawingml/2006/main" xmlns:r="http://schemas.openxmlformats.org/officeDocument/2006/relationships" xmlns:p="http://schemas.openxmlformats.org/presentationml/2006/main">
   <p:cSld>
     <p:spTree>
@@ -21888,7 +22055,7 @@
 </p:sld>
 </file>
 
-<file path=ppt/slides/slide24.xml><?xml version="1.0" encoding="utf-8"?>
+<file path=ppt/slides/slide25.xml><?xml version="1.0" encoding="utf-8"?>
 <p:sld xmlns:a="http://schemas.openxmlformats.org/drawingml/2006/main" xmlns:r="http://schemas.openxmlformats.org/officeDocument/2006/relationships" xmlns:p="http://schemas.openxmlformats.org/presentationml/2006/main">
   <p:cSld>
     <p:spTree>
@@ -24333,7 +24500,7 @@
 </p:sld>
 </file>
 
-<file path=ppt/slides/slide25.xml><?xml version="1.0" encoding="utf-8"?>
+<file path=ppt/slides/slide26.xml><?xml version="1.0" encoding="utf-8"?>
 <p:sld xmlns:a="http://schemas.openxmlformats.org/drawingml/2006/main" xmlns:r="http://schemas.openxmlformats.org/officeDocument/2006/relationships" xmlns:p="http://schemas.openxmlformats.org/presentationml/2006/main">
   <p:cSld>
     <p:spTree>
@@ -25000,7 +25167,7 @@
 </p:sld>
 </file>
 
-<file path=ppt/slides/slide26.xml><?xml version="1.0" encoding="utf-8"?>
+<file path=ppt/slides/slide27.xml><?xml version="1.0" encoding="utf-8"?>
 <p:sld xmlns:a="http://schemas.openxmlformats.org/drawingml/2006/main" xmlns:r="http://schemas.openxmlformats.org/officeDocument/2006/relationships" xmlns:p="http://schemas.openxmlformats.org/presentationml/2006/main">
   <p:cSld>
     <p:spTree>
@@ -28638,7 +28805,7 @@
 </p:sld>
 </file>
 
-<file path=ppt/slides/slide27.xml><?xml version="1.0" encoding="utf-8"?>
+<file path=ppt/slides/slide28.xml><?xml version="1.0" encoding="utf-8"?>
 <p:sld xmlns:a="http://schemas.openxmlformats.org/drawingml/2006/main" xmlns:r="http://schemas.openxmlformats.org/officeDocument/2006/relationships" xmlns:p="http://schemas.openxmlformats.org/presentationml/2006/main">
   <p:cSld>
     <p:spTree>
@@ -28805,7 +28972,7 @@
 </p:sld>
 </file>
 
-<file path=ppt/slides/slide28.xml><?xml version="1.0" encoding="utf-8"?>
+<file path=ppt/slides/slide29.xml><?xml version="1.0" encoding="utf-8"?>
 <p:sld xmlns:a="http://schemas.openxmlformats.org/drawingml/2006/main" xmlns:r="http://schemas.openxmlformats.org/officeDocument/2006/relationships" xmlns:p="http://schemas.openxmlformats.org/presentationml/2006/main">
   <p:cSld>
     <p:spTree>
@@ -32670,130 +32837,6 @@
 </p:sld>
 </file>
 
-<file path=ppt/slides/slide29.xml><?xml version="1.0" encoding="utf-8"?>
-<p:sld xmlns:a="http://schemas.openxmlformats.org/drawingml/2006/main" xmlns:r="http://schemas.openxmlformats.org/officeDocument/2006/relationships" xmlns:p="http://schemas.openxmlformats.org/presentationml/2006/main">
-  <p:cSld>
-    <p:spTree>
-      <p:nvGrpSpPr>
-        <p:cNvPr id="1" name="">
-          <a:extLst>
-            <a:ext uri="{FF2B5EF4-FFF2-40B4-BE49-F238E27FC236}">
-              <a16:creationId xmlns:a16="http://schemas.microsoft.com/office/drawing/2014/main" id="{7627890C-E29D-F3E4-FD62-76C179AD5A36}"/>
-            </a:ext>
-          </a:extLst>
-        </p:cNvPr>
-        <p:cNvGrpSpPr/>
-        <p:nvPr/>
-      </p:nvGrpSpPr>
-      <p:grpSpPr>
-        <a:xfrm>
-          <a:off x="0" y="0"/>
-          <a:ext cx="0" cy="0"/>
-          <a:chOff x="0" y="0"/>
-          <a:chExt cx="0" cy="0"/>
-        </a:xfrm>
-      </p:grpSpPr>
-      <p:sp>
-        <p:nvSpPr>
-          <p:cNvPr id="4" name="Title 3">
-            <a:extLst>
-              <a:ext uri="{FF2B5EF4-FFF2-40B4-BE49-F238E27FC236}">
-                <a16:creationId xmlns:a16="http://schemas.microsoft.com/office/drawing/2014/main" id="{CEB5BF72-518E-A05B-90C3-00CE6F8CC1D2}"/>
-              </a:ext>
-            </a:extLst>
-          </p:cNvPr>
-          <p:cNvSpPr>
-            <a:spLocks noGrp="1"/>
-          </p:cNvSpPr>
-          <p:nvPr>
-            <p:ph type="title"/>
-          </p:nvPr>
-        </p:nvSpPr>
-        <p:spPr>
-          <a:xfrm>
-            <a:off x="829115" y="2931914"/>
-            <a:ext cx="7886700" cy="876035"/>
-          </a:xfrm>
-        </p:spPr>
-        <p:txBody>
-          <a:bodyPr>
-            <a:noAutofit/>
-          </a:bodyPr>
-          <a:lstStyle/>
-          <a:p>
-            <a:r>
-              <a:rPr lang="en-US" sz="3200" b="1" dirty="0">
-                <a:latin typeface="+mn-lt"/>
-              </a:rPr>
-              <a:t>Code example</a:t>
-            </a:r>
-            <a:r>
-              <a:rPr lang="en-US" sz="3200" dirty="0">
-                <a:latin typeface="+mn-lt"/>
-              </a:rPr>
-              <a:t>: Solving Tic-Tac-Toe with Minimax Search with Alpha-Beta Pruning</a:t>
-            </a:r>
-          </a:p>
-        </p:txBody>
-      </p:sp>
-      <p:sp>
-        <p:nvSpPr>
-          <p:cNvPr id="5" name="TextBox 4">
-            <a:extLst>
-              <a:ext uri="{FF2B5EF4-FFF2-40B4-BE49-F238E27FC236}">
-                <a16:creationId xmlns:a16="http://schemas.microsoft.com/office/drawing/2014/main" id="{4F5FBCEC-A082-BB02-0CAA-35DAB4959F61}"/>
-              </a:ext>
-            </a:extLst>
-          </p:cNvPr>
-          <p:cNvSpPr txBox="1"/>
-          <p:nvPr/>
-        </p:nvSpPr>
-        <p:spPr>
-          <a:xfrm>
-            <a:off x="893299" y="5365946"/>
-            <a:ext cx="6608298" cy="253916"/>
-          </a:xfrm>
-          <a:prstGeom prst="rect">
-            <a:avLst/>
-          </a:prstGeom>
-          <a:noFill/>
-        </p:spPr>
-        <p:txBody>
-          <a:bodyPr wrap="square" rtlCol="0">
-            <a:spAutoFit/>
-          </a:bodyPr>
-          <a:lstStyle/>
-          <a:p>
-            <a:r>
-              <a:rPr lang="en-US" sz="1050" dirty="0"/>
-              <a:t>See Code on </a:t>
-            </a:r>
-            <a:r>
-              <a:rPr lang="en-US" sz="1050" dirty="0">
-                <a:hlinkClick r:id="rId2"/>
-              </a:rPr>
-              <a:t>https://michael.hahsler.net/Introduction_to_Artificial_Intelligence/</a:t>
-            </a:r>
-            <a:r>
-              <a:rPr lang="en-US" sz="1050" dirty="0"/>
-              <a:t> </a:t>
-            </a:r>
-          </a:p>
-        </p:txBody>
-      </p:sp>
-    </p:spTree>
-    <p:extLst>
-      <p:ext uri="{BB962C8B-B14F-4D97-AF65-F5344CB8AC3E}">
-        <p14:creationId xmlns:p14="http://schemas.microsoft.com/office/powerpoint/2010/main" val="2555502032"/>
-      </p:ext>
-    </p:extLst>
-  </p:cSld>
-  <p:clrMapOvr>
-    <a:masterClrMapping/>
-  </p:clrMapOvr>
-</p:sld>
-</file>
-
 <file path=ppt/slides/slide3.xml><?xml version="1.0" encoding="utf-8"?>
 <p:sld xmlns:a="http://schemas.openxmlformats.org/drawingml/2006/main" xmlns:r="http://schemas.openxmlformats.org/officeDocument/2006/relationships" xmlns:p="http://schemas.openxmlformats.org/presentationml/2006/main">
   <p:cSld>
@@ -33079,6 +33122,130 @@
 </file>
 
 <file path=ppt/slides/slide30.xml><?xml version="1.0" encoding="utf-8"?>
+<p:sld xmlns:a="http://schemas.openxmlformats.org/drawingml/2006/main" xmlns:r="http://schemas.openxmlformats.org/officeDocument/2006/relationships" xmlns:p="http://schemas.openxmlformats.org/presentationml/2006/main">
+  <p:cSld>
+    <p:spTree>
+      <p:nvGrpSpPr>
+        <p:cNvPr id="1" name="">
+          <a:extLst>
+            <a:ext uri="{FF2B5EF4-FFF2-40B4-BE49-F238E27FC236}">
+              <a16:creationId xmlns:a16="http://schemas.microsoft.com/office/drawing/2014/main" id="{7627890C-E29D-F3E4-FD62-76C179AD5A36}"/>
+            </a:ext>
+          </a:extLst>
+        </p:cNvPr>
+        <p:cNvGrpSpPr/>
+        <p:nvPr/>
+      </p:nvGrpSpPr>
+      <p:grpSpPr>
+        <a:xfrm>
+          <a:off x="0" y="0"/>
+          <a:ext cx="0" cy="0"/>
+          <a:chOff x="0" y="0"/>
+          <a:chExt cx="0" cy="0"/>
+        </a:xfrm>
+      </p:grpSpPr>
+      <p:sp>
+        <p:nvSpPr>
+          <p:cNvPr id="4" name="Title 3">
+            <a:extLst>
+              <a:ext uri="{FF2B5EF4-FFF2-40B4-BE49-F238E27FC236}">
+                <a16:creationId xmlns:a16="http://schemas.microsoft.com/office/drawing/2014/main" id="{CEB5BF72-518E-A05B-90C3-00CE6F8CC1D2}"/>
+              </a:ext>
+            </a:extLst>
+          </p:cNvPr>
+          <p:cNvSpPr>
+            <a:spLocks noGrp="1"/>
+          </p:cNvSpPr>
+          <p:nvPr>
+            <p:ph type="title"/>
+          </p:nvPr>
+        </p:nvSpPr>
+        <p:spPr>
+          <a:xfrm>
+            <a:off x="829115" y="2931914"/>
+            <a:ext cx="7886700" cy="876035"/>
+          </a:xfrm>
+        </p:spPr>
+        <p:txBody>
+          <a:bodyPr>
+            <a:noAutofit/>
+          </a:bodyPr>
+          <a:lstStyle/>
+          <a:p>
+            <a:r>
+              <a:rPr lang="en-US" sz="3200" b="1" dirty="0">
+                <a:latin typeface="+mn-lt"/>
+              </a:rPr>
+              <a:t>Code example</a:t>
+            </a:r>
+            <a:r>
+              <a:rPr lang="en-US" sz="3200" dirty="0">
+                <a:latin typeface="+mn-lt"/>
+              </a:rPr>
+              <a:t>: Solving Tic-Tac-Toe with Minimax Search with Alpha-Beta Pruning</a:t>
+            </a:r>
+          </a:p>
+        </p:txBody>
+      </p:sp>
+      <p:sp>
+        <p:nvSpPr>
+          <p:cNvPr id="5" name="TextBox 4">
+            <a:extLst>
+              <a:ext uri="{FF2B5EF4-FFF2-40B4-BE49-F238E27FC236}">
+                <a16:creationId xmlns:a16="http://schemas.microsoft.com/office/drawing/2014/main" id="{4F5FBCEC-A082-BB02-0CAA-35DAB4959F61}"/>
+              </a:ext>
+            </a:extLst>
+          </p:cNvPr>
+          <p:cNvSpPr txBox="1"/>
+          <p:nvPr/>
+        </p:nvSpPr>
+        <p:spPr>
+          <a:xfrm>
+            <a:off x="893299" y="5365946"/>
+            <a:ext cx="6608298" cy="253916"/>
+          </a:xfrm>
+          <a:prstGeom prst="rect">
+            <a:avLst/>
+          </a:prstGeom>
+          <a:noFill/>
+        </p:spPr>
+        <p:txBody>
+          <a:bodyPr wrap="square" rtlCol="0">
+            <a:spAutoFit/>
+          </a:bodyPr>
+          <a:lstStyle/>
+          <a:p>
+            <a:r>
+              <a:rPr lang="en-US" sz="1050" dirty="0"/>
+              <a:t>See Code on </a:t>
+            </a:r>
+            <a:r>
+              <a:rPr lang="en-US" sz="1050" dirty="0">
+                <a:hlinkClick r:id="rId2"/>
+              </a:rPr>
+              <a:t>https://michael.hahsler.net/Introduction_to_Artificial_Intelligence/</a:t>
+            </a:r>
+            <a:r>
+              <a:rPr lang="en-US" sz="1050" dirty="0"/>
+              <a:t> </a:t>
+            </a:r>
+          </a:p>
+        </p:txBody>
+      </p:sp>
+    </p:spTree>
+    <p:extLst>
+      <p:ext uri="{BB962C8B-B14F-4D97-AF65-F5344CB8AC3E}">
+        <p14:creationId xmlns:p14="http://schemas.microsoft.com/office/powerpoint/2010/main" val="2555502032"/>
+      </p:ext>
+    </p:extLst>
+  </p:cSld>
+  <p:clrMapOvr>
+    <a:masterClrMapping/>
+  </p:clrMapOvr>
+</p:sld>
+</file>
+
+<file path=ppt/slides/slide31.xml><?xml version="1.0" encoding="utf-8"?>
 <p:sld xmlns:a="http://schemas.openxmlformats.org/drawingml/2006/main" xmlns:r="http://schemas.openxmlformats.org/officeDocument/2006/relationships" xmlns:p="http://schemas.openxmlformats.org/presentationml/2006/main">
   <p:cSld>
     <p:spTree>
@@ -33533,7 +33700,7 @@
 </p:sld>
 </file>
 
-<file path=ppt/slides/slide31.xml><?xml version="1.0" encoding="utf-8"?>
+<file path=ppt/slides/slide32.xml><?xml version="1.0" encoding="utf-8"?>
 <p:sld xmlns:a="http://schemas.openxmlformats.org/drawingml/2006/main" xmlns:r="http://schemas.openxmlformats.org/officeDocument/2006/relationships" xmlns:p="http://schemas.openxmlformats.org/presentationml/2006/main">
   <p:cSld>
     <p:spTree>
@@ -33658,7 +33825,7 @@
 </p:sld>
 </file>
 
-<file path=ppt/slides/slide32.xml><?xml version="1.0" encoding="utf-8"?>
+<file path=ppt/slides/slide33.xml><?xml version="1.0" encoding="utf-8"?>
 <p:sld xmlns:a="http://schemas.openxmlformats.org/drawingml/2006/main" xmlns:r="http://schemas.openxmlformats.org/officeDocument/2006/relationships" xmlns:p="http://schemas.openxmlformats.org/presentationml/2006/main">
   <p:cSld>
     <p:bg>
@@ -33930,7 +34097,7 @@
 </p:sld>
 </file>
 
-<file path=ppt/slides/slide33.xml><?xml version="1.0" encoding="utf-8"?>
+<file path=ppt/slides/slide34.xml><?xml version="1.0" encoding="utf-8"?>
 <p:sld xmlns:a="http://schemas.openxmlformats.org/drawingml/2006/main" xmlns:r="http://schemas.openxmlformats.org/officeDocument/2006/relationships" xmlns:p="http://schemas.openxmlformats.org/presentationml/2006/main">
   <p:cSld>
     <p:spTree>
@@ -34084,7 +34251,7 @@
 </p:sld>
 </file>
 
-<file path=ppt/slides/slide34.xml><?xml version="1.0" encoding="utf-8"?>
+<file path=ppt/slides/slide35.xml><?xml version="1.0" encoding="utf-8"?>
 <p:sld xmlns:a="http://schemas.openxmlformats.org/drawingml/2006/main" xmlns:r="http://schemas.openxmlformats.org/officeDocument/2006/relationships" xmlns:p="http://schemas.openxmlformats.org/presentationml/2006/main">
   <p:cSld>
     <p:spTree>
@@ -35171,7 +35338,7 @@
 </p:sld>
 </file>
 
-<file path=ppt/slides/slide35.xml><?xml version="1.0" encoding="utf-8"?>
+<file path=ppt/slides/slide36.xml><?xml version="1.0" encoding="utf-8"?>
 <p:sld xmlns:a="http://schemas.openxmlformats.org/drawingml/2006/main" xmlns:r="http://schemas.openxmlformats.org/officeDocument/2006/relationships" xmlns:p="http://schemas.openxmlformats.org/presentationml/2006/main">
   <p:cSld>
     <p:spTree>
@@ -36806,7 +36973,7 @@
 </p:sld>
 </file>
 
-<file path=ppt/slides/slide36.xml><?xml version="1.0" encoding="utf-8"?>
+<file path=ppt/slides/slide37.xml><?xml version="1.0" encoding="utf-8"?>
 <p:sld xmlns:a="http://schemas.openxmlformats.org/drawingml/2006/main" xmlns:r="http://schemas.openxmlformats.org/officeDocument/2006/relationships" xmlns:p="http://schemas.openxmlformats.org/presentationml/2006/main">
   <p:cSld>
     <p:spTree>
@@ -36930,7 +37097,7 @@
 </p:sld>
 </file>
 
-<file path=ppt/slides/slide37.xml><?xml version="1.0" encoding="utf-8"?>
+<file path=ppt/slides/slide38.xml><?xml version="1.0" encoding="utf-8"?>
 <p:sld xmlns:a="http://schemas.openxmlformats.org/drawingml/2006/main" xmlns:r="http://schemas.openxmlformats.org/officeDocument/2006/relationships" xmlns:p="http://schemas.openxmlformats.org/presentationml/2006/main">
   <p:cSld>
     <p:spTree>
@@ -37483,7 +37650,7 @@
 </p:sld>
 </file>
 
-<file path=ppt/slides/slide38.xml><?xml version="1.0" encoding="utf-8"?>
+<file path=ppt/slides/slide39.xml><?xml version="1.0" encoding="utf-8"?>
 <p:sld xmlns:a="http://schemas.openxmlformats.org/drawingml/2006/main" xmlns:r="http://schemas.openxmlformats.org/officeDocument/2006/relationships" xmlns:p="http://schemas.openxmlformats.org/presentationml/2006/main">
   <p:cSld>
     <p:spTree>
@@ -39310,445 +39477,6 @@
 </p:sld>
 </file>
 
-<file path=ppt/slides/slide39.xml><?xml version="1.0" encoding="utf-8"?>
-<p:sld xmlns:a="http://schemas.openxmlformats.org/drawingml/2006/main" xmlns:r="http://schemas.openxmlformats.org/officeDocument/2006/relationships" xmlns:p="http://schemas.openxmlformats.org/presentationml/2006/main">
-  <p:cSld>
-    <p:spTree>
-      <p:nvGrpSpPr>
-        <p:cNvPr id="1" name=""/>
-        <p:cNvGrpSpPr/>
-        <p:nvPr/>
-      </p:nvGrpSpPr>
-      <p:grpSpPr>
-        <a:xfrm>
-          <a:off x="0" y="0"/>
-          <a:ext cx="0" cy="0"/>
-          <a:chOff x="0" y="0"/>
-          <a:chExt cx="0" cy="0"/>
-        </a:xfrm>
-      </p:grpSpPr>
-      <p:sp>
-        <p:nvSpPr>
-          <p:cNvPr id="2" name="Title 1">
-            <a:extLst>
-              <a:ext uri="{FF2B5EF4-FFF2-40B4-BE49-F238E27FC236}">
-                <a16:creationId xmlns:a16="http://schemas.microsoft.com/office/drawing/2014/main" id="{37B8667A-08EC-4278-DF66-77D8F84FE461}"/>
-              </a:ext>
-            </a:extLst>
-          </p:cNvPr>
-          <p:cNvSpPr>
-            <a:spLocks noGrp="1"/>
-          </p:cNvSpPr>
-          <p:nvPr>
-            <p:ph type="title"/>
-          </p:nvPr>
-        </p:nvSpPr>
-        <p:spPr/>
-        <p:txBody>
-          <a:bodyPr/>
-          <a:lstStyle/>
-          <a:p>
-            <a:r>
-              <a:rPr lang="en-US" dirty="0"/>
-              <a:t>Important Considerations</a:t>
-            </a:r>
-          </a:p>
-        </p:txBody>
-      </p:sp>
-      <p:sp>
-        <p:nvSpPr>
-          <p:cNvPr id="3" name="Content Placeholder 2">
-            <a:extLst>
-              <a:ext uri="{FF2B5EF4-FFF2-40B4-BE49-F238E27FC236}">
-                <a16:creationId xmlns:a16="http://schemas.microsoft.com/office/drawing/2014/main" id="{86E671C2-4252-3BFB-4DDA-C81E75EF224B}"/>
-              </a:ext>
-            </a:extLst>
-          </p:cNvPr>
-          <p:cNvSpPr>
-            <a:spLocks noGrp="1"/>
-          </p:cNvSpPr>
-          <p:nvPr>
-            <p:ph idx="1"/>
-          </p:nvPr>
-        </p:nvSpPr>
-        <p:spPr/>
-        <p:txBody>
-          <a:bodyPr>
-            <a:normAutofit fontScale="92500" lnSpcReduction="20000"/>
-          </a:bodyPr>
-          <a:lstStyle/>
-          <a:p>
-            <a:r>
-              <a:rPr lang="en-US" dirty="0"/>
-              <a:t>Designing a good evaluation heuristic can be difficult.</a:t>
-            </a:r>
-          </a:p>
-          <a:p>
-            <a:pPr lvl="1"/>
-            <a:r>
-              <a:rPr lang="en-US" dirty="0"/>
-              <a:t>We need </a:t>
-            </a:r>
-            <a:r>
-              <a:rPr lang="en-US" b="1" dirty="0"/>
-              <a:t>expert knowledge</a:t>
-            </a:r>
-            <a:r>
-              <a:rPr lang="en-US" dirty="0"/>
-              <a:t>.</a:t>
-            </a:r>
-          </a:p>
-          <a:p>
-            <a:pPr lvl="1"/>
-            <a:r>
-              <a:rPr lang="en-US" b="1" dirty="0"/>
-              <a:t>Experimentation</a:t>
-            </a:r>
-            <a:r>
-              <a:rPr lang="en-US" dirty="0"/>
-              <a:t> may be needed to choose the best heuristic.</a:t>
-            </a:r>
-          </a:p>
-          <a:p>
-            <a:endParaRPr lang="en-US" dirty="0"/>
-          </a:p>
-          <a:p>
-            <a:r>
-              <a:rPr lang="en-US" dirty="0"/>
-              <a:t>The cutoff depth affects the runtime and the quality of the found move.</a:t>
-            </a:r>
-          </a:p>
-          <a:p>
-            <a:pPr lvl="1"/>
-            <a:r>
-              <a:rPr lang="en-US" b="1" dirty="0"/>
-              <a:t>Low cutoff</a:t>
-            </a:r>
-            <a:r>
-              <a:rPr lang="en-US" dirty="0"/>
-              <a:t>: Fast, but the approximation of the evaluation function will be poor.</a:t>
-            </a:r>
-          </a:p>
-          <a:p>
-            <a:pPr lvl="1"/>
-            <a:r>
-              <a:rPr lang="en-US" b="1" dirty="0"/>
-              <a:t>Intermediate cutoff</a:t>
-            </a:r>
-            <a:r>
-              <a:rPr lang="en-US" dirty="0"/>
-              <a:t>: Slower because a larger tree needs to be searched, but the evaluation function will work better.</a:t>
-            </a:r>
-          </a:p>
-          <a:p>
-            <a:pPr lvl="1"/>
-            <a:r>
-              <a:rPr lang="en-US" b="1" dirty="0"/>
-              <a:t>Infinity</a:t>
-            </a:r>
-            <a:r>
-              <a:rPr lang="en-US" dirty="0"/>
-              <a:t> (= no cutoff): The algorithm reverts to complete minimax search and optimal decisions. </a:t>
-            </a:r>
-          </a:p>
-        </p:txBody>
-      </p:sp>
-    </p:spTree>
-    <p:extLst>
-      <p:ext uri="{BB962C8B-B14F-4D97-AF65-F5344CB8AC3E}">
-        <p14:creationId xmlns:p14="http://schemas.microsoft.com/office/powerpoint/2010/main" val="3592089715"/>
-      </p:ext>
-    </p:extLst>
-  </p:cSld>
-  <p:clrMapOvr>
-    <a:masterClrMapping/>
-  </p:clrMapOvr>
-  <p:timing>
-    <p:tnLst>
-      <p:par>
-        <p:cTn id="1" dur="indefinite" restart="never" nodeType="tmRoot">
-          <p:childTnLst>
-            <p:seq concurrent="1" nextAc="seek">
-              <p:cTn id="2" dur="indefinite" nodeType="mainSeq">
-                <p:childTnLst>
-                  <p:par>
-                    <p:cTn id="3" fill="hold">
-                      <p:stCondLst>
-                        <p:cond delay="indefinite"/>
-                      </p:stCondLst>
-                      <p:childTnLst>
-                        <p:par>
-                          <p:cTn id="4" fill="hold">
-                            <p:stCondLst>
-                              <p:cond delay="0"/>
-                            </p:stCondLst>
-                            <p:childTnLst>
-                              <p:par>
-                                <p:cTn id="5" presetID="1" presetClass="entr" presetSubtype="0" fill="hold" nodeType="clickEffect">
-                                  <p:stCondLst>
-                                    <p:cond delay="0"/>
-                                  </p:stCondLst>
-                                  <p:childTnLst>
-                                    <p:set>
-                                      <p:cBhvr>
-                                        <p:cTn id="6" dur="1" fill="hold">
-                                          <p:stCondLst>
-                                            <p:cond delay="0"/>
-                                          </p:stCondLst>
-                                        </p:cTn>
-                                        <p:tgtEl>
-                                          <p:spTgt spid="3">
-                                            <p:txEl>
-                                              <p:pRg st="0" end="0"/>
-                                            </p:txEl>
-                                          </p:spTgt>
-                                        </p:tgtEl>
-                                        <p:attrNameLst>
-                                          <p:attrName>style.visibility</p:attrName>
-                                        </p:attrNameLst>
-                                      </p:cBhvr>
-                                      <p:to>
-                                        <p:strVal val="visible"/>
-                                      </p:to>
-                                    </p:set>
-                                  </p:childTnLst>
-                                </p:cTn>
-                              </p:par>
-                              <p:par>
-                                <p:cTn id="7" presetID="1" presetClass="entr" presetSubtype="0" fill="hold" nodeType="withEffect">
-                                  <p:stCondLst>
-                                    <p:cond delay="0"/>
-                                  </p:stCondLst>
-                                  <p:childTnLst>
-                                    <p:set>
-                                      <p:cBhvr>
-                                        <p:cTn id="8" dur="1" fill="hold">
-                                          <p:stCondLst>
-                                            <p:cond delay="0"/>
-                                          </p:stCondLst>
-                                        </p:cTn>
-                                        <p:tgtEl>
-                                          <p:spTgt spid="3">
-                                            <p:txEl>
-                                              <p:pRg st="1" end="1"/>
-                                            </p:txEl>
-                                          </p:spTgt>
-                                        </p:tgtEl>
-                                        <p:attrNameLst>
-                                          <p:attrName>style.visibility</p:attrName>
-                                        </p:attrNameLst>
-                                      </p:cBhvr>
-                                      <p:to>
-                                        <p:strVal val="visible"/>
-                                      </p:to>
-                                    </p:set>
-                                  </p:childTnLst>
-                                </p:cTn>
-                              </p:par>
-                              <p:par>
-                                <p:cTn id="9" presetID="1" presetClass="entr" presetSubtype="0" fill="hold" nodeType="withEffect">
-                                  <p:stCondLst>
-                                    <p:cond delay="0"/>
-                                  </p:stCondLst>
-                                  <p:childTnLst>
-                                    <p:set>
-                                      <p:cBhvr>
-                                        <p:cTn id="10" dur="1" fill="hold">
-                                          <p:stCondLst>
-                                            <p:cond delay="0"/>
-                                          </p:stCondLst>
-                                        </p:cTn>
-                                        <p:tgtEl>
-                                          <p:spTgt spid="3">
-                                            <p:txEl>
-                                              <p:pRg st="2" end="2"/>
-                                            </p:txEl>
-                                          </p:spTgt>
-                                        </p:tgtEl>
-                                        <p:attrNameLst>
-                                          <p:attrName>style.visibility</p:attrName>
-                                        </p:attrNameLst>
-                                      </p:cBhvr>
-                                      <p:to>
-                                        <p:strVal val="visible"/>
-                                      </p:to>
-                                    </p:set>
-                                  </p:childTnLst>
-                                </p:cTn>
-                              </p:par>
-                            </p:childTnLst>
-                          </p:cTn>
-                        </p:par>
-                      </p:childTnLst>
-                    </p:cTn>
-                  </p:par>
-                  <p:par>
-                    <p:cTn id="11" fill="hold">
-                      <p:stCondLst>
-                        <p:cond delay="indefinite"/>
-                      </p:stCondLst>
-                      <p:childTnLst>
-                        <p:par>
-                          <p:cTn id="12" fill="hold">
-                            <p:stCondLst>
-                              <p:cond delay="0"/>
-                            </p:stCondLst>
-                            <p:childTnLst>
-                              <p:par>
-                                <p:cTn id="13" presetID="1" presetClass="entr" presetSubtype="0" fill="hold" nodeType="clickEffect">
-                                  <p:stCondLst>
-                                    <p:cond delay="0"/>
-                                  </p:stCondLst>
-                                  <p:childTnLst>
-                                    <p:set>
-                                      <p:cBhvr>
-                                        <p:cTn id="14" dur="1" fill="hold">
-                                          <p:stCondLst>
-                                            <p:cond delay="0"/>
-                                          </p:stCondLst>
-                                        </p:cTn>
-                                        <p:tgtEl>
-                                          <p:spTgt spid="3">
-                                            <p:txEl>
-                                              <p:pRg st="4" end="4"/>
-                                            </p:txEl>
-                                          </p:spTgt>
-                                        </p:tgtEl>
-                                        <p:attrNameLst>
-                                          <p:attrName>style.visibility</p:attrName>
-                                        </p:attrNameLst>
-                                      </p:cBhvr>
-                                      <p:to>
-                                        <p:strVal val="visible"/>
-                                      </p:to>
-                                    </p:set>
-                                  </p:childTnLst>
-                                </p:cTn>
-                              </p:par>
-                              <p:par>
-                                <p:cTn id="15" presetID="1" presetClass="entr" presetSubtype="0" fill="hold" nodeType="withEffect">
-                                  <p:stCondLst>
-                                    <p:cond delay="0"/>
-                                  </p:stCondLst>
-                                  <p:childTnLst>
-                                    <p:set>
-                                      <p:cBhvr>
-                                        <p:cTn id="16" dur="1" fill="hold">
-                                          <p:stCondLst>
-                                            <p:cond delay="0"/>
-                                          </p:stCondLst>
-                                        </p:cTn>
-                                        <p:tgtEl>
-                                          <p:spTgt spid="3">
-                                            <p:txEl>
-                                              <p:pRg st="5" end="5"/>
-                                            </p:txEl>
-                                          </p:spTgt>
-                                        </p:tgtEl>
-                                        <p:attrNameLst>
-                                          <p:attrName>style.visibility</p:attrName>
-                                        </p:attrNameLst>
-                                      </p:cBhvr>
-                                      <p:to>
-                                        <p:strVal val="visible"/>
-                                      </p:to>
-                                    </p:set>
-                                  </p:childTnLst>
-                                </p:cTn>
-                              </p:par>
-                              <p:par>
-                                <p:cTn id="17" presetID="1" presetClass="entr" presetSubtype="0" fill="hold" nodeType="withEffect">
-                                  <p:stCondLst>
-                                    <p:cond delay="0"/>
-                                  </p:stCondLst>
-                                  <p:childTnLst>
-                                    <p:set>
-                                      <p:cBhvr>
-                                        <p:cTn id="18" dur="1" fill="hold">
-                                          <p:stCondLst>
-                                            <p:cond delay="0"/>
-                                          </p:stCondLst>
-                                        </p:cTn>
-                                        <p:tgtEl>
-                                          <p:spTgt spid="3">
-                                            <p:txEl>
-                                              <p:pRg st="6" end="6"/>
-                                            </p:txEl>
-                                          </p:spTgt>
-                                        </p:tgtEl>
-                                        <p:attrNameLst>
-                                          <p:attrName>style.visibility</p:attrName>
-                                        </p:attrNameLst>
-                                      </p:cBhvr>
-                                      <p:to>
-                                        <p:strVal val="visible"/>
-                                      </p:to>
-                                    </p:set>
-                                  </p:childTnLst>
-                                </p:cTn>
-                              </p:par>
-                              <p:par>
-                                <p:cTn id="19" presetID="1" presetClass="entr" presetSubtype="0" fill="hold" nodeType="withEffect">
-                                  <p:stCondLst>
-                                    <p:cond delay="0"/>
-                                  </p:stCondLst>
-                                  <p:childTnLst>
-                                    <p:set>
-                                      <p:cBhvr>
-                                        <p:cTn id="20" dur="1" fill="hold">
-                                          <p:stCondLst>
-                                            <p:cond delay="0"/>
-                                          </p:stCondLst>
-                                        </p:cTn>
-                                        <p:tgtEl>
-                                          <p:spTgt spid="3">
-                                            <p:txEl>
-                                              <p:pRg st="7" end="7"/>
-                                            </p:txEl>
-                                          </p:spTgt>
-                                        </p:tgtEl>
-                                        <p:attrNameLst>
-                                          <p:attrName>style.visibility</p:attrName>
-                                        </p:attrNameLst>
-                                      </p:cBhvr>
-                                      <p:to>
-                                        <p:strVal val="visible"/>
-                                      </p:to>
-                                    </p:set>
-                                  </p:childTnLst>
-                                </p:cTn>
-                              </p:par>
-                            </p:childTnLst>
-                          </p:cTn>
-                        </p:par>
-                      </p:childTnLst>
-                    </p:cTn>
-                  </p:par>
-                </p:childTnLst>
-              </p:cTn>
-              <p:prevCondLst>
-                <p:cond evt="onPrev" delay="0">
-                  <p:tgtEl>
-                    <p:sldTgt/>
-                  </p:tgtEl>
-                </p:cond>
-              </p:prevCondLst>
-              <p:nextCondLst>
-                <p:cond evt="onNext" delay="0">
-                  <p:tgtEl>
-                    <p:sldTgt/>
-                  </p:tgtEl>
-                </p:cond>
-              </p:nextCondLst>
-            </p:seq>
-          </p:childTnLst>
-        </p:cTn>
-      </p:par>
-    </p:tnLst>
-  </p:timing>
-</p:sld>
-</file>
-
 <file path=ppt/slides/slide4.xml><?xml version="1.0" encoding="utf-8"?>
 <p:sld xmlns:a="http://schemas.openxmlformats.org/drawingml/2006/main" xmlns:r="http://schemas.openxmlformats.org/officeDocument/2006/relationships" xmlns:p="http://schemas.openxmlformats.org/presentationml/2006/main">
   <p:cSld>
@@ -40231,6 +39959,445 @@
 <file path=ppt/slides/slide40.xml><?xml version="1.0" encoding="utf-8"?>
 <p:sld xmlns:a="http://schemas.openxmlformats.org/drawingml/2006/main" xmlns:r="http://schemas.openxmlformats.org/officeDocument/2006/relationships" xmlns:p="http://schemas.openxmlformats.org/presentationml/2006/main">
   <p:cSld>
+    <p:spTree>
+      <p:nvGrpSpPr>
+        <p:cNvPr id="1" name=""/>
+        <p:cNvGrpSpPr/>
+        <p:nvPr/>
+      </p:nvGrpSpPr>
+      <p:grpSpPr>
+        <a:xfrm>
+          <a:off x="0" y="0"/>
+          <a:ext cx="0" cy="0"/>
+          <a:chOff x="0" y="0"/>
+          <a:chExt cx="0" cy="0"/>
+        </a:xfrm>
+      </p:grpSpPr>
+      <p:sp>
+        <p:nvSpPr>
+          <p:cNvPr id="2" name="Title 1">
+            <a:extLst>
+              <a:ext uri="{FF2B5EF4-FFF2-40B4-BE49-F238E27FC236}">
+                <a16:creationId xmlns:a16="http://schemas.microsoft.com/office/drawing/2014/main" id="{37B8667A-08EC-4278-DF66-77D8F84FE461}"/>
+              </a:ext>
+            </a:extLst>
+          </p:cNvPr>
+          <p:cNvSpPr>
+            <a:spLocks noGrp="1"/>
+          </p:cNvSpPr>
+          <p:nvPr>
+            <p:ph type="title"/>
+          </p:nvPr>
+        </p:nvSpPr>
+        <p:spPr/>
+        <p:txBody>
+          <a:bodyPr/>
+          <a:lstStyle/>
+          <a:p>
+            <a:r>
+              <a:rPr lang="en-US" dirty="0"/>
+              <a:t>Important Considerations</a:t>
+            </a:r>
+          </a:p>
+        </p:txBody>
+      </p:sp>
+      <p:sp>
+        <p:nvSpPr>
+          <p:cNvPr id="3" name="Content Placeholder 2">
+            <a:extLst>
+              <a:ext uri="{FF2B5EF4-FFF2-40B4-BE49-F238E27FC236}">
+                <a16:creationId xmlns:a16="http://schemas.microsoft.com/office/drawing/2014/main" id="{86E671C2-4252-3BFB-4DDA-C81E75EF224B}"/>
+              </a:ext>
+            </a:extLst>
+          </p:cNvPr>
+          <p:cNvSpPr>
+            <a:spLocks noGrp="1"/>
+          </p:cNvSpPr>
+          <p:nvPr>
+            <p:ph idx="1"/>
+          </p:nvPr>
+        </p:nvSpPr>
+        <p:spPr/>
+        <p:txBody>
+          <a:bodyPr>
+            <a:normAutofit fontScale="92500" lnSpcReduction="20000"/>
+          </a:bodyPr>
+          <a:lstStyle/>
+          <a:p>
+            <a:r>
+              <a:rPr lang="en-US" dirty="0"/>
+              <a:t>Designing a good evaluation heuristic can be difficult.</a:t>
+            </a:r>
+          </a:p>
+          <a:p>
+            <a:pPr lvl="1"/>
+            <a:r>
+              <a:rPr lang="en-US" dirty="0"/>
+              <a:t>We need </a:t>
+            </a:r>
+            <a:r>
+              <a:rPr lang="en-US" b="1" dirty="0"/>
+              <a:t>expert knowledge</a:t>
+            </a:r>
+            <a:r>
+              <a:rPr lang="en-US" dirty="0"/>
+              <a:t>.</a:t>
+            </a:r>
+          </a:p>
+          <a:p>
+            <a:pPr lvl="1"/>
+            <a:r>
+              <a:rPr lang="en-US" b="1" dirty="0"/>
+              <a:t>Experimentation</a:t>
+            </a:r>
+            <a:r>
+              <a:rPr lang="en-US" dirty="0"/>
+              <a:t> may be needed to choose the best heuristic.</a:t>
+            </a:r>
+          </a:p>
+          <a:p>
+            <a:endParaRPr lang="en-US" dirty="0"/>
+          </a:p>
+          <a:p>
+            <a:r>
+              <a:rPr lang="en-US" dirty="0"/>
+              <a:t>The cutoff depth affects the runtime and the quality of the found move.</a:t>
+            </a:r>
+          </a:p>
+          <a:p>
+            <a:pPr lvl="1"/>
+            <a:r>
+              <a:rPr lang="en-US" b="1" dirty="0"/>
+              <a:t>Low cutoff</a:t>
+            </a:r>
+            <a:r>
+              <a:rPr lang="en-US" dirty="0"/>
+              <a:t>: Fast, but the approximation of the evaluation function will be poor.</a:t>
+            </a:r>
+          </a:p>
+          <a:p>
+            <a:pPr lvl="1"/>
+            <a:r>
+              <a:rPr lang="en-US" b="1" dirty="0"/>
+              <a:t>Intermediate cutoff</a:t>
+            </a:r>
+            <a:r>
+              <a:rPr lang="en-US" dirty="0"/>
+              <a:t>: Slower because a larger tree needs to be searched, but the evaluation function will work better.</a:t>
+            </a:r>
+          </a:p>
+          <a:p>
+            <a:pPr lvl="1"/>
+            <a:r>
+              <a:rPr lang="en-US" b="1" dirty="0"/>
+              <a:t>Infinity</a:t>
+            </a:r>
+            <a:r>
+              <a:rPr lang="en-US" dirty="0"/>
+              <a:t> (= no cutoff): The algorithm reverts to complete minimax search and optimal decisions. </a:t>
+            </a:r>
+          </a:p>
+        </p:txBody>
+      </p:sp>
+    </p:spTree>
+    <p:extLst>
+      <p:ext uri="{BB962C8B-B14F-4D97-AF65-F5344CB8AC3E}">
+        <p14:creationId xmlns:p14="http://schemas.microsoft.com/office/powerpoint/2010/main" val="3592089715"/>
+      </p:ext>
+    </p:extLst>
+  </p:cSld>
+  <p:clrMapOvr>
+    <a:masterClrMapping/>
+  </p:clrMapOvr>
+  <p:timing>
+    <p:tnLst>
+      <p:par>
+        <p:cTn id="1" dur="indefinite" restart="never" nodeType="tmRoot">
+          <p:childTnLst>
+            <p:seq concurrent="1" nextAc="seek">
+              <p:cTn id="2" dur="indefinite" nodeType="mainSeq">
+                <p:childTnLst>
+                  <p:par>
+                    <p:cTn id="3" fill="hold">
+                      <p:stCondLst>
+                        <p:cond delay="indefinite"/>
+                      </p:stCondLst>
+                      <p:childTnLst>
+                        <p:par>
+                          <p:cTn id="4" fill="hold">
+                            <p:stCondLst>
+                              <p:cond delay="0"/>
+                            </p:stCondLst>
+                            <p:childTnLst>
+                              <p:par>
+                                <p:cTn id="5" presetID="1" presetClass="entr" presetSubtype="0" fill="hold" nodeType="clickEffect">
+                                  <p:stCondLst>
+                                    <p:cond delay="0"/>
+                                  </p:stCondLst>
+                                  <p:childTnLst>
+                                    <p:set>
+                                      <p:cBhvr>
+                                        <p:cTn id="6" dur="1" fill="hold">
+                                          <p:stCondLst>
+                                            <p:cond delay="0"/>
+                                          </p:stCondLst>
+                                        </p:cTn>
+                                        <p:tgtEl>
+                                          <p:spTgt spid="3">
+                                            <p:txEl>
+                                              <p:pRg st="0" end="0"/>
+                                            </p:txEl>
+                                          </p:spTgt>
+                                        </p:tgtEl>
+                                        <p:attrNameLst>
+                                          <p:attrName>style.visibility</p:attrName>
+                                        </p:attrNameLst>
+                                      </p:cBhvr>
+                                      <p:to>
+                                        <p:strVal val="visible"/>
+                                      </p:to>
+                                    </p:set>
+                                  </p:childTnLst>
+                                </p:cTn>
+                              </p:par>
+                              <p:par>
+                                <p:cTn id="7" presetID="1" presetClass="entr" presetSubtype="0" fill="hold" nodeType="withEffect">
+                                  <p:stCondLst>
+                                    <p:cond delay="0"/>
+                                  </p:stCondLst>
+                                  <p:childTnLst>
+                                    <p:set>
+                                      <p:cBhvr>
+                                        <p:cTn id="8" dur="1" fill="hold">
+                                          <p:stCondLst>
+                                            <p:cond delay="0"/>
+                                          </p:stCondLst>
+                                        </p:cTn>
+                                        <p:tgtEl>
+                                          <p:spTgt spid="3">
+                                            <p:txEl>
+                                              <p:pRg st="1" end="1"/>
+                                            </p:txEl>
+                                          </p:spTgt>
+                                        </p:tgtEl>
+                                        <p:attrNameLst>
+                                          <p:attrName>style.visibility</p:attrName>
+                                        </p:attrNameLst>
+                                      </p:cBhvr>
+                                      <p:to>
+                                        <p:strVal val="visible"/>
+                                      </p:to>
+                                    </p:set>
+                                  </p:childTnLst>
+                                </p:cTn>
+                              </p:par>
+                              <p:par>
+                                <p:cTn id="9" presetID="1" presetClass="entr" presetSubtype="0" fill="hold" nodeType="withEffect">
+                                  <p:stCondLst>
+                                    <p:cond delay="0"/>
+                                  </p:stCondLst>
+                                  <p:childTnLst>
+                                    <p:set>
+                                      <p:cBhvr>
+                                        <p:cTn id="10" dur="1" fill="hold">
+                                          <p:stCondLst>
+                                            <p:cond delay="0"/>
+                                          </p:stCondLst>
+                                        </p:cTn>
+                                        <p:tgtEl>
+                                          <p:spTgt spid="3">
+                                            <p:txEl>
+                                              <p:pRg st="2" end="2"/>
+                                            </p:txEl>
+                                          </p:spTgt>
+                                        </p:tgtEl>
+                                        <p:attrNameLst>
+                                          <p:attrName>style.visibility</p:attrName>
+                                        </p:attrNameLst>
+                                      </p:cBhvr>
+                                      <p:to>
+                                        <p:strVal val="visible"/>
+                                      </p:to>
+                                    </p:set>
+                                  </p:childTnLst>
+                                </p:cTn>
+                              </p:par>
+                            </p:childTnLst>
+                          </p:cTn>
+                        </p:par>
+                      </p:childTnLst>
+                    </p:cTn>
+                  </p:par>
+                  <p:par>
+                    <p:cTn id="11" fill="hold">
+                      <p:stCondLst>
+                        <p:cond delay="indefinite"/>
+                      </p:stCondLst>
+                      <p:childTnLst>
+                        <p:par>
+                          <p:cTn id="12" fill="hold">
+                            <p:stCondLst>
+                              <p:cond delay="0"/>
+                            </p:stCondLst>
+                            <p:childTnLst>
+                              <p:par>
+                                <p:cTn id="13" presetID="1" presetClass="entr" presetSubtype="0" fill="hold" nodeType="clickEffect">
+                                  <p:stCondLst>
+                                    <p:cond delay="0"/>
+                                  </p:stCondLst>
+                                  <p:childTnLst>
+                                    <p:set>
+                                      <p:cBhvr>
+                                        <p:cTn id="14" dur="1" fill="hold">
+                                          <p:stCondLst>
+                                            <p:cond delay="0"/>
+                                          </p:stCondLst>
+                                        </p:cTn>
+                                        <p:tgtEl>
+                                          <p:spTgt spid="3">
+                                            <p:txEl>
+                                              <p:pRg st="4" end="4"/>
+                                            </p:txEl>
+                                          </p:spTgt>
+                                        </p:tgtEl>
+                                        <p:attrNameLst>
+                                          <p:attrName>style.visibility</p:attrName>
+                                        </p:attrNameLst>
+                                      </p:cBhvr>
+                                      <p:to>
+                                        <p:strVal val="visible"/>
+                                      </p:to>
+                                    </p:set>
+                                  </p:childTnLst>
+                                </p:cTn>
+                              </p:par>
+                              <p:par>
+                                <p:cTn id="15" presetID="1" presetClass="entr" presetSubtype="0" fill="hold" nodeType="withEffect">
+                                  <p:stCondLst>
+                                    <p:cond delay="0"/>
+                                  </p:stCondLst>
+                                  <p:childTnLst>
+                                    <p:set>
+                                      <p:cBhvr>
+                                        <p:cTn id="16" dur="1" fill="hold">
+                                          <p:stCondLst>
+                                            <p:cond delay="0"/>
+                                          </p:stCondLst>
+                                        </p:cTn>
+                                        <p:tgtEl>
+                                          <p:spTgt spid="3">
+                                            <p:txEl>
+                                              <p:pRg st="5" end="5"/>
+                                            </p:txEl>
+                                          </p:spTgt>
+                                        </p:tgtEl>
+                                        <p:attrNameLst>
+                                          <p:attrName>style.visibility</p:attrName>
+                                        </p:attrNameLst>
+                                      </p:cBhvr>
+                                      <p:to>
+                                        <p:strVal val="visible"/>
+                                      </p:to>
+                                    </p:set>
+                                  </p:childTnLst>
+                                </p:cTn>
+                              </p:par>
+                              <p:par>
+                                <p:cTn id="17" presetID="1" presetClass="entr" presetSubtype="0" fill="hold" nodeType="withEffect">
+                                  <p:stCondLst>
+                                    <p:cond delay="0"/>
+                                  </p:stCondLst>
+                                  <p:childTnLst>
+                                    <p:set>
+                                      <p:cBhvr>
+                                        <p:cTn id="18" dur="1" fill="hold">
+                                          <p:stCondLst>
+                                            <p:cond delay="0"/>
+                                          </p:stCondLst>
+                                        </p:cTn>
+                                        <p:tgtEl>
+                                          <p:spTgt spid="3">
+                                            <p:txEl>
+                                              <p:pRg st="6" end="6"/>
+                                            </p:txEl>
+                                          </p:spTgt>
+                                        </p:tgtEl>
+                                        <p:attrNameLst>
+                                          <p:attrName>style.visibility</p:attrName>
+                                        </p:attrNameLst>
+                                      </p:cBhvr>
+                                      <p:to>
+                                        <p:strVal val="visible"/>
+                                      </p:to>
+                                    </p:set>
+                                  </p:childTnLst>
+                                </p:cTn>
+                              </p:par>
+                              <p:par>
+                                <p:cTn id="19" presetID="1" presetClass="entr" presetSubtype="0" fill="hold" nodeType="withEffect">
+                                  <p:stCondLst>
+                                    <p:cond delay="0"/>
+                                  </p:stCondLst>
+                                  <p:childTnLst>
+                                    <p:set>
+                                      <p:cBhvr>
+                                        <p:cTn id="20" dur="1" fill="hold">
+                                          <p:stCondLst>
+                                            <p:cond delay="0"/>
+                                          </p:stCondLst>
+                                        </p:cTn>
+                                        <p:tgtEl>
+                                          <p:spTgt spid="3">
+                                            <p:txEl>
+                                              <p:pRg st="7" end="7"/>
+                                            </p:txEl>
+                                          </p:spTgt>
+                                        </p:tgtEl>
+                                        <p:attrNameLst>
+                                          <p:attrName>style.visibility</p:attrName>
+                                        </p:attrNameLst>
+                                      </p:cBhvr>
+                                      <p:to>
+                                        <p:strVal val="visible"/>
+                                      </p:to>
+                                    </p:set>
+                                  </p:childTnLst>
+                                </p:cTn>
+                              </p:par>
+                            </p:childTnLst>
+                          </p:cTn>
+                        </p:par>
+                      </p:childTnLst>
+                    </p:cTn>
+                  </p:par>
+                </p:childTnLst>
+              </p:cTn>
+              <p:prevCondLst>
+                <p:cond evt="onPrev" delay="0">
+                  <p:tgtEl>
+                    <p:sldTgt/>
+                  </p:tgtEl>
+                </p:cond>
+              </p:prevCondLst>
+              <p:nextCondLst>
+                <p:cond evt="onNext" delay="0">
+                  <p:tgtEl>
+                    <p:sldTgt/>
+                  </p:tgtEl>
+                </p:cond>
+              </p:nextCondLst>
+            </p:seq>
+          </p:childTnLst>
+        </p:cTn>
+      </p:par>
+    </p:tnLst>
+  </p:timing>
+</p:sld>
+</file>
+
+<file path=ppt/slides/slide41.xml><?xml version="1.0" encoding="utf-8"?>
+<p:sld xmlns:a="http://schemas.openxmlformats.org/drawingml/2006/main" xmlns:r="http://schemas.openxmlformats.org/officeDocument/2006/relationships" xmlns:p="http://schemas.openxmlformats.org/presentationml/2006/main">
+  <p:cSld>
     <p:bg>
       <p:bgPr>
         <a:solidFill>
@@ -40474,7 +40641,7 @@
 </p:sld>
 </file>
 
-<file path=ppt/slides/slide41.xml><?xml version="1.0" encoding="utf-8"?>
+<file path=ppt/slides/slide42.xml><?xml version="1.0" encoding="utf-8"?>
 <p:sld xmlns:a="http://schemas.openxmlformats.org/drawingml/2006/main" xmlns:r="http://schemas.openxmlformats.org/officeDocument/2006/relationships" xmlns:p="http://schemas.openxmlformats.org/presentationml/2006/main">
   <p:cSld>
     <p:spTree>
@@ -41107,7 +41274,7 @@
 </p:sld>
 </file>
 
-<file path=ppt/slides/slide42.xml><?xml version="1.0" encoding="utf-8"?>
+<file path=ppt/slides/slide43.xml><?xml version="1.0" encoding="utf-8"?>
 <p:sld xmlns:a="http://schemas.openxmlformats.org/drawingml/2006/main" xmlns:r="http://schemas.openxmlformats.org/officeDocument/2006/relationships" xmlns:p="http://schemas.openxmlformats.org/presentationml/2006/main">
   <p:cSld>
     <p:spTree>
@@ -42258,7 +42425,7 @@
 </p:sld>
 </file>
 
-<file path=ppt/slides/slide43.xml><?xml version="1.0" encoding="utf-8"?>
+<file path=ppt/slides/slide44.xml><?xml version="1.0" encoding="utf-8"?>
 <p:sld xmlns:a="http://schemas.openxmlformats.org/drawingml/2006/main" xmlns:r="http://schemas.openxmlformats.org/officeDocument/2006/relationships" xmlns:p="http://schemas.openxmlformats.org/presentationml/2006/main">
   <p:cSld>
     <p:spTree>
@@ -42441,7 +42608,7 @@
 </p:sld>
 </file>
 
-<file path=ppt/slides/slide44.xml><?xml version="1.0" encoding="utf-8"?>
+<file path=ppt/slides/slide45.xml><?xml version="1.0" encoding="utf-8"?>
 <p:sld xmlns:a="http://schemas.openxmlformats.org/drawingml/2006/main" xmlns:r="http://schemas.openxmlformats.org/officeDocument/2006/relationships" xmlns:p="http://schemas.openxmlformats.org/presentationml/2006/main">
   <p:cSld>
     <p:spTree>
@@ -42565,7 +42732,7 @@
 </p:sld>
 </file>
 
-<file path=ppt/slides/slide45.xml><?xml version="1.0" encoding="utf-8"?>
+<file path=ppt/slides/slide46.xml><?xml version="1.0" encoding="utf-8"?>
 <p:sld xmlns:a="http://schemas.openxmlformats.org/drawingml/2006/main" xmlns:r="http://schemas.openxmlformats.org/officeDocument/2006/relationships" xmlns:p="http://schemas.openxmlformats.org/presentationml/2006/main">
   <p:cSld>
     <p:spTree>
@@ -43023,7 +43190,7 @@
 </p:sld>
 </file>
 
-<file path=ppt/slides/slide46.xml><?xml version="1.0" encoding="utf-8"?>
+<file path=ppt/slides/slide47.xml><?xml version="1.0" encoding="utf-8"?>
 <p:sld xmlns:a="http://schemas.openxmlformats.org/drawingml/2006/main" xmlns:r="http://schemas.openxmlformats.org/officeDocument/2006/relationships" xmlns:p="http://schemas.openxmlformats.org/presentationml/2006/main">
   <p:cSld>
     <p:spTree>
@@ -44110,7 +44277,7 @@
 </p:sld>
 </file>
 
-<file path=ppt/slides/slide47.xml><?xml version="1.0" encoding="utf-8"?>
+<file path=ppt/slides/slide48.xml><?xml version="1.0" encoding="utf-8"?>
 <p:sld xmlns:a="http://schemas.openxmlformats.org/drawingml/2006/main" xmlns:r="http://schemas.openxmlformats.org/officeDocument/2006/relationships" xmlns:p="http://schemas.openxmlformats.org/presentationml/2006/main">
   <p:cSld>
     <p:spTree>
@@ -44242,7 +44409,7 @@
 </p:sld>
 </file>
 
-<file path=ppt/slides/slide48.xml><?xml version="1.0" encoding="utf-8"?>
+<file path=ppt/slides/slide49.xml><?xml version="1.0" encoding="utf-8"?>
 <p:sld xmlns:a="http://schemas.openxmlformats.org/drawingml/2006/main" xmlns:r="http://schemas.openxmlformats.org/officeDocument/2006/relationships" xmlns:p="http://schemas.openxmlformats.org/presentationml/2006/main">
   <p:cSld>
     <p:spTree>
@@ -44564,7 +44731,509 @@
 </p:sld>
 </file>
 
-<file path=ppt/slides/slide49.xml><?xml version="1.0" encoding="utf-8"?>
+<file path=ppt/slides/slide5.xml><?xml version="1.0" encoding="utf-8"?>
+<p:sld xmlns:a="http://schemas.openxmlformats.org/drawingml/2006/main" xmlns:r="http://schemas.openxmlformats.org/officeDocument/2006/relationships" xmlns:p="http://schemas.openxmlformats.org/presentationml/2006/main">
+  <p:cSld>
+    <p:spTree>
+      <p:nvGrpSpPr>
+        <p:cNvPr id="1" name=""/>
+        <p:cNvGrpSpPr/>
+        <p:nvPr/>
+      </p:nvGrpSpPr>
+      <p:grpSpPr>
+        <a:xfrm>
+          <a:off x="0" y="0"/>
+          <a:ext cx="0" cy="0"/>
+          <a:chOff x="0" y="0"/>
+          <a:chExt cx="0" cy="0"/>
+        </a:xfrm>
+      </p:grpSpPr>
+      <p:sp>
+        <p:nvSpPr>
+          <p:cNvPr id="2" name="Title 1">
+            <a:extLst>
+              <a:ext uri="{FF2B5EF4-FFF2-40B4-BE49-F238E27FC236}">
+                <a16:creationId xmlns:a16="http://schemas.microsoft.com/office/drawing/2014/main" id="{F0EB8DA0-F19D-42E7-B106-99DA6BC8B3C0}"/>
+              </a:ext>
+            </a:extLst>
+          </p:cNvPr>
+          <p:cNvSpPr>
+            <a:spLocks noGrp="1"/>
+          </p:cNvSpPr>
+          <p:nvPr>
+            <p:ph type="title"/>
+          </p:nvPr>
+        </p:nvSpPr>
+        <p:spPr/>
+        <p:txBody>
+          <a:bodyPr/>
+          <a:lstStyle/>
+          <a:p>
+            <a:r>
+              <a:rPr lang="en-US" dirty="0"/>
+              <a:t>Example: Tic-tac-toe</a:t>
+            </a:r>
+          </a:p>
+        </p:txBody>
+      </p:sp>
+      <mc:AlternateContent xmlns:mc="http://schemas.openxmlformats.org/markup-compatibility/2006" xmlns:a14="http://schemas.microsoft.com/office/drawing/2010/main">
+        <mc:Choice Requires="a14">
+          <p:sp>
+            <p:nvSpPr>
+              <p:cNvPr id="3" name="Content Placeholder 2">
+                <a:extLst>
+                  <a:ext uri="{FF2B5EF4-FFF2-40B4-BE49-F238E27FC236}">
+                    <a16:creationId xmlns:a16="http://schemas.microsoft.com/office/drawing/2014/main" id="{5EF77323-E4B1-4168-B791-DFDF7C7ADB94}"/>
+                  </a:ext>
+                </a:extLst>
+              </p:cNvPr>
+              <p:cNvSpPr>
+                <a:spLocks noGrp="1"/>
+              </p:cNvSpPr>
+              <p:nvPr>
+                <p:ph idx="1"/>
+              </p:nvPr>
+            </p:nvSpPr>
+            <p:spPr>
+              <a:xfrm>
+                <a:off x="628650" y="2362199"/>
+                <a:ext cx="7981950" cy="3814763"/>
+              </a:xfrm>
+            </p:spPr>
+            <p:txBody>
+              <a:bodyPr>
+                <a:normAutofit/>
+              </a:bodyPr>
+              <a:lstStyle/>
+              <a:p>
+                <a:pPr marL="0" indent="0">
+                  <a:buNone/>
+                </a:pPr>
+                <a14:m>
+                  <m:oMath xmlns:m="http://schemas.openxmlformats.org/officeDocument/2006/math">
+                    <m:sSub>
+                      <m:sSubPr>
+                        <m:ctrlPr>
+                          <a:rPr lang="en-US" sz="2400" i="1">
+                            <a:latin typeface="Cambria Math" panose="02040503050406030204" pitchFamily="18" charset="0"/>
+                          </a:rPr>
+                        </m:ctrlPr>
+                      </m:sSubPr>
+                      <m:e>
+                        <m:r>
+                          <a:rPr lang="en-US" sz="2400" i="1">
+                            <a:latin typeface="Cambria Math" panose="02040503050406030204" pitchFamily="18" charset="0"/>
+                          </a:rPr>
+                          <m:t>𝑠</m:t>
+                        </m:r>
+                      </m:e>
+                      <m:sub>
+                        <m:r>
+                          <a:rPr lang="en-US" sz="2400" i="1">
+                            <a:latin typeface="Cambria Math" panose="02040503050406030204" pitchFamily="18" charset="0"/>
+                          </a:rPr>
+                          <m:t>0</m:t>
+                        </m:r>
+                      </m:sub>
+                    </m:sSub>
+                  </m:oMath>
+                </a14:m>
+                <a:r>
+                  <a:rPr lang="en-US" sz="2400" dirty="0"/>
+                  <a:t> 			Empty board.</a:t>
+                </a:r>
+              </a:p>
+              <a:p>
+                <a:pPr marL="0" indent="0">
+                  <a:buNone/>
+                </a:pPr>
+                <a14:m>
+                  <m:oMath xmlns:m="http://schemas.openxmlformats.org/officeDocument/2006/math">
+                    <m:r>
+                      <a:rPr lang="en-US" sz="2400" i="1">
+                        <a:latin typeface="Cambria Math" panose="02040503050406030204" pitchFamily="18" charset="0"/>
+                      </a:rPr>
+                      <m:t>𝐴𝑐𝑡𝑖𝑜𝑛𝑠</m:t>
+                    </m:r>
+                    <m:r>
+                      <a:rPr lang="en-US" sz="2400" i="1">
+                        <a:latin typeface="Cambria Math" panose="02040503050406030204" pitchFamily="18" charset="0"/>
+                      </a:rPr>
+                      <m:t>(</m:t>
+                    </m:r>
+                    <m:r>
+                      <a:rPr lang="en-US" sz="2400" i="1">
+                        <a:latin typeface="Cambria Math" panose="02040503050406030204" pitchFamily="18" charset="0"/>
+                      </a:rPr>
+                      <m:t>𝑠</m:t>
+                    </m:r>
+                    <m:r>
+                      <a:rPr lang="en-US" sz="2400" i="1">
+                        <a:latin typeface="Cambria Math" panose="02040503050406030204" pitchFamily="18" charset="0"/>
+                      </a:rPr>
+                      <m:t>)</m:t>
+                    </m:r>
+                  </m:oMath>
+                </a14:m>
+                <a:r>
+                  <a:rPr lang="en-US" sz="2400" dirty="0"/>
+                  <a:t>		Play empty squares.</a:t>
+                </a:r>
+              </a:p>
+              <a:p>
+                <a:pPr marL="0" indent="0">
+                  <a:buNone/>
+                </a:pPr>
+                <a14:m>
+                  <m:oMath xmlns:m="http://schemas.openxmlformats.org/officeDocument/2006/math">
+                    <m:r>
+                      <a:rPr lang="en-US" sz="2400" i="1">
+                        <a:latin typeface="Cambria Math" panose="02040503050406030204" pitchFamily="18" charset="0"/>
+                      </a:rPr>
+                      <m:t>𝑅𝑒𝑠𝑢𝑙𝑡</m:t>
+                    </m:r>
+                    <m:r>
+                      <a:rPr lang="en-US" sz="2400" i="1">
+                        <a:latin typeface="Cambria Math" panose="02040503050406030204" pitchFamily="18" charset="0"/>
+                      </a:rPr>
+                      <m:t>(</m:t>
+                    </m:r>
+                    <m:r>
+                      <a:rPr lang="en-US" sz="2400" i="1">
+                        <a:latin typeface="Cambria Math" panose="02040503050406030204" pitchFamily="18" charset="0"/>
+                      </a:rPr>
+                      <m:t>𝑠</m:t>
+                    </m:r>
+                    <m:r>
+                      <a:rPr lang="en-US" sz="2400" i="1">
+                        <a:latin typeface="Cambria Math" panose="02040503050406030204" pitchFamily="18" charset="0"/>
+                      </a:rPr>
+                      <m:t>,</m:t>
+                    </m:r>
+                    <m:r>
+                      <a:rPr lang="en-US" sz="2400" i="1">
+                        <a:latin typeface="Cambria Math" panose="02040503050406030204" pitchFamily="18" charset="0"/>
+                      </a:rPr>
+                      <m:t>𝑎</m:t>
+                    </m:r>
+                    <m:r>
+                      <a:rPr lang="en-US" sz="2400" i="1">
+                        <a:latin typeface="Cambria Math" panose="02040503050406030204" pitchFamily="18" charset="0"/>
+                      </a:rPr>
+                      <m:t>)</m:t>
+                    </m:r>
+                  </m:oMath>
+                </a14:m>
+                <a:r>
+                  <a:rPr lang="en-US" sz="2400" dirty="0"/>
+                  <a:t>		Symbol (x/o) is placed on empty square.</a:t>
+                </a:r>
+              </a:p>
+              <a:p>
+                <a:pPr marL="0" indent="0">
+                  <a:buNone/>
+                </a:pPr>
+                <a14:m>
+                  <m:oMath xmlns:m="http://schemas.openxmlformats.org/officeDocument/2006/math">
+                    <m:r>
+                      <a:rPr lang="en-US" sz="2400" b="0" i="1" smtClean="0">
+                        <a:latin typeface="Cambria Math" panose="02040503050406030204" pitchFamily="18" charset="0"/>
+                      </a:rPr>
+                      <m:t>𝑇𝑒</m:t>
+                    </m:r>
+                    <m:r>
+                      <a:rPr lang="en-US" sz="2400" i="1">
+                        <a:latin typeface="Cambria Math" panose="02040503050406030204" pitchFamily="18" charset="0"/>
+                      </a:rPr>
+                      <m:t>𝑟𝑚𝑖𝑛𝑎𝑙</m:t>
+                    </m:r>
+                    <m:r>
+                      <a:rPr lang="en-US" sz="2400" i="1">
+                        <a:latin typeface="Cambria Math" panose="02040503050406030204" pitchFamily="18" charset="0"/>
+                      </a:rPr>
+                      <m:t>(</m:t>
+                    </m:r>
+                    <m:r>
+                      <a:rPr lang="en-US" sz="2400" i="1">
+                        <a:latin typeface="Cambria Math" panose="02040503050406030204" pitchFamily="18" charset="0"/>
+                      </a:rPr>
+                      <m:t>𝑠</m:t>
+                    </m:r>
+                    <m:r>
+                      <a:rPr lang="en-US" sz="2400" i="1">
+                        <a:latin typeface="Cambria Math" panose="02040503050406030204" pitchFamily="18" charset="0"/>
+                      </a:rPr>
+                      <m:t>)</m:t>
+                    </m:r>
+                  </m:oMath>
+                </a14:m>
+                <a:r>
+                  <a:rPr lang="en-US" sz="2400" dirty="0"/>
+                  <a:t>	 	Did a player win or is the game a draw?</a:t>
+                </a:r>
+              </a:p>
+              <a:p>
+                <a:pPr marL="0" indent="0">
+                  <a:buNone/>
+                </a:pPr>
+                <a14:m>
+                  <m:oMath xmlns:m="http://schemas.openxmlformats.org/officeDocument/2006/math">
+                    <m:r>
+                      <a:rPr lang="en-US" sz="2400" i="1">
+                        <a:latin typeface="Cambria Math" panose="02040503050406030204" pitchFamily="18" charset="0"/>
+                      </a:rPr>
+                      <m:t>𝑈𝑡𝑖𝑙𝑖𝑡𝑦</m:t>
+                    </m:r>
+                    <m:r>
+                      <a:rPr lang="en-US" sz="2400" i="1">
+                        <a:latin typeface="Cambria Math" panose="02040503050406030204" pitchFamily="18" charset="0"/>
+                      </a:rPr>
+                      <m:t>(</m:t>
+                    </m:r>
+                    <m:r>
+                      <a:rPr lang="en-US" sz="2400" i="1">
+                        <a:latin typeface="Cambria Math" panose="02040503050406030204" pitchFamily="18" charset="0"/>
+                      </a:rPr>
+                      <m:t>𝑠</m:t>
+                    </m:r>
+                    <m:r>
+                      <a:rPr lang="en-US" sz="2400" i="1">
+                        <a:latin typeface="Cambria Math" panose="02040503050406030204" pitchFamily="18" charset="0"/>
+                      </a:rPr>
+                      <m:t>)</m:t>
+                    </m:r>
+                  </m:oMath>
+                </a14:m>
+                <a:r>
+                  <a:rPr lang="en-US" sz="2400" dirty="0"/>
+                  <a:t>		+1 if x wins, -1 if o wins and 0 for a draw.</a:t>
+                </a:r>
+              </a:p>
+              <a:p>
+                <a:pPr marL="0" indent="0">
+                  <a:buNone/>
+                </a:pPr>
+                <a:r>
+                  <a:rPr lang="en-US" sz="2400" dirty="0"/>
+                  <a:t>			Utility is only defined for terminal states.</a:t>
+                </a:r>
+              </a:p>
+              <a:p>
+                <a:endParaRPr lang="en-US" sz="2400" dirty="0"/>
+              </a:p>
+            </p:txBody>
+          </p:sp>
+        </mc:Choice>
+        <mc:Fallback xmlns="">
+          <p:sp>
+            <p:nvSpPr>
+              <p:cNvPr id="3" name="Content Placeholder 2">
+                <a:extLst>
+                  <a:ext uri="{FF2B5EF4-FFF2-40B4-BE49-F238E27FC236}">
+                    <a16:creationId xmlns:a16="http://schemas.microsoft.com/office/drawing/2014/main" id="{5EF77323-E4B1-4168-B791-DFDF7C7ADB94}"/>
+                  </a:ext>
+                </a:extLst>
+              </p:cNvPr>
+              <p:cNvSpPr>
+                <a:spLocks noGrp="1" noRot="1" noChangeAspect="1" noMove="1" noResize="1" noEditPoints="1" noAdjustHandles="1" noChangeArrowheads="1" noChangeShapeType="1" noTextEdit="1"/>
+              </p:cNvSpPr>
+              <p:nvPr>
+                <p:ph idx="1"/>
+              </p:nvPr>
+            </p:nvSpPr>
+            <p:spPr>
+              <a:xfrm>
+                <a:off x="628650" y="2362199"/>
+                <a:ext cx="7981950" cy="3814763"/>
+              </a:xfrm>
+              <a:blipFill>
+                <a:blip r:embed="rId2"/>
+                <a:stretch>
+                  <a:fillRect l="-611" t="-2077" r="-840"/>
+                </a:stretch>
+              </a:blipFill>
+            </p:spPr>
+            <p:txBody>
+              <a:bodyPr/>
+              <a:lstStyle/>
+              <a:p>
+                <a:r>
+                  <a:rPr lang="en-US">
+                    <a:noFill/>
+                  </a:rPr>
+                  <a:t> </a:t>
+                </a:r>
+              </a:p>
+            </p:txBody>
+          </p:sp>
+        </mc:Fallback>
+      </mc:AlternateContent>
+      <p:pic>
+        <p:nvPicPr>
+          <p:cNvPr id="2050" name="Picture 2">
+            <a:extLst>
+              <a:ext uri="{FF2B5EF4-FFF2-40B4-BE49-F238E27FC236}">
+                <a16:creationId xmlns:a16="http://schemas.microsoft.com/office/drawing/2014/main" id="{F68A6481-403B-4C1E-92D1-373A514882D5}"/>
+              </a:ext>
+              <a:ext uri="{C183D7F6-B498-43B3-948B-1728B52AA6E4}">
+                <adec:decorative xmlns:adec="http://schemas.microsoft.com/office/drawing/2017/decorative" val="1"/>
+              </a:ext>
+            </a:extLst>
+          </p:cNvPr>
+          <p:cNvPicPr>
+            <a:picLocks noChangeAspect="1" noChangeArrowheads="1"/>
+          </p:cNvPicPr>
+          <p:nvPr/>
+        </p:nvPicPr>
+        <p:blipFill>
+          <a:blip r:embed="rId3" cstate="print">
+            <a:extLst>
+              <a:ext uri="{28A0092B-C50C-407E-A947-70E740481C1C}">
+                <a14:useLocalDpi xmlns:a14="http://schemas.microsoft.com/office/drawing/2010/main" val="0"/>
+              </a:ext>
+            </a:extLst>
+          </a:blip>
+          <a:srcRect/>
+          <a:stretch>
+            <a:fillRect/>
+          </a:stretch>
+        </p:blipFill>
+        <p:spPr bwMode="auto">
+          <a:xfrm>
+            <a:off x="5967397" y="401221"/>
+            <a:ext cx="2547953" cy="2265779"/>
+          </a:xfrm>
+          <a:prstGeom prst="rect">
+            <a:avLst/>
+          </a:prstGeom>
+          <a:noFill/>
+          <a:extLst>
+            <a:ext uri="{909E8E84-426E-40DD-AFC4-6F175D3DCCD1}">
+              <a14:hiddenFill xmlns:a14="http://schemas.microsoft.com/office/drawing/2010/main">
+                <a:solidFill>
+                  <a:srgbClr val="FFFFFF"/>
+                </a:solidFill>
+              </a14:hiddenFill>
+            </a:ext>
+          </a:extLst>
+        </p:spPr>
+      </p:pic>
+      <p:sp>
+        <p:nvSpPr>
+          <p:cNvPr id="4" name="Speech Bubble: Rectangle 3">
+            <a:extLst>
+              <a:ext uri="{FF2B5EF4-FFF2-40B4-BE49-F238E27FC236}">
+                <a16:creationId xmlns:a16="http://schemas.microsoft.com/office/drawing/2014/main" id="{FC16888F-411D-4B9A-B95F-9197D878E77C}"/>
+              </a:ext>
+            </a:extLst>
+          </p:cNvPr>
+          <p:cNvSpPr/>
+          <p:nvPr/>
+        </p:nvSpPr>
+        <p:spPr>
+          <a:xfrm>
+            <a:off x="838200" y="5414962"/>
+            <a:ext cx="2514600" cy="762000"/>
+          </a:xfrm>
+          <a:prstGeom prst="wedgeRectCallout">
+            <a:avLst>
+              <a:gd name="adj1" fmla="val 53330"/>
+              <a:gd name="adj2" fmla="val -187640"/>
+            </a:avLst>
+          </a:prstGeom>
+        </p:spPr>
+        <p:style>
+          <a:lnRef idx="3">
+            <a:schemeClr val="lt1"/>
+          </a:lnRef>
+          <a:fillRef idx="1">
+            <a:schemeClr val="accent6"/>
+          </a:fillRef>
+          <a:effectRef idx="1">
+            <a:schemeClr val="accent6"/>
+          </a:effectRef>
+          <a:fontRef idx="minor">
+            <a:schemeClr val="lt1"/>
+          </a:fontRef>
+        </p:style>
+        <p:txBody>
+          <a:bodyPr rtlCol="0" anchor="ctr"/>
+          <a:lstStyle/>
+          <a:p>
+            <a:pPr algn="ctr"/>
+            <a:r>
+              <a:rPr lang="en-US" sz="2000" dirty="0"/>
+              <a:t>Here player x is Max and player o is Min.</a:t>
+            </a:r>
+          </a:p>
+        </p:txBody>
+      </p:sp>
+      <p:sp>
+        <p:nvSpPr>
+          <p:cNvPr id="6" name="TextBox 5">
+            <a:extLst>
+              <a:ext uri="{FF2B5EF4-FFF2-40B4-BE49-F238E27FC236}">
+                <a16:creationId xmlns:a16="http://schemas.microsoft.com/office/drawing/2014/main" id="{269212AB-8DD7-9004-3B87-B2B1784AD06E}"/>
+              </a:ext>
+            </a:extLst>
+          </p:cNvPr>
+          <p:cNvSpPr txBox="1"/>
+          <p:nvPr/>
+        </p:nvSpPr>
+        <p:spPr>
+          <a:xfrm>
+            <a:off x="3562350" y="5943600"/>
+            <a:ext cx="5334000" cy="707886"/>
+          </a:xfrm>
+          <a:prstGeom prst="rect">
+            <a:avLst/>
+          </a:prstGeom>
+        </p:spPr>
+        <p:style>
+          <a:lnRef idx="3">
+            <a:schemeClr val="lt1"/>
+          </a:lnRef>
+          <a:fillRef idx="1">
+            <a:schemeClr val="accent2"/>
+          </a:fillRef>
+          <a:effectRef idx="1">
+            <a:schemeClr val="accent2"/>
+          </a:effectRef>
+          <a:fontRef idx="minor">
+            <a:schemeClr val="lt1"/>
+          </a:fontRef>
+        </p:style>
+        <p:txBody>
+          <a:bodyPr wrap="square" rtlCol="0">
+            <a:spAutoFit/>
+          </a:bodyPr>
+          <a:lstStyle/>
+          <a:p>
+            <a:r>
+              <a:rPr lang="en-US" sz="2000" b="1" dirty="0"/>
+              <a:t>Note</a:t>
+            </a:r>
+            <a:r>
+              <a:rPr lang="en-US" sz="2000" dirty="0"/>
+              <a:t>: This game still uses a goal-based agent that plans actions to reach a winning terminal  state!</a:t>
+            </a:r>
+          </a:p>
+        </p:txBody>
+      </p:sp>
+    </p:spTree>
+    <p:extLst>
+      <p:ext uri="{BB962C8B-B14F-4D97-AF65-F5344CB8AC3E}">
+        <p14:creationId xmlns:p14="http://schemas.microsoft.com/office/powerpoint/2010/main" val="872051194"/>
+      </p:ext>
+    </p:extLst>
+  </p:cSld>
+  <p:clrMapOvr>
+    <a:masterClrMapping/>
+  </p:clrMapOvr>
+</p:sld>
+</file>
+
+<file path=ppt/slides/slide50.xml><?xml version="1.0" encoding="utf-8"?>
 <p:sld xmlns:a="http://schemas.openxmlformats.org/drawingml/2006/main" xmlns:r="http://schemas.openxmlformats.org/officeDocument/2006/relationships" xmlns:p="http://schemas.openxmlformats.org/presentationml/2006/main">
   <p:cSld>
     <p:spTree>
@@ -46528,509 +47197,7 @@
 </p:sld>
 </file>
 
-<file path=ppt/slides/slide5.xml><?xml version="1.0" encoding="utf-8"?>
-<p:sld xmlns:a="http://schemas.openxmlformats.org/drawingml/2006/main" xmlns:r="http://schemas.openxmlformats.org/officeDocument/2006/relationships" xmlns:p="http://schemas.openxmlformats.org/presentationml/2006/main">
-  <p:cSld>
-    <p:spTree>
-      <p:nvGrpSpPr>
-        <p:cNvPr id="1" name=""/>
-        <p:cNvGrpSpPr/>
-        <p:nvPr/>
-      </p:nvGrpSpPr>
-      <p:grpSpPr>
-        <a:xfrm>
-          <a:off x="0" y="0"/>
-          <a:ext cx="0" cy="0"/>
-          <a:chOff x="0" y="0"/>
-          <a:chExt cx="0" cy="0"/>
-        </a:xfrm>
-      </p:grpSpPr>
-      <p:sp>
-        <p:nvSpPr>
-          <p:cNvPr id="2" name="Title 1">
-            <a:extLst>
-              <a:ext uri="{FF2B5EF4-FFF2-40B4-BE49-F238E27FC236}">
-                <a16:creationId xmlns:a16="http://schemas.microsoft.com/office/drawing/2014/main" id="{F0EB8DA0-F19D-42E7-B106-99DA6BC8B3C0}"/>
-              </a:ext>
-            </a:extLst>
-          </p:cNvPr>
-          <p:cNvSpPr>
-            <a:spLocks noGrp="1"/>
-          </p:cNvSpPr>
-          <p:nvPr>
-            <p:ph type="title"/>
-          </p:nvPr>
-        </p:nvSpPr>
-        <p:spPr/>
-        <p:txBody>
-          <a:bodyPr/>
-          <a:lstStyle/>
-          <a:p>
-            <a:r>
-              <a:rPr lang="en-US" dirty="0"/>
-              <a:t>Example: Tic-tac-toe</a:t>
-            </a:r>
-          </a:p>
-        </p:txBody>
-      </p:sp>
-      <mc:AlternateContent xmlns:mc="http://schemas.openxmlformats.org/markup-compatibility/2006" xmlns:a14="http://schemas.microsoft.com/office/drawing/2010/main">
-        <mc:Choice Requires="a14">
-          <p:sp>
-            <p:nvSpPr>
-              <p:cNvPr id="3" name="Content Placeholder 2">
-                <a:extLst>
-                  <a:ext uri="{FF2B5EF4-FFF2-40B4-BE49-F238E27FC236}">
-                    <a16:creationId xmlns:a16="http://schemas.microsoft.com/office/drawing/2014/main" id="{5EF77323-E4B1-4168-B791-DFDF7C7ADB94}"/>
-                  </a:ext>
-                </a:extLst>
-              </p:cNvPr>
-              <p:cNvSpPr>
-                <a:spLocks noGrp="1"/>
-              </p:cNvSpPr>
-              <p:nvPr>
-                <p:ph idx="1"/>
-              </p:nvPr>
-            </p:nvSpPr>
-            <p:spPr>
-              <a:xfrm>
-                <a:off x="628650" y="2362199"/>
-                <a:ext cx="7981950" cy="3814763"/>
-              </a:xfrm>
-            </p:spPr>
-            <p:txBody>
-              <a:bodyPr>
-                <a:normAutofit/>
-              </a:bodyPr>
-              <a:lstStyle/>
-              <a:p>
-                <a:pPr marL="0" indent="0">
-                  <a:buNone/>
-                </a:pPr>
-                <a14:m>
-                  <m:oMath xmlns:m="http://schemas.openxmlformats.org/officeDocument/2006/math">
-                    <m:sSub>
-                      <m:sSubPr>
-                        <m:ctrlPr>
-                          <a:rPr lang="en-US" sz="2400" i="1">
-                            <a:latin typeface="Cambria Math" panose="02040503050406030204" pitchFamily="18" charset="0"/>
-                          </a:rPr>
-                        </m:ctrlPr>
-                      </m:sSubPr>
-                      <m:e>
-                        <m:r>
-                          <a:rPr lang="en-US" sz="2400" i="1">
-                            <a:latin typeface="Cambria Math" panose="02040503050406030204" pitchFamily="18" charset="0"/>
-                          </a:rPr>
-                          <m:t>𝑠</m:t>
-                        </m:r>
-                      </m:e>
-                      <m:sub>
-                        <m:r>
-                          <a:rPr lang="en-US" sz="2400" i="1">
-                            <a:latin typeface="Cambria Math" panose="02040503050406030204" pitchFamily="18" charset="0"/>
-                          </a:rPr>
-                          <m:t>0</m:t>
-                        </m:r>
-                      </m:sub>
-                    </m:sSub>
-                  </m:oMath>
-                </a14:m>
-                <a:r>
-                  <a:rPr lang="en-US" sz="2400" dirty="0"/>
-                  <a:t> 			Empty board.</a:t>
-                </a:r>
-              </a:p>
-              <a:p>
-                <a:pPr marL="0" indent="0">
-                  <a:buNone/>
-                </a:pPr>
-                <a14:m>
-                  <m:oMath xmlns:m="http://schemas.openxmlformats.org/officeDocument/2006/math">
-                    <m:r>
-                      <a:rPr lang="en-US" sz="2400" i="1">
-                        <a:latin typeface="Cambria Math" panose="02040503050406030204" pitchFamily="18" charset="0"/>
-                      </a:rPr>
-                      <m:t>𝐴𝑐𝑡𝑖𝑜𝑛𝑠</m:t>
-                    </m:r>
-                    <m:r>
-                      <a:rPr lang="en-US" sz="2400" i="1">
-                        <a:latin typeface="Cambria Math" panose="02040503050406030204" pitchFamily="18" charset="0"/>
-                      </a:rPr>
-                      <m:t>(</m:t>
-                    </m:r>
-                    <m:r>
-                      <a:rPr lang="en-US" sz="2400" i="1">
-                        <a:latin typeface="Cambria Math" panose="02040503050406030204" pitchFamily="18" charset="0"/>
-                      </a:rPr>
-                      <m:t>𝑠</m:t>
-                    </m:r>
-                    <m:r>
-                      <a:rPr lang="en-US" sz="2400" i="1">
-                        <a:latin typeface="Cambria Math" panose="02040503050406030204" pitchFamily="18" charset="0"/>
-                      </a:rPr>
-                      <m:t>)</m:t>
-                    </m:r>
-                  </m:oMath>
-                </a14:m>
-                <a:r>
-                  <a:rPr lang="en-US" sz="2400" dirty="0"/>
-                  <a:t>		Play empty squares.</a:t>
-                </a:r>
-              </a:p>
-              <a:p>
-                <a:pPr marL="0" indent="0">
-                  <a:buNone/>
-                </a:pPr>
-                <a14:m>
-                  <m:oMath xmlns:m="http://schemas.openxmlformats.org/officeDocument/2006/math">
-                    <m:r>
-                      <a:rPr lang="en-US" sz="2400" i="1">
-                        <a:latin typeface="Cambria Math" panose="02040503050406030204" pitchFamily="18" charset="0"/>
-                      </a:rPr>
-                      <m:t>𝑅𝑒𝑠𝑢𝑙𝑡</m:t>
-                    </m:r>
-                    <m:r>
-                      <a:rPr lang="en-US" sz="2400" i="1">
-                        <a:latin typeface="Cambria Math" panose="02040503050406030204" pitchFamily="18" charset="0"/>
-                      </a:rPr>
-                      <m:t>(</m:t>
-                    </m:r>
-                    <m:r>
-                      <a:rPr lang="en-US" sz="2400" i="1">
-                        <a:latin typeface="Cambria Math" panose="02040503050406030204" pitchFamily="18" charset="0"/>
-                      </a:rPr>
-                      <m:t>𝑠</m:t>
-                    </m:r>
-                    <m:r>
-                      <a:rPr lang="en-US" sz="2400" i="1">
-                        <a:latin typeface="Cambria Math" panose="02040503050406030204" pitchFamily="18" charset="0"/>
-                      </a:rPr>
-                      <m:t>,</m:t>
-                    </m:r>
-                    <m:r>
-                      <a:rPr lang="en-US" sz="2400" i="1">
-                        <a:latin typeface="Cambria Math" panose="02040503050406030204" pitchFamily="18" charset="0"/>
-                      </a:rPr>
-                      <m:t>𝑎</m:t>
-                    </m:r>
-                    <m:r>
-                      <a:rPr lang="en-US" sz="2400" i="1">
-                        <a:latin typeface="Cambria Math" panose="02040503050406030204" pitchFamily="18" charset="0"/>
-                      </a:rPr>
-                      <m:t>)</m:t>
-                    </m:r>
-                  </m:oMath>
-                </a14:m>
-                <a:r>
-                  <a:rPr lang="en-US" sz="2400" dirty="0"/>
-                  <a:t>		Symbol (x/o) is placed on empty square.</a:t>
-                </a:r>
-              </a:p>
-              <a:p>
-                <a:pPr marL="0" indent="0">
-                  <a:buNone/>
-                </a:pPr>
-                <a14:m>
-                  <m:oMath xmlns:m="http://schemas.openxmlformats.org/officeDocument/2006/math">
-                    <m:r>
-                      <a:rPr lang="en-US" sz="2400" b="0" i="1" smtClean="0">
-                        <a:latin typeface="Cambria Math" panose="02040503050406030204" pitchFamily="18" charset="0"/>
-                      </a:rPr>
-                      <m:t>𝑇𝑒</m:t>
-                    </m:r>
-                    <m:r>
-                      <a:rPr lang="en-US" sz="2400" i="1">
-                        <a:latin typeface="Cambria Math" panose="02040503050406030204" pitchFamily="18" charset="0"/>
-                      </a:rPr>
-                      <m:t>𝑟𝑚𝑖𝑛𝑎𝑙</m:t>
-                    </m:r>
-                    <m:r>
-                      <a:rPr lang="en-US" sz="2400" i="1">
-                        <a:latin typeface="Cambria Math" panose="02040503050406030204" pitchFamily="18" charset="0"/>
-                      </a:rPr>
-                      <m:t>(</m:t>
-                    </m:r>
-                    <m:r>
-                      <a:rPr lang="en-US" sz="2400" i="1">
-                        <a:latin typeface="Cambria Math" panose="02040503050406030204" pitchFamily="18" charset="0"/>
-                      </a:rPr>
-                      <m:t>𝑠</m:t>
-                    </m:r>
-                    <m:r>
-                      <a:rPr lang="en-US" sz="2400" i="1">
-                        <a:latin typeface="Cambria Math" panose="02040503050406030204" pitchFamily="18" charset="0"/>
-                      </a:rPr>
-                      <m:t>)</m:t>
-                    </m:r>
-                  </m:oMath>
-                </a14:m>
-                <a:r>
-                  <a:rPr lang="en-US" sz="2400" dirty="0"/>
-                  <a:t>	 	Did a player win or is the game a draw?</a:t>
-                </a:r>
-              </a:p>
-              <a:p>
-                <a:pPr marL="0" indent="0">
-                  <a:buNone/>
-                </a:pPr>
-                <a14:m>
-                  <m:oMath xmlns:m="http://schemas.openxmlformats.org/officeDocument/2006/math">
-                    <m:r>
-                      <a:rPr lang="en-US" sz="2400" i="1">
-                        <a:latin typeface="Cambria Math" panose="02040503050406030204" pitchFamily="18" charset="0"/>
-                      </a:rPr>
-                      <m:t>𝑈𝑡𝑖𝑙𝑖𝑡𝑦</m:t>
-                    </m:r>
-                    <m:r>
-                      <a:rPr lang="en-US" sz="2400" i="1">
-                        <a:latin typeface="Cambria Math" panose="02040503050406030204" pitchFamily="18" charset="0"/>
-                      </a:rPr>
-                      <m:t>(</m:t>
-                    </m:r>
-                    <m:r>
-                      <a:rPr lang="en-US" sz="2400" i="1">
-                        <a:latin typeface="Cambria Math" panose="02040503050406030204" pitchFamily="18" charset="0"/>
-                      </a:rPr>
-                      <m:t>𝑠</m:t>
-                    </m:r>
-                    <m:r>
-                      <a:rPr lang="en-US" sz="2400" i="1">
-                        <a:latin typeface="Cambria Math" panose="02040503050406030204" pitchFamily="18" charset="0"/>
-                      </a:rPr>
-                      <m:t>)</m:t>
-                    </m:r>
-                  </m:oMath>
-                </a14:m>
-                <a:r>
-                  <a:rPr lang="en-US" sz="2400" dirty="0"/>
-                  <a:t>		+1 if x wins, -1 if o wins and 0 for a draw.</a:t>
-                </a:r>
-              </a:p>
-              <a:p>
-                <a:pPr marL="0" indent="0">
-                  <a:buNone/>
-                </a:pPr>
-                <a:r>
-                  <a:rPr lang="en-US" sz="2400" dirty="0"/>
-                  <a:t>			Utility is only defined for terminal states.</a:t>
-                </a:r>
-              </a:p>
-              <a:p>
-                <a:endParaRPr lang="en-US" sz="2400" dirty="0"/>
-              </a:p>
-            </p:txBody>
-          </p:sp>
-        </mc:Choice>
-        <mc:Fallback xmlns="">
-          <p:sp>
-            <p:nvSpPr>
-              <p:cNvPr id="3" name="Content Placeholder 2">
-                <a:extLst>
-                  <a:ext uri="{FF2B5EF4-FFF2-40B4-BE49-F238E27FC236}">
-                    <a16:creationId xmlns:a16="http://schemas.microsoft.com/office/drawing/2014/main" id="{5EF77323-E4B1-4168-B791-DFDF7C7ADB94}"/>
-                  </a:ext>
-                </a:extLst>
-              </p:cNvPr>
-              <p:cNvSpPr>
-                <a:spLocks noGrp="1" noRot="1" noChangeAspect="1" noMove="1" noResize="1" noEditPoints="1" noAdjustHandles="1" noChangeArrowheads="1" noChangeShapeType="1" noTextEdit="1"/>
-              </p:cNvSpPr>
-              <p:nvPr>
-                <p:ph idx="1"/>
-              </p:nvPr>
-            </p:nvSpPr>
-            <p:spPr>
-              <a:xfrm>
-                <a:off x="628650" y="2362199"/>
-                <a:ext cx="7981950" cy="3814763"/>
-              </a:xfrm>
-              <a:blipFill>
-                <a:blip r:embed="rId2"/>
-                <a:stretch>
-                  <a:fillRect l="-611" t="-2077" r="-840"/>
-                </a:stretch>
-              </a:blipFill>
-            </p:spPr>
-            <p:txBody>
-              <a:bodyPr/>
-              <a:lstStyle/>
-              <a:p>
-                <a:r>
-                  <a:rPr lang="en-US">
-                    <a:noFill/>
-                  </a:rPr>
-                  <a:t> </a:t>
-                </a:r>
-              </a:p>
-            </p:txBody>
-          </p:sp>
-        </mc:Fallback>
-      </mc:AlternateContent>
-      <p:pic>
-        <p:nvPicPr>
-          <p:cNvPr id="2050" name="Picture 2">
-            <a:extLst>
-              <a:ext uri="{FF2B5EF4-FFF2-40B4-BE49-F238E27FC236}">
-                <a16:creationId xmlns:a16="http://schemas.microsoft.com/office/drawing/2014/main" id="{F68A6481-403B-4C1E-92D1-373A514882D5}"/>
-              </a:ext>
-              <a:ext uri="{C183D7F6-B498-43B3-948B-1728B52AA6E4}">
-                <adec:decorative xmlns:adec="http://schemas.microsoft.com/office/drawing/2017/decorative" val="1"/>
-              </a:ext>
-            </a:extLst>
-          </p:cNvPr>
-          <p:cNvPicPr>
-            <a:picLocks noChangeAspect="1" noChangeArrowheads="1"/>
-          </p:cNvPicPr>
-          <p:nvPr/>
-        </p:nvPicPr>
-        <p:blipFill>
-          <a:blip r:embed="rId3" cstate="print">
-            <a:extLst>
-              <a:ext uri="{28A0092B-C50C-407E-A947-70E740481C1C}">
-                <a14:useLocalDpi xmlns:a14="http://schemas.microsoft.com/office/drawing/2010/main" val="0"/>
-              </a:ext>
-            </a:extLst>
-          </a:blip>
-          <a:srcRect/>
-          <a:stretch>
-            <a:fillRect/>
-          </a:stretch>
-        </p:blipFill>
-        <p:spPr bwMode="auto">
-          <a:xfrm>
-            <a:off x="5967397" y="401221"/>
-            <a:ext cx="2547953" cy="2265779"/>
-          </a:xfrm>
-          <a:prstGeom prst="rect">
-            <a:avLst/>
-          </a:prstGeom>
-          <a:noFill/>
-          <a:extLst>
-            <a:ext uri="{909E8E84-426E-40DD-AFC4-6F175D3DCCD1}">
-              <a14:hiddenFill xmlns:a14="http://schemas.microsoft.com/office/drawing/2010/main">
-                <a:solidFill>
-                  <a:srgbClr val="FFFFFF"/>
-                </a:solidFill>
-              </a14:hiddenFill>
-            </a:ext>
-          </a:extLst>
-        </p:spPr>
-      </p:pic>
-      <p:sp>
-        <p:nvSpPr>
-          <p:cNvPr id="4" name="Speech Bubble: Rectangle 3">
-            <a:extLst>
-              <a:ext uri="{FF2B5EF4-FFF2-40B4-BE49-F238E27FC236}">
-                <a16:creationId xmlns:a16="http://schemas.microsoft.com/office/drawing/2014/main" id="{FC16888F-411D-4B9A-B95F-9197D878E77C}"/>
-              </a:ext>
-            </a:extLst>
-          </p:cNvPr>
-          <p:cNvSpPr/>
-          <p:nvPr/>
-        </p:nvSpPr>
-        <p:spPr>
-          <a:xfrm>
-            <a:off x="838200" y="5414962"/>
-            <a:ext cx="2514600" cy="762000"/>
-          </a:xfrm>
-          <a:prstGeom prst="wedgeRectCallout">
-            <a:avLst>
-              <a:gd name="adj1" fmla="val 53330"/>
-              <a:gd name="adj2" fmla="val -187640"/>
-            </a:avLst>
-          </a:prstGeom>
-        </p:spPr>
-        <p:style>
-          <a:lnRef idx="3">
-            <a:schemeClr val="lt1"/>
-          </a:lnRef>
-          <a:fillRef idx="1">
-            <a:schemeClr val="accent6"/>
-          </a:fillRef>
-          <a:effectRef idx="1">
-            <a:schemeClr val="accent6"/>
-          </a:effectRef>
-          <a:fontRef idx="minor">
-            <a:schemeClr val="lt1"/>
-          </a:fontRef>
-        </p:style>
-        <p:txBody>
-          <a:bodyPr rtlCol="0" anchor="ctr"/>
-          <a:lstStyle/>
-          <a:p>
-            <a:pPr algn="ctr"/>
-            <a:r>
-              <a:rPr lang="en-US" sz="2000" dirty="0"/>
-              <a:t>Here player x is Max and player o is Min.</a:t>
-            </a:r>
-          </a:p>
-        </p:txBody>
-      </p:sp>
-      <p:sp>
-        <p:nvSpPr>
-          <p:cNvPr id="6" name="TextBox 5">
-            <a:extLst>
-              <a:ext uri="{FF2B5EF4-FFF2-40B4-BE49-F238E27FC236}">
-                <a16:creationId xmlns:a16="http://schemas.microsoft.com/office/drawing/2014/main" id="{269212AB-8DD7-9004-3B87-B2B1784AD06E}"/>
-              </a:ext>
-            </a:extLst>
-          </p:cNvPr>
-          <p:cNvSpPr txBox="1"/>
-          <p:nvPr/>
-        </p:nvSpPr>
-        <p:spPr>
-          <a:xfrm>
-            <a:off x="3562350" y="5943600"/>
-            <a:ext cx="5334000" cy="707886"/>
-          </a:xfrm>
-          <a:prstGeom prst="rect">
-            <a:avLst/>
-          </a:prstGeom>
-        </p:spPr>
-        <p:style>
-          <a:lnRef idx="3">
-            <a:schemeClr val="lt1"/>
-          </a:lnRef>
-          <a:fillRef idx="1">
-            <a:schemeClr val="accent2"/>
-          </a:fillRef>
-          <a:effectRef idx="1">
-            <a:schemeClr val="accent2"/>
-          </a:effectRef>
-          <a:fontRef idx="minor">
-            <a:schemeClr val="lt1"/>
-          </a:fontRef>
-        </p:style>
-        <p:txBody>
-          <a:bodyPr wrap="square" rtlCol="0">
-            <a:spAutoFit/>
-          </a:bodyPr>
-          <a:lstStyle/>
-          <a:p>
-            <a:r>
-              <a:rPr lang="en-US" sz="2000" b="1" dirty="0"/>
-              <a:t>Note</a:t>
-            </a:r>
-            <a:r>
-              <a:rPr lang="en-US" sz="2000" dirty="0"/>
-              <a:t>: This game still uses a goal-based agent that plans actions to reach a winning terminal  state!</a:t>
-            </a:r>
-          </a:p>
-        </p:txBody>
-      </p:sp>
-    </p:spTree>
-    <p:extLst>
-      <p:ext uri="{BB962C8B-B14F-4D97-AF65-F5344CB8AC3E}">
-        <p14:creationId xmlns:p14="http://schemas.microsoft.com/office/powerpoint/2010/main" val="872051194"/>
-      </p:ext>
-    </p:extLst>
-  </p:cSld>
-  <p:clrMapOvr>
-    <a:masterClrMapping/>
-  </p:clrMapOvr>
-</p:sld>
-</file>
-
-<file path=ppt/slides/slide50.xml><?xml version="1.0" encoding="utf-8"?>
+<file path=ppt/slides/slide51.xml><?xml version="1.0" encoding="utf-8"?>
 <p:sld xmlns:a="http://schemas.openxmlformats.org/drawingml/2006/main" xmlns:r="http://schemas.openxmlformats.org/officeDocument/2006/relationships" xmlns:p="http://schemas.openxmlformats.org/presentationml/2006/main">
   <p:cSld>
     <p:spTree>
@@ -47197,7 +47364,7 @@
 </p:sld>
 </file>
 
-<file path=ppt/slides/slide51.xml><?xml version="1.0" encoding="utf-8"?>
+<file path=ppt/slides/slide52.xml><?xml version="1.0" encoding="utf-8"?>
 <p:sld xmlns:a="http://schemas.openxmlformats.org/drawingml/2006/main" xmlns:r="http://schemas.openxmlformats.org/officeDocument/2006/relationships" xmlns:p="http://schemas.openxmlformats.org/presentationml/2006/main">
   <p:cSld>
     <p:bg>
@@ -47431,7 +47598,7 @@
 </p:sld>
 </file>
 
-<file path=ppt/slides/slide52.xml><?xml version="1.0" encoding="utf-8"?>
+<file path=ppt/slides/slide53.xml><?xml version="1.0" encoding="utf-8"?>
 <p:sld xmlns:a="http://schemas.openxmlformats.org/drawingml/2006/main" xmlns:r="http://schemas.openxmlformats.org/officeDocument/2006/relationships" xmlns:p="http://schemas.openxmlformats.org/presentationml/2006/main">
   <p:cSld>
     <p:spTree>
@@ -48022,7 +48189,7 @@
 </p:sld>
 </file>
 
-<file path=ppt/slides/slide53.xml><?xml version="1.0" encoding="utf-8"?>
+<file path=ppt/slides/slide54.xml><?xml version="1.0" encoding="utf-8"?>
 <p:sld xmlns:a="http://schemas.openxmlformats.org/drawingml/2006/main" xmlns:r="http://schemas.openxmlformats.org/officeDocument/2006/relationships" xmlns:p="http://schemas.openxmlformats.org/presentationml/2006/main">
   <p:cSld>
     <p:spTree>
@@ -48940,7 +49107,7 @@
 </p:sld>
 </file>
 
-<file path=ppt/slides/slide54.xml><?xml version="1.0" encoding="utf-8"?>
+<file path=ppt/slides/slide55.xml><?xml version="1.0" encoding="utf-8"?>
 <p:sld xmlns:a="http://schemas.openxmlformats.org/drawingml/2006/main" xmlns:r="http://schemas.openxmlformats.org/officeDocument/2006/relationships" xmlns:p="http://schemas.openxmlformats.org/presentationml/2006/main">
   <p:cSld>
     <p:spTree>
@@ -49084,7 +49251,7 @@
 </p:sld>
 </file>
 
-<file path=ppt/slides/slide55.xml><?xml version="1.0" encoding="utf-8"?>
+<file path=ppt/slides/slide56.xml><?xml version="1.0" encoding="utf-8"?>
 <p:sld xmlns:a="http://schemas.openxmlformats.org/drawingml/2006/main" xmlns:r="http://schemas.openxmlformats.org/officeDocument/2006/relationships" xmlns:p="http://schemas.openxmlformats.org/presentationml/2006/main">
   <p:cSld>
     <p:bg>
@@ -50092,7 +50259,7 @@
                 </a:r>
                 <a:r>
                   <a:rPr lang="en-US" sz="2800" dirty="0"/>
-                  <a:t>a graph defined by the initial state and the transition function containing all reachable states (e.g., chess positions).</a:t>
+                  <a:t>a graph defined by the initial state and the transition function, containing all reachable states (e.g., chess positions).</a:t>
                 </a:r>
               </a:p>
               <a:p>
@@ -50135,7 +50302,15 @@
                 </a:r>
                 <a:r>
                   <a:rPr lang="en-US" sz="2800" dirty="0"/>
-                  <a:t>: The game tree contains all redundant paths! It is equivalent to the search tree traversed by depth-first search (DFS). It’s worst-case size is</a:t>
+                  <a:t>: The game tree contains all redundant paths! It is equivalent to the search tree traversed by depth-first search (DFS). </a:t>
+                </a:r>
+                <a:r>
+                  <a:rPr lang="en-US" dirty="0"/>
+                  <a:t>The</a:t>
+                </a:r>
+                <a:r>
+                  <a:rPr lang="en-US" sz="2800" dirty="0"/>
+                  <a:t> worst-case time complexity is</a:t>
                 </a:r>
                 <a:br>
                   <a:rPr lang="en-US" sz="2800" dirty="0"/>
